--- a/fig4.pptx
+++ b/fig4.pptx
@@ -307,7 +307,7 @@
           <a:p>
             <a:fld id="{E6744CE3-0875-4B69-89C0-6F72D8139561}" type="datetimeFigureOut">
               <a:rPr lang="en-GB" smtClean="0"/>
-              <a:t>06/02/2025</a:t>
+              <a:t>05/06/2025</a:t>
             </a:fld>
             <a:endParaRPr lang="en-GB"/>
           </a:p>
@@ -477,7 +477,7 @@
           <a:p>
             <a:fld id="{E6744CE3-0875-4B69-89C0-6F72D8139561}" type="datetimeFigureOut">
               <a:rPr lang="en-GB" smtClean="0"/>
-              <a:t>06/02/2025</a:t>
+              <a:t>05/06/2025</a:t>
             </a:fld>
             <a:endParaRPr lang="en-GB"/>
           </a:p>
@@ -723,7 +723,7 @@
           <a:p>
             <a:fld id="{E6744CE3-0875-4B69-89C0-6F72D8139561}" type="datetimeFigureOut">
               <a:rPr lang="en-GB" smtClean="0"/>
-              <a:t>06/02/2025</a:t>
+              <a:t>05/06/2025</a:t>
             </a:fld>
             <a:endParaRPr lang="en-GB"/>
           </a:p>
@@ -1011,7 +1011,7 @@
           <a:p>
             <a:fld id="{E6744CE3-0875-4B69-89C0-6F72D8139561}" type="datetimeFigureOut">
               <a:rPr lang="en-GB" smtClean="0"/>
-              <a:t>06/02/2025</a:t>
+              <a:t>05/06/2025</a:t>
             </a:fld>
             <a:endParaRPr lang="en-GB"/>
           </a:p>
@@ -1433,7 +1433,7 @@
           <a:p>
             <a:fld id="{E6744CE3-0875-4B69-89C0-6F72D8139561}" type="datetimeFigureOut">
               <a:rPr lang="en-GB" smtClean="0"/>
-              <a:t>06/02/2025</a:t>
+              <a:t>05/06/2025</a:t>
             </a:fld>
             <a:endParaRPr lang="en-GB"/>
           </a:p>
@@ -1551,7 +1551,7 @@
           <a:p>
             <a:fld id="{E6744CE3-0875-4B69-89C0-6F72D8139561}" type="datetimeFigureOut">
               <a:rPr lang="en-GB" smtClean="0"/>
-              <a:t>06/02/2025</a:t>
+              <a:t>05/06/2025</a:t>
             </a:fld>
             <a:endParaRPr lang="en-GB"/>
           </a:p>
@@ -1646,7 +1646,7 @@
           <a:p>
             <a:fld id="{E6744CE3-0875-4B69-89C0-6F72D8139561}" type="datetimeFigureOut">
               <a:rPr lang="en-GB" smtClean="0"/>
-              <a:t>06/02/2025</a:t>
+              <a:t>05/06/2025</a:t>
             </a:fld>
             <a:endParaRPr lang="en-GB"/>
           </a:p>
@@ -1859,7 +1859,7 @@
           <a:p>
             <a:fld id="{E6744CE3-0875-4B69-89C0-6F72D8139561}" type="datetimeFigureOut">
               <a:rPr lang="en-GB" smtClean="0"/>
-              <a:t>06/02/2025</a:t>
+              <a:t>05/06/2025</a:t>
             </a:fld>
             <a:endParaRPr lang="en-GB"/>
           </a:p>
@@ -4008,6 +4008,2025 @@
           </a:prstGeom>
         </p:spPr>
       </p:pic>
+      <p:grpSp>
+        <p:nvGrpSpPr>
+          <p:cNvPr id="2" name="Groupe 1">
+            <a:extLst>
+              <a:ext uri="{FF2B5EF4-FFF2-40B4-BE49-F238E27FC236}">
+                <a16:creationId xmlns:a16="http://schemas.microsoft.com/office/drawing/2014/main" id="{A4BFAB79-DCFA-46DA-9E2F-812571AF4DC3}"/>
+              </a:ext>
+            </a:extLst>
+          </p:cNvPr>
+          <p:cNvGrpSpPr/>
+          <p:nvPr/>
+        </p:nvGrpSpPr>
+        <p:grpSpPr>
+          <a:xfrm>
+            <a:off x="-11761" y="7029150"/>
+            <a:ext cx="13080507" cy="3267895"/>
+            <a:chOff x="-11761" y="7029150"/>
+            <a:chExt cx="14496366" cy="3853226"/>
+          </a:xfrm>
+        </p:grpSpPr>
+        <p:pic>
+          <p:nvPicPr>
+            <p:cNvPr id="23" name="Image 22">
+              <a:extLst>
+                <a:ext uri="{FF2B5EF4-FFF2-40B4-BE49-F238E27FC236}">
+                  <a16:creationId xmlns:a16="http://schemas.microsoft.com/office/drawing/2014/main" id="{C7E03C22-9B5D-4E52-9105-A91C324EA5C7}"/>
+                </a:ext>
+              </a:extLst>
+            </p:cNvPr>
+            <p:cNvPicPr>
+              <a:picLocks noChangeAspect="1"/>
+            </p:cNvPicPr>
+            <p:nvPr/>
+          </p:nvPicPr>
+          <p:blipFill rotWithShape="1">
+            <a:blip r:embed="rId12" cstate="print">
+              <a:extLst>
+                <a:ext uri="{28A0092B-C50C-407E-A947-70E740481C1C}">
+                  <a14:useLocalDpi xmlns:a14="http://schemas.microsoft.com/office/drawing/2010/main" val="0"/>
+                </a:ext>
+              </a:extLst>
+            </a:blip>
+            <a:srcRect l="19698" t="44126" r="17367" b="45674"/>
+            <a:stretch/>
+          </p:blipFill>
+          <p:spPr>
+            <a:xfrm>
+              <a:off x="7110605" y="9267786"/>
+              <a:ext cx="6822810" cy="781737"/>
+            </a:xfrm>
+            <a:prstGeom prst="rect">
+              <a:avLst/>
+            </a:prstGeom>
+          </p:spPr>
+        </p:pic>
+        <p:pic>
+          <p:nvPicPr>
+            <p:cNvPr id="24" name="Image 23">
+              <a:extLst>
+                <a:ext uri="{FF2B5EF4-FFF2-40B4-BE49-F238E27FC236}">
+                  <a16:creationId xmlns:a16="http://schemas.microsoft.com/office/drawing/2014/main" id="{B1F55FBE-70F7-48C4-9694-B70938360A5B}"/>
+                </a:ext>
+              </a:extLst>
+            </p:cNvPr>
+            <p:cNvPicPr>
+              <a:picLocks noChangeAspect="1"/>
+            </p:cNvPicPr>
+            <p:nvPr/>
+          </p:nvPicPr>
+          <p:blipFill rotWithShape="1">
+            <a:blip r:embed="rId13" cstate="print">
+              <a:extLst>
+                <a:ext uri="{28A0092B-C50C-407E-A947-70E740481C1C}">
+                  <a14:useLocalDpi xmlns:a14="http://schemas.microsoft.com/office/drawing/2010/main" val="0"/>
+                </a:ext>
+              </a:extLst>
+            </a:blip>
+            <a:srcRect l="19698" t="44126" r="17368" b="45674"/>
+            <a:stretch/>
+          </p:blipFill>
+          <p:spPr>
+            <a:xfrm>
+              <a:off x="-11761" y="10100639"/>
+              <a:ext cx="6822809" cy="781737"/>
+            </a:xfrm>
+            <a:prstGeom prst="rect">
+              <a:avLst/>
+            </a:prstGeom>
+          </p:spPr>
+        </p:pic>
+        <p:pic>
+          <p:nvPicPr>
+            <p:cNvPr id="25" name="Image 24">
+              <a:extLst>
+                <a:ext uri="{FF2B5EF4-FFF2-40B4-BE49-F238E27FC236}">
+                  <a16:creationId xmlns:a16="http://schemas.microsoft.com/office/drawing/2014/main" id="{791037B1-A7F4-42E7-AE7B-17AD4445668A}"/>
+                </a:ext>
+              </a:extLst>
+            </p:cNvPr>
+            <p:cNvPicPr>
+              <a:picLocks noChangeAspect="1"/>
+            </p:cNvPicPr>
+            <p:nvPr/>
+          </p:nvPicPr>
+          <p:blipFill rotWithShape="1">
+            <a:blip r:embed="rId14" cstate="print">
+              <a:extLst>
+                <a:ext uri="{28A0092B-C50C-407E-A947-70E740481C1C}">
+                  <a14:useLocalDpi xmlns:a14="http://schemas.microsoft.com/office/drawing/2010/main" val="0"/>
+                </a:ext>
+              </a:extLst>
+            </a:blip>
+            <a:srcRect l="19698" t="44126" r="17367" b="45674"/>
+            <a:stretch/>
+          </p:blipFill>
+          <p:spPr>
+            <a:xfrm>
+              <a:off x="7110607" y="10100639"/>
+              <a:ext cx="6822809" cy="781737"/>
+            </a:xfrm>
+            <a:prstGeom prst="rect">
+              <a:avLst/>
+            </a:prstGeom>
+          </p:spPr>
+        </p:pic>
+        <p:grpSp>
+          <p:nvGrpSpPr>
+            <p:cNvPr id="26" name="Groupe 25">
+              <a:extLst>
+                <a:ext uri="{FF2B5EF4-FFF2-40B4-BE49-F238E27FC236}">
+                  <a16:creationId xmlns:a16="http://schemas.microsoft.com/office/drawing/2014/main" id="{7B9B19AC-AFC1-4B5E-B8BE-6E521E2A1DF6}"/>
+                </a:ext>
+              </a:extLst>
+            </p:cNvPr>
+            <p:cNvGrpSpPr/>
+            <p:nvPr/>
+          </p:nvGrpSpPr>
+          <p:grpSpPr>
+            <a:xfrm>
+              <a:off x="-11761" y="7029150"/>
+              <a:ext cx="14496366" cy="2115159"/>
+              <a:chOff x="15364749" y="12932770"/>
+              <a:chExt cx="14910965" cy="2175653"/>
+            </a:xfrm>
+          </p:grpSpPr>
+          <p:grpSp>
+            <p:nvGrpSpPr>
+              <p:cNvPr id="27" name="Groupe 26">
+                <a:extLst>
+                  <a:ext uri="{FF2B5EF4-FFF2-40B4-BE49-F238E27FC236}">
+                    <a16:creationId xmlns:a16="http://schemas.microsoft.com/office/drawing/2014/main" id="{AB4AA599-4F1D-4158-B1C8-854AFB7E5061}"/>
+                  </a:ext>
+                </a:extLst>
+              </p:cNvPr>
+              <p:cNvGrpSpPr/>
+              <p:nvPr/>
+            </p:nvGrpSpPr>
+            <p:grpSpPr>
+              <a:xfrm>
+                <a:off x="15364749" y="12932770"/>
+                <a:ext cx="14910965" cy="2175653"/>
+                <a:chOff x="15364749" y="12932770"/>
+                <a:chExt cx="14910965" cy="2175653"/>
+              </a:xfrm>
+            </p:grpSpPr>
+            <p:grpSp>
+              <p:nvGrpSpPr>
+                <p:cNvPr id="29" name="Groupe 28">
+                  <a:extLst>
+                    <a:ext uri="{FF2B5EF4-FFF2-40B4-BE49-F238E27FC236}">
+                      <a16:creationId xmlns:a16="http://schemas.microsoft.com/office/drawing/2014/main" id="{4A3A7994-A374-4E74-AB8D-C4817C528119}"/>
+                    </a:ext>
+                  </a:extLst>
+                </p:cNvPr>
+                <p:cNvGrpSpPr/>
+                <p:nvPr/>
+              </p:nvGrpSpPr>
+              <p:grpSpPr>
+                <a:xfrm>
+                  <a:off x="15364749" y="12932770"/>
+                  <a:ext cx="14910965" cy="2175653"/>
+                  <a:chOff x="-1" y="2208356"/>
+                  <a:chExt cx="14910965" cy="2175653"/>
+                </a:xfrm>
+              </p:grpSpPr>
+              <p:sp>
+                <p:nvSpPr>
+                  <p:cNvPr id="31" name="Rectangle 30">
+                    <a:extLst>
+                      <a:ext uri="{FF2B5EF4-FFF2-40B4-BE49-F238E27FC236}">
+                        <a16:creationId xmlns:a16="http://schemas.microsoft.com/office/drawing/2014/main" id="{DB30B550-AF2F-4D4F-8B9A-7131115A8E81}"/>
+                      </a:ext>
+                    </a:extLst>
+                  </p:cNvPr>
+                  <p:cNvSpPr/>
+                  <p:nvPr/>
+                </p:nvSpPr>
+                <p:spPr>
+                  <a:xfrm>
+                    <a:off x="-1" y="2208356"/>
+                    <a:ext cx="14344010" cy="2175653"/>
+                  </a:xfrm>
+                  <a:prstGeom prst="rect">
+                    <a:avLst/>
+                  </a:prstGeom>
+                  <a:noFill/>
+                  <a:ln w="19050">
+                    <a:solidFill>
+                      <a:schemeClr val="tx1"/>
+                    </a:solidFill>
+                  </a:ln>
+                </p:spPr>
+                <p:style>
+                  <a:lnRef idx="2">
+                    <a:schemeClr val="accent1">
+                      <a:shade val="50000"/>
+                    </a:schemeClr>
+                  </a:lnRef>
+                  <a:fillRef idx="1">
+                    <a:schemeClr val="accent1"/>
+                  </a:fillRef>
+                  <a:effectRef idx="0">
+                    <a:schemeClr val="accent1"/>
+                  </a:effectRef>
+                  <a:fontRef idx="minor">
+                    <a:schemeClr val="lt1"/>
+                  </a:fontRef>
+                </p:style>
+                <p:txBody>
+                  <a:bodyPr rtlCol="0" anchor="t"/>
+                  <a:lstStyle/>
+                  <a:p>
+                    <a:endParaRPr lang="fr-FR" sz="389" dirty="0">
+                      <a:solidFill>
+                        <a:sysClr val="windowText" lastClr="000000"/>
+                      </a:solidFill>
+                      <a:latin typeface="Arial" panose="020B0604020202020204" pitchFamily="34" charset="0"/>
+                      <a:cs typeface="Arial" panose="020B0604020202020204" pitchFamily="34" charset="0"/>
+                    </a:endParaRPr>
+                  </a:p>
+                </p:txBody>
+              </p:sp>
+              <p:sp>
+                <p:nvSpPr>
+                  <p:cNvPr id="32" name="Rectangle 31">
+                    <a:extLst>
+                      <a:ext uri="{FF2B5EF4-FFF2-40B4-BE49-F238E27FC236}">
+                        <a16:creationId xmlns:a16="http://schemas.microsoft.com/office/drawing/2014/main" id="{CA321B79-7293-4C1D-B621-FC1B2740C90E}"/>
+                      </a:ext>
+                    </a:extLst>
+                  </p:cNvPr>
+                  <p:cNvSpPr/>
+                  <p:nvPr/>
+                </p:nvSpPr>
+                <p:spPr>
+                  <a:xfrm>
+                    <a:off x="2431818" y="2365729"/>
+                    <a:ext cx="534525" cy="317902"/>
+                  </a:xfrm>
+                  <a:prstGeom prst="rect">
+                    <a:avLst/>
+                  </a:prstGeom>
+                  <a:solidFill>
+                    <a:srgbClr val="DCDCDC"/>
+                  </a:solidFill>
+                  <a:ln>
+                    <a:solidFill>
+                      <a:schemeClr val="tx1"/>
+                    </a:solidFill>
+                  </a:ln>
+                </p:spPr>
+                <p:style>
+                  <a:lnRef idx="2">
+                    <a:schemeClr val="accent1">
+                      <a:shade val="50000"/>
+                    </a:schemeClr>
+                  </a:lnRef>
+                  <a:fillRef idx="1">
+                    <a:schemeClr val="accent1"/>
+                  </a:fillRef>
+                  <a:effectRef idx="0">
+                    <a:schemeClr val="accent1"/>
+                  </a:effectRef>
+                  <a:fontRef idx="minor">
+                    <a:schemeClr val="lt1"/>
+                  </a:fontRef>
+                </p:style>
+                <p:txBody>
+                  <a:bodyPr rtlCol="0" anchor="ctr"/>
+                  <a:lstStyle/>
+                  <a:p>
+                    <a:pPr algn="ctr"/>
+                    <a:endParaRPr lang="fr-FR" sz="1750" dirty="0">
+                      <a:latin typeface="Arial" panose="020B0604020202020204" pitchFamily="34" charset="0"/>
+                      <a:cs typeface="Arial" panose="020B0604020202020204" pitchFamily="34" charset="0"/>
+                    </a:endParaRPr>
+                  </a:p>
+                </p:txBody>
+              </p:sp>
+              <p:sp>
+                <p:nvSpPr>
+                  <p:cNvPr id="33" name="ZoneTexte 32">
+                    <a:extLst>
+                      <a:ext uri="{FF2B5EF4-FFF2-40B4-BE49-F238E27FC236}">
+                        <a16:creationId xmlns:a16="http://schemas.microsoft.com/office/drawing/2014/main" id="{41FF9411-787A-4D84-8E90-8D6E04FE72EB}"/>
+                      </a:ext>
+                    </a:extLst>
+                  </p:cNvPr>
+                  <p:cNvSpPr txBox="1"/>
+                  <p:nvPr/>
+                </p:nvSpPr>
+                <p:spPr>
+                  <a:xfrm>
+                    <a:off x="2966343" y="2347439"/>
+                    <a:ext cx="1978959" cy="410611"/>
+                  </a:xfrm>
+                  <a:prstGeom prst="rect">
+                    <a:avLst/>
+                  </a:prstGeom>
+                  <a:noFill/>
+                </p:spPr>
+                <p:txBody>
+                  <a:bodyPr wrap="square" rtlCol="0">
+                    <a:spAutoFit/>
+                  </a:bodyPr>
+                  <a:lstStyle/>
+                  <a:p>
+                    <a:r>
+                      <a:rPr lang="fr-FR" sz="1600" dirty="0">
+                        <a:latin typeface="Arial" panose="020B0604020202020204" pitchFamily="34" charset="0"/>
+                        <a:cs typeface="Arial" panose="020B0604020202020204" pitchFamily="34" charset="0"/>
+                      </a:rPr>
+                      <a:t>% Not tested</a:t>
+                    </a:r>
+                  </a:p>
+                </p:txBody>
+              </p:sp>
+              <p:sp>
+                <p:nvSpPr>
+                  <p:cNvPr id="34" name="Rectangle 33">
+                    <a:extLst>
+                      <a:ext uri="{FF2B5EF4-FFF2-40B4-BE49-F238E27FC236}">
+                        <a16:creationId xmlns:a16="http://schemas.microsoft.com/office/drawing/2014/main" id="{50E52BB0-313F-465C-9BF5-46010AAB3B24}"/>
+                      </a:ext>
+                    </a:extLst>
+                  </p:cNvPr>
+                  <p:cNvSpPr/>
+                  <p:nvPr/>
+                </p:nvSpPr>
+                <p:spPr>
+                  <a:xfrm>
+                    <a:off x="6709544" y="2347439"/>
+                    <a:ext cx="534525" cy="317902"/>
+                  </a:xfrm>
+                  <a:prstGeom prst="rect">
+                    <a:avLst/>
+                  </a:prstGeom>
+                  <a:solidFill>
+                    <a:schemeClr val="bg1"/>
+                  </a:solidFill>
+                  <a:ln>
+                    <a:solidFill>
+                      <a:schemeClr val="tx1"/>
+                    </a:solidFill>
+                  </a:ln>
+                </p:spPr>
+                <p:style>
+                  <a:lnRef idx="2">
+                    <a:schemeClr val="accent1">
+                      <a:shade val="50000"/>
+                    </a:schemeClr>
+                  </a:lnRef>
+                  <a:fillRef idx="1">
+                    <a:schemeClr val="accent1"/>
+                  </a:fillRef>
+                  <a:effectRef idx="0">
+                    <a:schemeClr val="accent1"/>
+                  </a:effectRef>
+                  <a:fontRef idx="minor">
+                    <a:schemeClr val="lt1"/>
+                  </a:fontRef>
+                </p:style>
+                <p:txBody>
+                  <a:bodyPr rtlCol="0" anchor="ctr"/>
+                  <a:lstStyle/>
+                  <a:p>
+                    <a:pPr algn="ctr"/>
+                    <a:endParaRPr lang="fr-FR" sz="1750" dirty="0">
+                      <a:latin typeface="Arial" panose="020B0604020202020204" pitchFamily="34" charset="0"/>
+                      <a:cs typeface="Arial" panose="020B0604020202020204" pitchFamily="34" charset="0"/>
+                    </a:endParaRPr>
+                  </a:p>
+                </p:txBody>
+              </p:sp>
+              <p:sp>
+                <p:nvSpPr>
+                  <p:cNvPr id="35" name="ZoneTexte 34">
+                    <a:extLst>
+                      <a:ext uri="{FF2B5EF4-FFF2-40B4-BE49-F238E27FC236}">
+                        <a16:creationId xmlns:a16="http://schemas.microsoft.com/office/drawing/2014/main" id="{2F5D3678-58A4-422C-8A35-F2F2955D860E}"/>
+                      </a:ext>
+                    </a:extLst>
+                  </p:cNvPr>
+                  <p:cNvSpPr txBox="1"/>
+                  <p:nvPr/>
+                </p:nvSpPr>
+                <p:spPr>
+                  <a:xfrm>
+                    <a:off x="7242395" y="2312982"/>
+                    <a:ext cx="1978959" cy="410611"/>
+                  </a:xfrm>
+                  <a:prstGeom prst="rect">
+                    <a:avLst/>
+                  </a:prstGeom>
+                  <a:noFill/>
+                </p:spPr>
+                <p:txBody>
+                  <a:bodyPr wrap="square" rtlCol="0">
+                    <a:spAutoFit/>
+                  </a:bodyPr>
+                  <a:lstStyle/>
+                  <a:p>
+                    <a:r>
+                      <a:rPr lang="fr-FR" sz="1600" dirty="0">
+                        <a:latin typeface="Arial" panose="020B0604020202020204" pitchFamily="34" charset="0"/>
+                        <a:cs typeface="Arial" panose="020B0604020202020204" pitchFamily="34" charset="0"/>
+                      </a:rPr>
+                      <a:t>% Susceptible</a:t>
+                    </a:r>
+                  </a:p>
+                </p:txBody>
+              </p:sp>
+              <p:sp>
+                <p:nvSpPr>
+                  <p:cNvPr id="36" name="Rectangle 35">
+                    <a:extLst>
+                      <a:ext uri="{FF2B5EF4-FFF2-40B4-BE49-F238E27FC236}">
+                        <a16:creationId xmlns:a16="http://schemas.microsoft.com/office/drawing/2014/main" id="{56E1D182-CAE2-467D-82F2-1B3109A12135}"/>
+                      </a:ext>
+                    </a:extLst>
+                  </p:cNvPr>
+                  <p:cNvSpPr/>
+                  <p:nvPr/>
+                </p:nvSpPr>
+                <p:spPr>
+                  <a:xfrm>
+                    <a:off x="10992549" y="2364412"/>
+                    <a:ext cx="534525" cy="317902"/>
+                  </a:xfrm>
+                  <a:prstGeom prst="rect">
+                    <a:avLst/>
+                  </a:prstGeom>
+                  <a:gradFill flip="none" rotWithShape="1">
+                    <a:gsLst>
+                      <a:gs pos="0">
+                        <a:srgbClr val="23C997"/>
+                      </a:gs>
+                      <a:gs pos="7000">
+                        <a:srgbClr val="DCB702"/>
+                      </a:gs>
+                      <a:gs pos="82000">
+                        <a:srgbClr val="FF7F40"/>
+                      </a:gs>
+                      <a:gs pos="27000">
+                        <a:srgbClr val="3E7CA5"/>
+                      </a:gs>
+                      <a:gs pos="16000">
+                        <a:srgbClr val="7EC8E3"/>
+                      </a:gs>
+                      <a:gs pos="70000">
+                        <a:srgbClr val="EE637F"/>
+                      </a:gs>
+                      <a:gs pos="59000">
+                        <a:srgbClr val="62C966"/>
+                      </a:gs>
+                      <a:gs pos="47000">
+                        <a:srgbClr val="B155A7"/>
+                      </a:gs>
+                      <a:gs pos="38000">
+                        <a:srgbClr val="D38ACB"/>
+                      </a:gs>
+                      <a:gs pos="93000">
+                        <a:srgbClr val="BCED54"/>
+                      </a:gs>
+                    </a:gsLst>
+                    <a:lin ang="0" scaled="1"/>
+                    <a:tileRect/>
+                  </a:gradFill>
+                  <a:ln>
+                    <a:solidFill>
+                      <a:schemeClr val="tx1"/>
+                    </a:solidFill>
+                  </a:ln>
+                </p:spPr>
+                <p:style>
+                  <a:lnRef idx="2">
+                    <a:schemeClr val="accent1">
+                      <a:shade val="50000"/>
+                    </a:schemeClr>
+                  </a:lnRef>
+                  <a:fillRef idx="1">
+                    <a:schemeClr val="accent1"/>
+                  </a:fillRef>
+                  <a:effectRef idx="0">
+                    <a:schemeClr val="accent1"/>
+                  </a:effectRef>
+                  <a:fontRef idx="minor">
+                    <a:schemeClr val="lt1"/>
+                  </a:fontRef>
+                </p:style>
+                <p:txBody>
+                  <a:bodyPr rtlCol="0" anchor="ctr"/>
+                  <a:lstStyle/>
+                  <a:p>
+                    <a:pPr algn="ctr"/>
+                    <a:endParaRPr lang="fr-FR" sz="972" dirty="0">
+                      <a:solidFill>
+                        <a:schemeClr val="tx1"/>
+                      </a:solidFill>
+                      <a:latin typeface="Arial" panose="020B0604020202020204" pitchFamily="34" charset="0"/>
+                      <a:cs typeface="Arial" panose="020B0604020202020204" pitchFamily="34" charset="0"/>
+                    </a:endParaRPr>
+                  </a:p>
+                </p:txBody>
+              </p:sp>
+              <p:sp>
+                <p:nvSpPr>
+                  <p:cNvPr id="37" name="ZoneTexte 36">
+                    <a:extLst>
+                      <a:ext uri="{FF2B5EF4-FFF2-40B4-BE49-F238E27FC236}">
+                        <a16:creationId xmlns:a16="http://schemas.microsoft.com/office/drawing/2014/main" id="{8833109E-C617-41CD-963A-57E049FE18B2}"/>
+                      </a:ext>
+                    </a:extLst>
+                  </p:cNvPr>
+                  <p:cNvSpPr txBox="1"/>
+                  <p:nvPr/>
+                </p:nvSpPr>
+                <p:spPr>
+                  <a:xfrm>
+                    <a:off x="11527074" y="2338697"/>
+                    <a:ext cx="1978959" cy="410611"/>
+                  </a:xfrm>
+                  <a:prstGeom prst="rect">
+                    <a:avLst/>
+                  </a:prstGeom>
+                  <a:noFill/>
+                </p:spPr>
+                <p:txBody>
+                  <a:bodyPr wrap="square" rtlCol="0">
+                    <a:spAutoFit/>
+                  </a:bodyPr>
+                  <a:lstStyle/>
+                  <a:p>
+                    <a:r>
+                      <a:rPr lang="fr-FR" sz="1600" dirty="0">
+                        <a:latin typeface="Arial" panose="020B0604020202020204" pitchFamily="34" charset="0"/>
+                        <a:cs typeface="Arial" panose="020B0604020202020204" pitchFamily="34" charset="0"/>
+                      </a:rPr>
+                      <a:t>% Resistant</a:t>
+                    </a:r>
+                  </a:p>
+                </p:txBody>
+              </p:sp>
+              <p:sp>
+                <p:nvSpPr>
+                  <p:cNvPr id="38" name="Ellipse 37">
+                    <a:extLst>
+                      <a:ext uri="{FF2B5EF4-FFF2-40B4-BE49-F238E27FC236}">
+                        <a16:creationId xmlns:a16="http://schemas.microsoft.com/office/drawing/2014/main" id="{644C6C82-A9B6-49CC-97ED-9DFDE9B9CD48}"/>
+                      </a:ext>
+                    </a:extLst>
+                  </p:cNvPr>
+                  <p:cNvSpPr/>
+                  <p:nvPr/>
+                </p:nvSpPr>
+                <p:spPr>
+                  <a:xfrm>
+                    <a:off x="78519" y="3361858"/>
+                    <a:ext cx="210820" cy="210821"/>
+                  </a:xfrm>
+                  <a:prstGeom prst="ellipse">
+                    <a:avLst/>
+                  </a:prstGeom>
+                  <a:solidFill>
+                    <a:srgbClr val="23C997"/>
+                  </a:solidFill>
+                  <a:ln>
+                    <a:noFill/>
+                  </a:ln>
+                </p:spPr>
+                <p:style>
+                  <a:lnRef idx="2">
+                    <a:schemeClr val="accent1">
+                      <a:shade val="50000"/>
+                    </a:schemeClr>
+                  </a:lnRef>
+                  <a:fillRef idx="1">
+                    <a:schemeClr val="accent1"/>
+                  </a:fillRef>
+                  <a:effectRef idx="0">
+                    <a:schemeClr val="accent1"/>
+                  </a:effectRef>
+                  <a:fontRef idx="minor">
+                    <a:schemeClr val="lt1"/>
+                  </a:fontRef>
+                </p:style>
+                <p:txBody>
+                  <a:bodyPr rtlCol="0" anchor="ctr"/>
+                  <a:lstStyle/>
+                  <a:p>
+                    <a:pPr algn="ctr"/>
+                    <a:endParaRPr lang="fr-FR" sz="1750" dirty="0">
+                      <a:latin typeface="Arial" panose="020B0604020202020204" pitchFamily="34" charset="0"/>
+                      <a:cs typeface="Arial" panose="020B0604020202020204" pitchFamily="34" charset="0"/>
+                    </a:endParaRPr>
+                  </a:p>
+                </p:txBody>
+              </p:sp>
+              <p:sp>
+                <p:nvSpPr>
+                  <p:cNvPr id="39" name="Ellipse 38">
+                    <a:extLst>
+                      <a:ext uri="{FF2B5EF4-FFF2-40B4-BE49-F238E27FC236}">
+                        <a16:creationId xmlns:a16="http://schemas.microsoft.com/office/drawing/2014/main" id="{1B42492B-9548-4F46-B983-9515BC62A61E}"/>
+                      </a:ext>
+                    </a:extLst>
+                  </p:cNvPr>
+                  <p:cNvSpPr/>
+                  <p:nvPr/>
+                </p:nvSpPr>
+                <p:spPr>
+                  <a:xfrm>
+                    <a:off x="3332763" y="3351544"/>
+                    <a:ext cx="210820" cy="210820"/>
+                  </a:xfrm>
+                  <a:prstGeom prst="ellipse">
+                    <a:avLst/>
+                  </a:prstGeom>
+                  <a:solidFill>
+                    <a:srgbClr val="3E7CA5"/>
+                  </a:solidFill>
+                  <a:ln>
+                    <a:noFill/>
+                  </a:ln>
+                </p:spPr>
+                <p:style>
+                  <a:lnRef idx="2">
+                    <a:schemeClr val="accent1">
+                      <a:shade val="50000"/>
+                    </a:schemeClr>
+                  </a:lnRef>
+                  <a:fillRef idx="1">
+                    <a:schemeClr val="accent1"/>
+                  </a:fillRef>
+                  <a:effectRef idx="0">
+                    <a:schemeClr val="accent1"/>
+                  </a:effectRef>
+                  <a:fontRef idx="minor">
+                    <a:schemeClr val="lt1"/>
+                  </a:fontRef>
+                </p:style>
+                <p:txBody>
+                  <a:bodyPr rtlCol="0" anchor="ctr"/>
+                  <a:lstStyle/>
+                  <a:p>
+                    <a:pPr algn="ctr"/>
+                    <a:endParaRPr lang="fr-FR" sz="1750" dirty="0">
+                      <a:latin typeface="Arial" panose="020B0604020202020204" pitchFamily="34" charset="0"/>
+                      <a:cs typeface="Arial" panose="020B0604020202020204" pitchFamily="34" charset="0"/>
+                    </a:endParaRPr>
+                  </a:p>
+                </p:txBody>
+              </p:sp>
+              <p:sp>
+                <p:nvSpPr>
+                  <p:cNvPr id="40" name="Ellipse 39">
+                    <a:extLst>
+                      <a:ext uri="{FF2B5EF4-FFF2-40B4-BE49-F238E27FC236}">
+                        <a16:creationId xmlns:a16="http://schemas.microsoft.com/office/drawing/2014/main" id="{C534A962-4A5A-48BB-8214-DA5B020BDE3D}"/>
+                      </a:ext>
+                    </a:extLst>
+                  </p:cNvPr>
+                  <p:cNvSpPr/>
+                  <p:nvPr/>
+                </p:nvSpPr>
+                <p:spPr>
+                  <a:xfrm>
+                    <a:off x="7203237" y="3361858"/>
+                    <a:ext cx="210820" cy="210821"/>
+                  </a:xfrm>
+                  <a:prstGeom prst="ellipse">
+                    <a:avLst/>
+                  </a:prstGeom>
+                  <a:solidFill>
+                    <a:srgbClr val="B155A7"/>
+                  </a:solidFill>
+                  <a:ln>
+                    <a:noFill/>
+                  </a:ln>
+                </p:spPr>
+                <p:style>
+                  <a:lnRef idx="2">
+                    <a:schemeClr val="accent1">
+                      <a:shade val="50000"/>
+                    </a:schemeClr>
+                  </a:lnRef>
+                  <a:fillRef idx="1">
+                    <a:schemeClr val="accent1"/>
+                  </a:fillRef>
+                  <a:effectRef idx="0">
+                    <a:schemeClr val="accent1"/>
+                  </a:effectRef>
+                  <a:fontRef idx="minor">
+                    <a:schemeClr val="lt1"/>
+                  </a:fontRef>
+                </p:style>
+                <p:txBody>
+                  <a:bodyPr rtlCol="0" anchor="ctr"/>
+                  <a:lstStyle/>
+                  <a:p>
+                    <a:pPr algn="ctr"/>
+                    <a:endParaRPr lang="fr-FR" sz="1750" dirty="0">
+                      <a:latin typeface="Arial" panose="020B0604020202020204" pitchFamily="34" charset="0"/>
+                      <a:cs typeface="Arial" panose="020B0604020202020204" pitchFamily="34" charset="0"/>
+                    </a:endParaRPr>
+                  </a:p>
+                </p:txBody>
+              </p:sp>
+              <p:sp>
+                <p:nvSpPr>
+                  <p:cNvPr id="41" name="Ellipse 40">
+                    <a:extLst>
+                      <a:ext uri="{FF2B5EF4-FFF2-40B4-BE49-F238E27FC236}">
+                        <a16:creationId xmlns:a16="http://schemas.microsoft.com/office/drawing/2014/main" id="{3C785ED4-332F-4647-AE76-A407F5AEBD77}"/>
+                      </a:ext>
+                    </a:extLst>
+                  </p:cNvPr>
+                  <p:cNvSpPr/>
+                  <p:nvPr/>
+                </p:nvSpPr>
+                <p:spPr>
+                  <a:xfrm>
+                    <a:off x="10765595" y="3361858"/>
+                    <a:ext cx="210820" cy="210821"/>
+                  </a:xfrm>
+                  <a:prstGeom prst="ellipse">
+                    <a:avLst/>
+                  </a:prstGeom>
+                  <a:solidFill>
+                    <a:srgbClr val="FDAC76"/>
+                  </a:solidFill>
+                  <a:ln>
+                    <a:noFill/>
+                  </a:ln>
+                </p:spPr>
+                <p:style>
+                  <a:lnRef idx="2">
+                    <a:schemeClr val="accent1">
+                      <a:shade val="50000"/>
+                    </a:schemeClr>
+                  </a:lnRef>
+                  <a:fillRef idx="1">
+                    <a:schemeClr val="accent1"/>
+                  </a:fillRef>
+                  <a:effectRef idx="0">
+                    <a:schemeClr val="accent1"/>
+                  </a:effectRef>
+                  <a:fontRef idx="minor">
+                    <a:schemeClr val="lt1"/>
+                  </a:fontRef>
+                </p:style>
+                <p:txBody>
+                  <a:bodyPr rtlCol="0" anchor="ctr"/>
+                  <a:lstStyle/>
+                  <a:p>
+                    <a:pPr algn="ctr"/>
+                    <a:endParaRPr lang="fr-FR" sz="1750" dirty="0">
+                      <a:latin typeface="Arial" panose="020B0604020202020204" pitchFamily="34" charset="0"/>
+                      <a:cs typeface="Arial" panose="020B0604020202020204" pitchFamily="34" charset="0"/>
+                    </a:endParaRPr>
+                  </a:p>
+                </p:txBody>
+              </p:sp>
+              <p:sp>
+                <p:nvSpPr>
+                  <p:cNvPr id="42" name="Ellipse 41">
+                    <a:extLst>
+                      <a:ext uri="{FF2B5EF4-FFF2-40B4-BE49-F238E27FC236}">
+                        <a16:creationId xmlns:a16="http://schemas.microsoft.com/office/drawing/2014/main" id="{A3E2D571-D500-408A-8026-174FDB99A2D6}"/>
+                      </a:ext>
+                    </a:extLst>
+                  </p:cNvPr>
+                  <p:cNvSpPr/>
+                  <p:nvPr/>
+                </p:nvSpPr>
+                <p:spPr>
+                  <a:xfrm>
+                    <a:off x="78519" y="3668355"/>
+                    <a:ext cx="210820" cy="210821"/>
+                  </a:xfrm>
+                  <a:prstGeom prst="ellipse">
+                    <a:avLst/>
+                  </a:prstGeom>
+                  <a:solidFill>
+                    <a:srgbClr val="DCB702"/>
+                  </a:solidFill>
+                  <a:ln>
+                    <a:noFill/>
+                  </a:ln>
+                </p:spPr>
+                <p:style>
+                  <a:lnRef idx="2">
+                    <a:schemeClr val="accent1">
+                      <a:shade val="50000"/>
+                    </a:schemeClr>
+                  </a:lnRef>
+                  <a:fillRef idx="1">
+                    <a:schemeClr val="accent1"/>
+                  </a:fillRef>
+                  <a:effectRef idx="0">
+                    <a:schemeClr val="accent1"/>
+                  </a:effectRef>
+                  <a:fontRef idx="minor">
+                    <a:schemeClr val="lt1"/>
+                  </a:fontRef>
+                </p:style>
+                <p:txBody>
+                  <a:bodyPr rtlCol="0" anchor="ctr"/>
+                  <a:lstStyle/>
+                  <a:p>
+                    <a:pPr algn="ctr"/>
+                    <a:endParaRPr lang="fr-FR" sz="1750" dirty="0">
+                      <a:latin typeface="Arial" panose="020B0604020202020204" pitchFamily="34" charset="0"/>
+                      <a:cs typeface="Arial" panose="020B0604020202020204" pitchFamily="34" charset="0"/>
+                    </a:endParaRPr>
+                  </a:p>
+                </p:txBody>
+              </p:sp>
+              <p:sp>
+                <p:nvSpPr>
+                  <p:cNvPr id="43" name="Ellipse 42">
+                    <a:extLst>
+                      <a:ext uri="{FF2B5EF4-FFF2-40B4-BE49-F238E27FC236}">
+                        <a16:creationId xmlns:a16="http://schemas.microsoft.com/office/drawing/2014/main" id="{654F718F-8AA6-4A32-8F47-ED0F732C1D4A}"/>
+                      </a:ext>
+                    </a:extLst>
+                  </p:cNvPr>
+                  <p:cNvSpPr/>
+                  <p:nvPr/>
+                </p:nvSpPr>
+                <p:spPr>
+                  <a:xfrm>
+                    <a:off x="3332763" y="3658041"/>
+                    <a:ext cx="210820" cy="210820"/>
+                  </a:xfrm>
+                  <a:prstGeom prst="ellipse">
+                    <a:avLst/>
+                  </a:prstGeom>
+                  <a:solidFill>
+                    <a:srgbClr val="F2B6EB"/>
+                  </a:solidFill>
+                  <a:ln>
+                    <a:noFill/>
+                  </a:ln>
+                </p:spPr>
+                <p:style>
+                  <a:lnRef idx="2">
+                    <a:schemeClr val="accent1">
+                      <a:shade val="50000"/>
+                    </a:schemeClr>
+                  </a:lnRef>
+                  <a:fillRef idx="1">
+                    <a:schemeClr val="accent1"/>
+                  </a:fillRef>
+                  <a:effectRef idx="0">
+                    <a:schemeClr val="accent1"/>
+                  </a:effectRef>
+                  <a:fontRef idx="minor">
+                    <a:schemeClr val="lt1"/>
+                  </a:fontRef>
+                </p:style>
+                <p:txBody>
+                  <a:bodyPr rtlCol="0" anchor="ctr"/>
+                  <a:lstStyle/>
+                  <a:p>
+                    <a:pPr algn="ctr"/>
+                    <a:endParaRPr lang="fr-FR" sz="1750" dirty="0">
+                      <a:latin typeface="Arial" panose="020B0604020202020204" pitchFamily="34" charset="0"/>
+                      <a:cs typeface="Arial" panose="020B0604020202020204" pitchFamily="34" charset="0"/>
+                    </a:endParaRPr>
+                  </a:p>
+                </p:txBody>
+              </p:sp>
+              <p:sp>
+                <p:nvSpPr>
+                  <p:cNvPr id="44" name="Ellipse 43">
+                    <a:extLst>
+                      <a:ext uri="{FF2B5EF4-FFF2-40B4-BE49-F238E27FC236}">
+                        <a16:creationId xmlns:a16="http://schemas.microsoft.com/office/drawing/2014/main" id="{83C2E6CD-3F02-4E7D-B017-06BEF60FA54E}"/>
+                      </a:ext>
+                    </a:extLst>
+                  </p:cNvPr>
+                  <p:cNvSpPr/>
+                  <p:nvPr/>
+                </p:nvSpPr>
+                <p:spPr>
+                  <a:xfrm>
+                    <a:off x="7203237" y="3668355"/>
+                    <a:ext cx="210820" cy="210821"/>
+                  </a:xfrm>
+                  <a:prstGeom prst="ellipse">
+                    <a:avLst/>
+                  </a:prstGeom>
+                  <a:solidFill>
+                    <a:srgbClr val="62C966"/>
+                  </a:solidFill>
+                  <a:ln>
+                    <a:noFill/>
+                  </a:ln>
+                </p:spPr>
+                <p:style>
+                  <a:lnRef idx="2">
+                    <a:schemeClr val="accent1">
+                      <a:shade val="50000"/>
+                    </a:schemeClr>
+                  </a:lnRef>
+                  <a:fillRef idx="1">
+                    <a:schemeClr val="accent1"/>
+                  </a:fillRef>
+                  <a:effectRef idx="0">
+                    <a:schemeClr val="accent1"/>
+                  </a:effectRef>
+                  <a:fontRef idx="minor">
+                    <a:schemeClr val="lt1"/>
+                  </a:fontRef>
+                </p:style>
+                <p:txBody>
+                  <a:bodyPr rtlCol="0" anchor="ctr"/>
+                  <a:lstStyle/>
+                  <a:p>
+                    <a:pPr algn="ctr"/>
+                    <a:endParaRPr lang="fr-FR" sz="1750" dirty="0">
+                      <a:latin typeface="Arial" panose="020B0604020202020204" pitchFamily="34" charset="0"/>
+                      <a:cs typeface="Arial" panose="020B0604020202020204" pitchFamily="34" charset="0"/>
+                    </a:endParaRPr>
+                  </a:p>
+                </p:txBody>
+              </p:sp>
+              <p:sp>
+                <p:nvSpPr>
+                  <p:cNvPr id="45" name="Ellipse 44">
+                    <a:extLst>
+                      <a:ext uri="{FF2B5EF4-FFF2-40B4-BE49-F238E27FC236}">
+                        <a16:creationId xmlns:a16="http://schemas.microsoft.com/office/drawing/2014/main" id="{EF17DADB-B849-4B26-9E14-C29BC10C31C8}"/>
+                      </a:ext>
+                    </a:extLst>
+                  </p:cNvPr>
+                  <p:cNvSpPr/>
+                  <p:nvPr/>
+                </p:nvSpPr>
+                <p:spPr>
+                  <a:xfrm>
+                    <a:off x="10765595" y="3668355"/>
+                    <a:ext cx="210820" cy="210821"/>
+                  </a:xfrm>
+                  <a:prstGeom prst="ellipse">
+                    <a:avLst/>
+                  </a:prstGeom>
+                  <a:solidFill>
+                    <a:srgbClr val="FF7F40"/>
+                  </a:solidFill>
+                  <a:ln>
+                    <a:noFill/>
+                  </a:ln>
+                </p:spPr>
+                <p:style>
+                  <a:lnRef idx="2">
+                    <a:schemeClr val="accent1">
+                      <a:shade val="50000"/>
+                    </a:schemeClr>
+                  </a:lnRef>
+                  <a:fillRef idx="1">
+                    <a:schemeClr val="accent1"/>
+                  </a:fillRef>
+                  <a:effectRef idx="0">
+                    <a:schemeClr val="accent1"/>
+                  </a:effectRef>
+                  <a:fontRef idx="minor">
+                    <a:schemeClr val="lt1"/>
+                  </a:fontRef>
+                </p:style>
+                <p:txBody>
+                  <a:bodyPr rtlCol="0" anchor="ctr"/>
+                  <a:lstStyle/>
+                  <a:p>
+                    <a:pPr algn="ctr"/>
+                    <a:endParaRPr lang="fr-FR" sz="1750" dirty="0">
+                      <a:latin typeface="Arial" panose="020B0604020202020204" pitchFamily="34" charset="0"/>
+                      <a:cs typeface="Arial" panose="020B0604020202020204" pitchFamily="34" charset="0"/>
+                    </a:endParaRPr>
+                  </a:p>
+                </p:txBody>
+              </p:sp>
+              <p:sp>
+                <p:nvSpPr>
+                  <p:cNvPr id="46" name="Ellipse 45">
+                    <a:extLst>
+                      <a:ext uri="{FF2B5EF4-FFF2-40B4-BE49-F238E27FC236}">
+                        <a16:creationId xmlns:a16="http://schemas.microsoft.com/office/drawing/2014/main" id="{F08DFCD7-F8B5-4689-BF10-B2B6B382C2B8}"/>
+                      </a:ext>
+                    </a:extLst>
+                  </p:cNvPr>
+                  <p:cNvSpPr/>
+                  <p:nvPr/>
+                </p:nvSpPr>
+                <p:spPr>
+                  <a:xfrm>
+                    <a:off x="78519" y="3966357"/>
+                    <a:ext cx="210820" cy="210821"/>
+                  </a:xfrm>
+                  <a:prstGeom prst="ellipse">
+                    <a:avLst/>
+                  </a:prstGeom>
+                  <a:solidFill>
+                    <a:srgbClr val="7EC8E3"/>
+                  </a:solidFill>
+                  <a:ln>
+                    <a:noFill/>
+                  </a:ln>
+                </p:spPr>
+                <p:style>
+                  <a:lnRef idx="2">
+                    <a:schemeClr val="accent1">
+                      <a:shade val="50000"/>
+                    </a:schemeClr>
+                  </a:lnRef>
+                  <a:fillRef idx="1">
+                    <a:schemeClr val="accent1"/>
+                  </a:fillRef>
+                  <a:effectRef idx="0">
+                    <a:schemeClr val="accent1"/>
+                  </a:effectRef>
+                  <a:fontRef idx="minor">
+                    <a:schemeClr val="lt1"/>
+                  </a:fontRef>
+                </p:style>
+                <p:txBody>
+                  <a:bodyPr rtlCol="0" anchor="ctr"/>
+                  <a:lstStyle/>
+                  <a:p>
+                    <a:pPr algn="ctr"/>
+                    <a:endParaRPr lang="fr-FR" sz="1750" dirty="0">
+                      <a:latin typeface="Arial" panose="020B0604020202020204" pitchFamily="34" charset="0"/>
+                      <a:cs typeface="Arial" panose="020B0604020202020204" pitchFamily="34" charset="0"/>
+                    </a:endParaRPr>
+                  </a:p>
+                </p:txBody>
+              </p:sp>
+              <p:sp>
+                <p:nvSpPr>
+                  <p:cNvPr id="47" name="Ellipse 46">
+                    <a:extLst>
+                      <a:ext uri="{FF2B5EF4-FFF2-40B4-BE49-F238E27FC236}">
+                        <a16:creationId xmlns:a16="http://schemas.microsoft.com/office/drawing/2014/main" id="{AF9068CC-8FB6-45F6-8998-F0D8BC4A4ADA}"/>
+                      </a:ext>
+                    </a:extLst>
+                  </p:cNvPr>
+                  <p:cNvSpPr/>
+                  <p:nvPr/>
+                </p:nvSpPr>
+                <p:spPr>
+                  <a:xfrm>
+                    <a:off x="3332763" y="3956043"/>
+                    <a:ext cx="210820" cy="210820"/>
+                  </a:xfrm>
+                  <a:prstGeom prst="ellipse">
+                    <a:avLst/>
+                  </a:prstGeom>
+                  <a:solidFill>
+                    <a:srgbClr val="D38ACB"/>
+                  </a:solidFill>
+                  <a:ln>
+                    <a:noFill/>
+                  </a:ln>
+                </p:spPr>
+                <p:style>
+                  <a:lnRef idx="2">
+                    <a:schemeClr val="accent1">
+                      <a:shade val="50000"/>
+                    </a:schemeClr>
+                  </a:lnRef>
+                  <a:fillRef idx="1">
+                    <a:schemeClr val="accent1"/>
+                  </a:fillRef>
+                  <a:effectRef idx="0">
+                    <a:schemeClr val="accent1"/>
+                  </a:effectRef>
+                  <a:fontRef idx="minor">
+                    <a:schemeClr val="lt1"/>
+                  </a:fontRef>
+                </p:style>
+                <p:txBody>
+                  <a:bodyPr rtlCol="0" anchor="ctr"/>
+                  <a:lstStyle/>
+                  <a:p>
+                    <a:pPr algn="ctr"/>
+                    <a:endParaRPr lang="fr-FR" sz="1750" dirty="0">
+                      <a:latin typeface="Arial" panose="020B0604020202020204" pitchFamily="34" charset="0"/>
+                      <a:cs typeface="Arial" panose="020B0604020202020204" pitchFamily="34" charset="0"/>
+                    </a:endParaRPr>
+                  </a:p>
+                </p:txBody>
+              </p:sp>
+              <p:sp>
+                <p:nvSpPr>
+                  <p:cNvPr id="48" name="Ellipse 47">
+                    <a:extLst>
+                      <a:ext uri="{FF2B5EF4-FFF2-40B4-BE49-F238E27FC236}">
+                        <a16:creationId xmlns:a16="http://schemas.microsoft.com/office/drawing/2014/main" id="{F5DBDD97-F57E-4C03-B5AE-16C716C8EDF8}"/>
+                      </a:ext>
+                    </a:extLst>
+                  </p:cNvPr>
+                  <p:cNvSpPr/>
+                  <p:nvPr/>
+                </p:nvSpPr>
+                <p:spPr>
+                  <a:xfrm>
+                    <a:off x="7203237" y="3966357"/>
+                    <a:ext cx="210820" cy="210821"/>
+                  </a:xfrm>
+                  <a:prstGeom prst="ellipse">
+                    <a:avLst/>
+                  </a:prstGeom>
+                  <a:solidFill>
+                    <a:srgbClr val="EE637F"/>
+                  </a:solidFill>
+                  <a:ln>
+                    <a:noFill/>
+                  </a:ln>
+                </p:spPr>
+                <p:style>
+                  <a:lnRef idx="2">
+                    <a:schemeClr val="accent1">
+                      <a:shade val="50000"/>
+                    </a:schemeClr>
+                  </a:lnRef>
+                  <a:fillRef idx="1">
+                    <a:schemeClr val="accent1"/>
+                  </a:fillRef>
+                  <a:effectRef idx="0">
+                    <a:schemeClr val="accent1"/>
+                  </a:effectRef>
+                  <a:fontRef idx="minor">
+                    <a:schemeClr val="lt1"/>
+                  </a:fontRef>
+                </p:style>
+                <p:txBody>
+                  <a:bodyPr rtlCol="0" anchor="ctr"/>
+                  <a:lstStyle/>
+                  <a:p>
+                    <a:pPr algn="ctr"/>
+                    <a:endParaRPr lang="fr-FR" sz="1750" dirty="0">
+                      <a:latin typeface="Arial" panose="020B0604020202020204" pitchFamily="34" charset="0"/>
+                      <a:cs typeface="Arial" panose="020B0604020202020204" pitchFamily="34" charset="0"/>
+                    </a:endParaRPr>
+                  </a:p>
+                </p:txBody>
+              </p:sp>
+              <p:sp>
+                <p:nvSpPr>
+                  <p:cNvPr id="49" name="Ellipse 48">
+                    <a:extLst>
+                      <a:ext uri="{FF2B5EF4-FFF2-40B4-BE49-F238E27FC236}">
+                        <a16:creationId xmlns:a16="http://schemas.microsoft.com/office/drawing/2014/main" id="{FB427A11-76F0-4C62-A283-EAF0E82E261C}"/>
+                      </a:ext>
+                    </a:extLst>
+                  </p:cNvPr>
+                  <p:cNvSpPr/>
+                  <p:nvPr/>
+                </p:nvSpPr>
+                <p:spPr>
+                  <a:xfrm>
+                    <a:off x="10765595" y="3966357"/>
+                    <a:ext cx="210820" cy="210821"/>
+                  </a:xfrm>
+                  <a:prstGeom prst="ellipse">
+                    <a:avLst/>
+                  </a:prstGeom>
+                  <a:solidFill>
+                    <a:srgbClr val="BCED54"/>
+                  </a:solidFill>
+                  <a:ln>
+                    <a:noFill/>
+                  </a:ln>
+                </p:spPr>
+                <p:style>
+                  <a:lnRef idx="2">
+                    <a:schemeClr val="accent1">
+                      <a:shade val="50000"/>
+                    </a:schemeClr>
+                  </a:lnRef>
+                  <a:fillRef idx="1">
+                    <a:schemeClr val="accent1"/>
+                  </a:fillRef>
+                  <a:effectRef idx="0">
+                    <a:schemeClr val="accent1"/>
+                  </a:effectRef>
+                  <a:fontRef idx="minor">
+                    <a:schemeClr val="lt1"/>
+                  </a:fontRef>
+                </p:style>
+                <p:txBody>
+                  <a:bodyPr rtlCol="0" anchor="ctr"/>
+                  <a:lstStyle/>
+                  <a:p>
+                    <a:pPr algn="ctr"/>
+                    <a:endParaRPr lang="fr-FR" sz="1750" dirty="0">
+                      <a:latin typeface="Arial" panose="020B0604020202020204" pitchFamily="34" charset="0"/>
+                      <a:cs typeface="Arial" panose="020B0604020202020204" pitchFamily="34" charset="0"/>
+                    </a:endParaRPr>
+                  </a:p>
+                </p:txBody>
+              </p:sp>
+              <p:sp>
+                <p:nvSpPr>
+                  <p:cNvPr id="50" name="ZoneTexte 49">
+                    <a:extLst>
+                      <a:ext uri="{FF2B5EF4-FFF2-40B4-BE49-F238E27FC236}">
+                        <a16:creationId xmlns:a16="http://schemas.microsoft.com/office/drawing/2014/main" id="{7DDD9FFA-5212-4D68-8671-603283CACB22}"/>
+                      </a:ext>
+                    </a:extLst>
+                  </p:cNvPr>
+                  <p:cNvSpPr txBox="1"/>
+                  <p:nvPr/>
+                </p:nvSpPr>
+                <p:spPr>
+                  <a:xfrm>
+                    <a:off x="336006" y="3277035"/>
+                    <a:ext cx="2361676" cy="338554"/>
+                  </a:xfrm>
+                  <a:prstGeom prst="rect">
+                    <a:avLst/>
+                  </a:prstGeom>
+                  <a:noFill/>
+                </p:spPr>
+                <p:txBody>
+                  <a:bodyPr wrap="square" rtlCol="0">
+                    <a:spAutoFit/>
+                  </a:bodyPr>
+                  <a:lstStyle/>
+                  <a:p>
+                    <a:r>
+                      <a:rPr lang="fr-FR" sz="1556" spc="-49" dirty="0">
+                        <a:latin typeface="Arial" panose="020B0604020202020204" pitchFamily="34" charset="0"/>
+                        <a:cs typeface="Arial" panose="020B0604020202020204" pitchFamily="34" charset="0"/>
+                      </a:rPr>
+                      <a:t>Aminoglycoside</a:t>
+                    </a:r>
+                  </a:p>
+                </p:txBody>
+              </p:sp>
+              <p:sp>
+                <p:nvSpPr>
+                  <p:cNvPr id="51" name="ZoneTexte 50">
+                    <a:extLst>
+                      <a:ext uri="{FF2B5EF4-FFF2-40B4-BE49-F238E27FC236}">
+                        <a16:creationId xmlns:a16="http://schemas.microsoft.com/office/drawing/2014/main" id="{4FE7616A-DCAE-496C-8A3C-E566758E8A04}"/>
+                      </a:ext>
+                    </a:extLst>
+                  </p:cNvPr>
+                  <p:cNvSpPr txBox="1"/>
+                  <p:nvPr/>
+                </p:nvSpPr>
+                <p:spPr>
+                  <a:xfrm>
+                    <a:off x="336006" y="3597456"/>
+                    <a:ext cx="2361676" cy="338554"/>
+                  </a:xfrm>
+                  <a:prstGeom prst="rect">
+                    <a:avLst/>
+                  </a:prstGeom>
+                  <a:noFill/>
+                </p:spPr>
+                <p:txBody>
+                  <a:bodyPr wrap="square" rtlCol="0">
+                    <a:spAutoFit/>
+                  </a:bodyPr>
+                  <a:lstStyle/>
+                  <a:p>
+                    <a:r>
+                      <a:rPr lang="fr-FR" sz="1556" spc="-49" dirty="0">
+                        <a:latin typeface="Arial" panose="020B0604020202020204" pitchFamily="34" charset="0"/>
+                        <a:cs typeface="Arial" panose="020B0604020202020204" pitchFamily="34" charset="0"/>
+                      </a:rPr>
+                      <a:t>Other</a:t>
+                    </a:r>
+                  </a:p>
+                </p:txBody>
+              </p:sp>
+              <p:sp>
+                <p:nvSpPr>
+                  <p:cNvPr id="52" name="ZoneTexte 51">
+                    <a:extLst>
+                      <a:ext uri="{FF2B5EF4-FFF2-40B4-BE49-F238E27FC236}">
+                        <a16:creationId xmlns:a16="http://schemas.microsoft.com/office/drawing/2014/main" id="{6A267759-F104-410F-A2C8-39BC459DD88D}"/>
+                      </a:ext>
+                    </a:extLst>
+                  </p:cNvPr>
+                  <p:cNvSpPr txBox="1"/>
+                  <p:nvPr/>
+                </p:nvSpPr>
+                <p:spPr>
+                  <a:xfrm>
+                    <a:off x="336006" y="3917878"/>
+                    <a:ext cx="2679403" cy="338554"/>
+                  </a:xfrm>
+                  <a:prstGeom prst="rect">
+                    <a:avLst/>
+                  </a:prstGeom>
+                  <a:noFill/>
+                </p:spPr>
+                <p:txBody>
+                  <a:bodyPr wrap="square" rtlCol="0">
+                    <a:spAutoFit/>
+                  </a:bodyPr>
+                  <a:lstStyle/>
+                  <a:p>
+                    <a:r>
+                      <a:rPr lang="fr-FR" sz="1556" spc="-49" dirty="0">
+                        <a:latin typeface="Arial" panose="020B0604020202020204" pitchFamily="34" charset="0"/>
+                        <a:cs typeface="Arial" panose="020B0604020202020204" pitchFamily="34" charset="0"/>
+                      </a:rPr>
+                      <a:t>Large spectrum penicillin</a:t>
+                    </a:r>
+                  </a:p>
+                </p:txBody>
+              </p:sp>
+              <p:sp>
+                <p:nvSpPr>
+                  <p:cNvPr id="53" name="ZoneTexte 52">
+                    <a:extLst>
+                      <a:ext uri="{FF2B5EF4-FFF2-40B4-BE49-F238E27FC236}">
+                        <a16:creationId xmlns:a16="http://schemas.microsoft.com/office/drawing/2014/main" id="{B2A9B365-7BF0-4C8A-ACC9-1D623FA8077C}"/>
+                      </a:ext>
+                    </a:extLst>
+                  </p:cNvPr>
+                  <p:cNvSpPr txBox="1"/>
+                  <p:nvPr/>
+                </p:nvSpPr>
+                <p:spPr>
+                  <a:xfrm>
+                    <a:off x="3543585" y="3277035"/>
+                    <a:ext cx="3698811" cy="402368"/>
+                  </a:xfrm>
+                  <a:prstGeom prst="rect">
+                    <a:avLst/>
+                  </a:prstGeom>
+                  <a:noFill/>
+                </p:spPr>
+                <p:txBody>
+                  <a:bodyPr wrap="square" rtlCol="0">
+                    <a:spAutoFit/>
+                  </a:bodyPr>
+                  <a:lstStyle/>
+                  <a:p>
+                    <a:r>
+                      <a:rPr lang="fr-FR" sz="1556" spc="-49" dirty="0">
+                        <a:latin typeface="Arial" panose="020B0604020202020204" pitchFamily="34" charset="0"/>
+                        <a:cs typeface="Arial" panose="020B0604020202020204" pitchFamily="34" charset="0"/>
+                      </a:rPr>
+                      <a:t>Penicillin + beta-lactamase inhibitor</a:t>
+                    </a:r>
+                  </a:p>
+                </p:txBody>
+              </p:sp>
+              <p:sp>
+                <p:nvSpPr>
+                  <p:cNvPr id="54" name="ZoneTexte 53">
+                    <a:extLst>
+                      <a:ext uri="{FF2B5EF4-FFF2-40B4-BE49-F238E27FC236}">
+                        <a16:creationId xmlns:a16="http://schemas.microsoft.com/office/drawing/2014/main" id="{0029A159-43D2-4BCB-86E3-B37AE9CA4B34}"/>
+                      </a:ext>
+                    </a:extLst>
+                  </p:cNvPr>
+                  <p:cNvSpPr txBox="1"/>
+                  <p:nvPr/>
+                </p:nvSpPr>
+                <p:spPr>
+                  <a:xfrm>
+                    <a:off x="3526381" y="3597456"/>
+                    <a:ext cx="3390378" cy="402368"/>
+                  </a:xfrm>
+                  <a:prstGeom prst="rect">
+                    <a:avLst/>
+                  </a:prstGeom>
+                  <a:noFill/>
+                </p:spPr>
+                <p:txBody>
+                  <a:bodyPr wrap="square" rtlCol="0">
+                    <a:spAutoFit/>
+                  </a:bodyPr>
+                  <a:lstStyle/>
+                  <a:p>
+                    <a:r>
+                      <a:rPr lang="fr-FR" sz="1556" spc="-49" dirty="0">
+                        <a:latin typeface="Arial" panose="020B0604020202020204" pitchFamily="34" charset="0"/>
+                        <a:cs typeface="Arial" panose="020B0604020202020204" pitchFamily="34" charset="0"/>
+                      </a:rPr>
+                      <a:t>Second gen. cephalosporin</a:t>
+                    </a:r>
+                  </a:p>
+                </p:txBody>
+              </p:sp>
+              <p:sp>
+                <p:nvSpPr>
+                  <p:cNvPr id="55" name="ZoneTexte 54">
+                    <a:extLst>
+                      <a:ext uri="{FF2B5EF4-FFF2-40B4-BE49-F238E27FC236}">
+                        <a16:creationId xmlns:a16="http://schemas.microsoft.com/office/drawing/2014/main" id="{014BD64E-23A8-4725-A2E5-1D4C5D6A572C}"/>
+                      </a:ext>
+                    </a:extLst>
+                  </p:cNvPr>
+                  <p:cNvSpPr txBox="1"/>
+                  <p:nvPr/>
+                </p:nvSpPr>
+                <p:spPr>
+                  <a:xfrm>
+                    <a:off x="3526381" y="3917878"/>
+                    <a:ext cx="3390378" cy="402368"/>
+                  </a:xfrm>
+                  <a:prstGeom prst="rect">
+                    <a:avLst/>
+                  </a:prstGeom>
+                  <a:noFill/>
+                </p:spPr>
+                <p:txBody>
+                  <a:bodyPr wrap="square" rtlCol="0">
+                    <a:spAutoFit/>
+                  </a:bodyPr>
+                  <a:lstStyle/>
+                  <a:p>
+                    <a:r>
+                      <a:rPr lang="fr-FR" sz="1556" spc="-49" dirty="0">
+                        <a:latin typeface="Arial" panose="020B0604020202020204" pitchFamily="34" charset="0"/>
+                        <a:cs typeface="Arial" panose="020B0604020202020204" pitchFamily="34" charset="0"/>
+                      </a:rPr>
+                      <a:t>Third gen. cephalosporin</a:t>
+                    </a:r>
+                  </a:p>
+                </p:txBody>
+              </p:sp>
+              <p:sp>
+                <p:nvSpPr>
+                  <p:cNvPr id="56" name="ZoneTexte 55">
+                    <a:extLst>
+                      <a:ext uri="{FF2B5EF4-FFF2-40B4-BE49-F238E27FC236}">
+                        <a16:creationId xmlns:a16="http://schemas.microsoft.com/office/drawing/2014/main" id="{3EEA21DB-7915-44A4-A44F-6FA06EC42606}"/>
+                      </a:ext>
+                    </a:extLst>
+                  </p:cNvPr>
+                  <p:cNvSpPr txBox="1"/>
+                  <p:nvPr/>
+                </p:nvSpPr>
+                <p:spPr>
+                  <a:xfrm>
+                    <a:off x="7461396" y="3325515"/>
+                    <a:ext cx="3148220" cy="338554"/>
+                  </a:xfrm>
+                  <a:prstGeom prst="rect">
+                    <a:avLst/>
+                  </a:prstGeom>
+                  <a:noFill/>
+                </p:spPr>
+                <p:txBody>
+                  <a:bodyPr wrap="square" rtlCol="0">
+                    <a:spAutoFit/>
+                  </a:bodyPr>
+                  <a:lstStyle/>
+                  <a:p>
+                    <a:r>
+                      <a:rPr lang="fr-FR" sz="1556" spc="-49" dirty="0" err="1">
+                        <a:latin typeface="Arial" panose="020B0604020202020204" pitchFamily="34" charset="0"/>
+                        <a:cs typeface="Arial" panose="020B0604020202020204" pitchFamily="34" charset="0"/>
+                      </a:rPr>
+                      <a:t>Fourth</a:t>
+                    </a:r>
+                    <a:r>
+                      <a:rPr lang="fr-FR" sz="1556" spc="-49" dirty="0">
+                        <a:latin typeface="Arial" panose="020B0604020202020204" pitchFamily="34" charset="0"/>
+                        <a:cs typeface="Arial" panose="020B0604020202020204" pitchFamily="34" charset="0"/>
+                      </a:rPr>
+                      <a:t> gen. cephalosporin</a:t>
+                    </a:r>
+                  </a:p>
+                </p:txBody>
+              </p:sp>
+              <p:sp>
+                <p:nvSpPr>
+                  <p:cNvPr id="57" name="ZoneTexte 56">
+                    <a:extLst>
+                      <a:ext uri="{FF2B5EF4-FFF2-40B4-BE49-F238E27FC236}">
+                        <a16:creationId xmlns:a16="http://schemas.microsoft.com/office/drawing/2014/main" id="{89F4838D-C24F-47AC-8626-789D492C1DF2}"/>
+                      </a:ext>
+                    </a:extLst>
+                  </p:cNvPr>
+                  <p:cNvSpPr txBox="1"/>
+                  <p:nvPr/>
+                </p:nvSpPr>
+                <p:spPr>
+                  <a:xfrm>
+                    <a:off x="7491011" y="3615926"/>
+                    <a:ext cx="2361676" cy="338554"/>
+                  </a:xfrm>
+                  <a:prstGeom prst="rect">
+                    <a:avLst/>
+                  </a:prstGeom>
+                  <a:noFill/>
+                </p:spPr>
+                <p:txBody>
+                  <a:bodyPr wrap="square" rtlCol="0">
+                    <a:spAutoFit/>
+                  </a:bodyPr>
+                  <a:lstStyle/>
+                  <a:p>
+                    <a:r>
+                      <a:rPr lang="fr-FR" sz="1556" spc="-49" dirty="0">
+                        <a:latin typeface="Arial" panose="020B0604020202020204" pitchFamily="34" charset="0"/>
+                        <a:cs typeface="Arial" panose="020B0604020202020204" pitchFamily="34" charset="0"/>
+                      </a:rPr>
+                      <a:t>Carbapenem</a:t>
+                    </a:r>
+                  </a:p>
+                </p:txBody>
+              </p:sp>
+              <p:sp>
+                <p:nvSpPr>
+                  <p:cNvPr id="58" name="ZoneTexte 57">
+                    <a:extLst>
+                      <a:ext uri="{FF2B5EF4-FFF2-40B4-BE49-F238E27FC236}">
+                        <a16:creationId xmlns:a16="http://schemas.microsoft.com/office/drawing/2014/main" id="{0C9C5D11-99CA-4E56-A3CA-64FEE224708F}"/>
+                      </a:ext>
+                    </a:extLst>
+                  </p:cNvPr>
+                  <p:cNvSpPr txBox="1"/>
+                  <p:nvPr/>
+                </p:nvSpPr>
+                <p:spPr>
+                  <a:xfrm>
+                    <a:off x="7491012" y="3936347"/>
+                    <a:ext cx="2763612" cy="338554"/>
+                  </a:xfrm>
+                  <a:prstGeom prst="rect">
+                    <a:avLst/>
+                  </a:prstGeom>
+                  <a:noFill/>
+                </p:spPr>
+                <p:txBody>
+                  <a:bodyPr wrap="square" rtlCol="0">
+                    <a:spAutoFit/>
+                  </a:bodyPr>
+                  <a:lstStyle/>
+                  <a:p>
+                    <a:r>
+                      <a:rPr lang="fr-FR" sz="1556" spc="-49" dirty="0">
+                        <a:latin typeface="Arial" panose="020B0604020202020204" pitchFamily="34" charset="0"/>
+                        <a:cs typeface="Arial" panose="020B0604020202020204" pitchFamily="34" charset="0"/>
+                      </a:rPr>
+                      <a:t>Nitrofuran derivative</a:t>
+                    </a:r>
+                  </a:p>
+                </p:txBody>
+              </p:sp>
+              <p:sp>
+                <p:nvSpPr>
+                  <p:cNvPr id="59" name="ZoneTexte 58">
+                    <a:extLst>
+                      <a:ext uri="{FF2B5EF4-FFF2-40B4-BE49-F238E27FC236}">
+                        <a16:creationId xmlns:a16="http://schemas.microsoft.com/office/drawing/2014/main" id="{6849EDBE-3E85-467A-B6D2-161D5C1F5D70}"/>
+                      </a:ext>
+                    </a:extLst>
+                  </p:cNvPr>
+                  <p:cNvSpPr txBox="1"/>
+                  <p:nvPr/>
+                </p:nvSpPr>
+                <p:spPr>
+                  <a:xfrm>
+                    <a:off x="11024091" y="3304047"/>
+                    <a:ext cx="2361676" cy="338554"/>
+                  </a:xfrm>
+                  <a:prstGeom prst="rect">
+                    <a:avLst/>
+                  </a:prstGeom>
+                  <a:noFill/>
+                </p:spPr>
+                <p:txBody>
+                  <a:bodyPr wrap="square" rtlCol="0">
+                    <a:spAutoFit/>
+                  </a:bodyPr>
+                  <a:lstStyle/>
+                  <a:p>
+                    <a:r>
+                      <a:rPr lang="fr-FR" sz="1556" spc="-49" dirty="0">
+                        <a:latin typeface="Arial" panose="020B0604020202020204" pitchFamily="34" charset="0"/>
+                        <a:cs typeface="Arial" panose="020B0604020202020204" pitchFamily="34" charset="0"/>
+                      </a:rPr>
+                      <a:t>Fluoroquinolone</a:t>
+                    </a:r>
+                  </a:p>
+                </p:txBody>
+              </p:sp>
+              <p:sp>
+                <p:nvSpPr>
+                  <p:cNvPr id="60" name="ZoneTexte 59">
+                    <a:extLst>
+                      <a:ext uri="{FF2B5EF4-FFF2-40B4-BE49-F238E27FC236}">
+                        <a16:creationId xmlns:a16="http://schemas.microsoft.com/office/drawing/2014/main" id="{ADC20234-7996-4817-8C4D-2AB6CDDC3216}"/>
+                      </a:ext>
+                    </a:extLst>
+                  </p:cNvPr>
+                  <p:cNvSpPr txBox="1"/>
+                  <p:nvPr/>
+                </p:nvSpPr>
+                <p:spPr>
+                  <a:xfrm>
+                    <a:off x="11024091" y="3624468"/>
+                    <a:ext cx="2361676" cy="338554"/>
+                  </a:xfrm>
+                  <a:prstGeom prst="rect">
+                    <a:avLst/>
+                  </a:prstGeom>
+                  <a:noFill/>
+                </p:spPr>
+                <p:txBody>
+                  <a:bodyPr wrap="square" rtlCol="0">
+                    <a:spAutoFit/>
+                  </a:bodyPr>
+                  <a:lstStyle/>
+                  <a:p>
+                    <a:r>
+                      <a:rPr lang="fr-FR" sz="1556" spc="-49" dirty="0">
+                        <a:latin typeface="Arial" panose="020B0604020202020204" pitchFamily="34" charset="0"/>
+                        <a:cs typeface="Arial" panose="020B0604020202020204" pitchFamily="34" charset="0"/>
+                      </a:rPr>
+                      <a:t>Other quinolone</a:t>
+                    </a:r>
+                  </a:p>
+                </p:txBody>
+              </p:sp>
+              <p:sp>
+                <p:nvSpPr>
+                  <p:cNvPr id="61" name="ZoneTexte 60">
+                    <a:extLst>
+                      <a:ext uri="{FF2B5EF4-FFF2-40B4-BE49-F238E27FC236}">
+                        <a16:creationId xmlns:a16="http://schemas.microsoft.com/office/drawing/2014/main" id="{44B33ED0-BA8E-4C19-94B1-379FBA15DD92}"/>
+                      </a:ext>
+                    </a:extLst>
+                  </p:cNvPr>
+                  <p:cNvSpPr txBox="1"/>
+                  <p:nvPr/>
+                </p:nvSpPr>
+                <p:spPr>
+                  <a:xfrm>
+                    <a:off x="11024092" y="3944887"/>
+                    <a:ext cx="3886872" cy="338554"/>
+                  </a:xfrm>
+                  <a:prstGeom prst="rect">
+                    <a:avLst/>
+                  </a:prstGeom>
+                  <a:noFill/>
+                </p:spPr>
+                <p:txBody>
+                  <a:bodyPr wrap="square" rtlCol="0">
+                    <a:spAutoFit/>
+                  </a:bodyPr>
+                  <a:lstStyle/>
+                  <a:p>
+                    <a:r>
+                      <a:rPr lang="fr-FR" sz="1556" spc="-49" dirty="0" err="1">
+                        <a:latin typeface="Arial" panose="020B0604020202020204" pitchFamily="34" charset="0"/>
+                        <a:cs typeface="Arial" panose="020B0604020202020204" pitchFamily="34" charset="0"/>
+                      </a:rPr>
+                      <a:t>Trimethoprim</a:t>
+                    </a:r>
+                    <a:r>
+                      <a:rPr lang="fr-FR" sz="1556" spc="-49" dirty="0">
+                        <a:latin typeface="Arial" panose="020B0604020202020204" pitchFamily="34" charset="0"/>
+                        <a:cs typeface="Arial" panose="020B0604020202020204" pitchFamily="34" charset="0"/>
+                      </a:rPr>
+                      <a:t>/ </a:t>
+                    </a:r>
+                    <a:r>
+                      <a:rPr lang="fr-FR" sz="1556" spc="-49" dirty="0" err="1">
+                        <a:latin typeface="Arial" panose="020B0604020202020204" pitchFamily="34" charset="0"/>
+                        <a:cs typeface="Arial" panose="020B0604020202020204" pitchFamily="34" charset="0"/>
+                      </a:rPr>
+                      <a:t>Sulfamethoxazole</a:t>
+                    </a:r>
+                    <a:endParaRPr lang="fr-FR" sz="1556" spc="-49" dirty="0">
+                      <a:latin typeface="Arial" panose="020B0604020202020204" pitchFamily="34" charset="0"/>
+                      <a:cs typeface="Arial" panose="020B0604020202020204" pitchFamily="34" charset="0"/>
+                    </a:endParaRPr>
+                  </a:p>
+                </p:txBody>
+              </p:sp>
+            </p:grpSp>
+            <p:sp>
+              <p:nvSpPr>
+                <p:cNvPr id="30" name="ZoneTexte 29">
+                  <a:extLst>
+                    <a:ext uri="{FF2B5EF4-FFF2-40B4-BE49-F238E27FC236}">
+                      <a16:creationId xmlns:a16="http://schemas.microsoft.com/office/drawing/2014/main" id="{59D8E02B-66FF-4949-84B0-C90273DBDC4E}"/>
+                    </a:ext>
+                  </a:extLst>
+                </p:cNvPr>
+                <p:cNvSpPr txBox="1"/>
+                <p:nvPr/>
+              </p:nvSpPr>
+              <p:spPr>
+                <a:xfrm>
+                  <a:off x="15474159" y="13042236"/>
+                  <a:ext cx="2242604" cy="410611"/>
+                </a:xfrm>
+                <a:prstGeom prst="rect">
+                  <a:avLst/>
+                </a:prstGeom>
+                <a:noFill/>
+              </p:spPr>
+              <p:txBody>
+                <a:bodyPr wrap="square">
+                  <a:spAutoFit/>
+                </a:bodyPr>
+                <a:lstStyle/>
+                <a:p>
+                  <a:r>
+                    <a:rPr lang="fr-FR" sz="1600" b="1" dirty="0">
+                      <a:solidFill>
+                        <a:sysClr val="windowText" lastClr="000000"/>
+                      </a:solidFill>
+                      <a:latin typeface="Arial" panose="020B0604020202020204" pitchFamily="34" charset="0"/>
+                      <a:cs typeface="Arial" panose="020B0604020202020204" pitchFamily="34" charset="0"/>
+                    </a:rPr>
+                    <a:t>Node Pie chart: </a:t>
+                  </a:r>
+                </a:p>
+              </p:txBody>
+            </p:sp>
+          </p:grpSp>
+          <p:sp>
+            <p:nvSpPr>
+              <p:cNvPr id="28" name="ZoneTexte 27">
+                <a:extLst>
+                  <a:ext uri="{FF2B5EF4-FFF2-40B4-BE49-F238E27FC236}">
+                    <a16:creationId xmlns:a16="http://schemas.microsoft.com/office/drawing/2014/main" id="{FB57FCFB-011E-43CA-B391-16B061ECF830}"/>
+                  </a:ext>
+                </a:extLst>
+              </p:cNvPr>
+              <p:cNvSpPr txBox="1"/>
+              <p:nvPr/>
+            </p:nvSpPr>
+            <p:spPr>
+              <a:xfrm>
+                <a:off x="20807128" y="13580619"/>
+                <a:ext cx="3886830" cy="410611"/>
+              </a:xfrm>
+              <a:prstGeom prst="rect">
+                <a:avLst/>
+              </a:prstGeom>
+              <a:noFill/>
+            </p:spPr>
+            <p:txBody>
+              <a:bodyPr wrap="square">
+                <a:spAutoFit/>
+              </a:bodyPr>
+              <a:lstStyle/>
+              <a:p>
+                <a:pPr algn="ctr"/>
+                <a:r>
+                  <a:rPr lang="fr-FR" sz="1600" b="1" dirty="0">
+                    <a:solidFill>
+                      <a:sysClr val="windowText" lastClr="000000"/>
+                    </a:solidFill>
+                    <a:latin typeface="Arial" panose="020B0604020202020204" pitchFamily="34" charset="0"/>
+                    <a:cs typeface="Arial" panose="020B0604020202020204" pitchFamily="34" charset="0"/>
+                  </a:rPr>
+                  <a:t>Node color: antibiotic class</a:t>
+                </a:r>
+              </a:p>
+            </p:txBody>
+          </p:sp>
+        </p:grpSp>
+        <p:grpSp>
+          <p:nvGrpSpPr>
+            <p:cNvPr id="62" name="Groupe 61">
+              <a:extLst>
+                <a:ext uri="{FF2B5EF4-FFF2-40B4-BE49-F238E27FC236}">
+                  <a16:creationId xmlns:a16="http://schemas.microsoft.com/office/drawing/2014/main" id="{9DB5D5F2-BE93-4B38-8E18-7A338F1530C8}"/>
+                </a:ext>
+              </a:extLst>
+            </p:cNvPr>
+            <p:cNvGrpSpPr/>
+            <p:nvPr/>
+          </p:nvGrpSpPr>
+          <p:grpSpPr>
+            <a:xfrm>
+              <a:off x="-11761" y="9267786"/>
+              <a:ext cx="6822809" cy="781737"/>
+              <a:chOff x="15364749" y="15235432"/>
+              <a:chExt cx="7017943" cy="804095"/>
+            </a:xfrm>
+          </p:grpSpPr>
+          <p:pic>
+            <p:nvPicPr>
+              <p:cNvPr id="63" name="Image 62">
+                <a:extLst>
+                  <a:ext uri="{FF2B5EF4-FFF2-40B4-BE49-F238E27FC236}">
+                    <a16:creationId xmlns:a16="http://schemas.microsoft.com/office/drawing/2014/main" id="{5816A04D-EB27-47AC-893D-9D5B65FBF4B9}"/>
+                  </a:ext>
+                </a:extLst>
+              </p:cNvPr>
+              <p:cNvPicPr>
+                <a:picLocks noChangeAspect="1"/>
+              </p:cNvPicPr>
+              <p:nvPr/>
+            </p:nvPicPr>
+            <p:blipFill rotWithShape="1">
+              <a:blip r:embed="rId15" cstate="print">
+                <a:extLst>
+                  <a:ext uri="{28A0092B-C50C-407E-A947-70E740481C1C}">
+                    <a14:useLocalDpi xmlns:a14="http://schemas.microsoft.com/office/drawing/2010/main" val="0"/>
+                  </a:ext>
+                </a:extLst>
+              </a:blip>
+              <a:srcRect l="19698" t="44126" r="17367" b="45674"/>
+              <a:stretch/>
+            </p:blipFill>
+            <p:spPr>
+              <a:xfrm>
+                <a:off x="15364749" y="15235432"/>
+                <a:ext cx="7017943" cy="804095"/>
+              </a:xfrm>
+              <a:prstGeom prst="rect">
+                <a:avLst/>
+              </a:prstGeom>
+            </p:spPr>
+          </p:pic>
+          <p:sp>
+            <p:nvSpPr>
+              <p:cNvPr id="64" name="ZoneTexte 63">
+                <a:extLst>
+                  <a:ext uri="{FF2B5EF4-FFF2-40B4-BE49-F238E27FC236}">
+                    <a16:creationId xmlns:a16="http://schemas.microsoft.com/office/drawing/2014/main" id="{15C506BC-D21C-4900-B8EA-0C0D852DBC1F}"/>
+                  </a:ext>
+                </a:extLst>
+              </p:cNvPr>
+              <p:cNvSpPr txBox="1"/>
+              <p:nvPr/>
+            </p:nvSpPr>
+            <p:spPr>
+              <a:xfrm>
+                <a:off x="16634207" y="15289166"/>
+                <a:ext cx="5258487" cy="410611"/>
+              </a:xfrm>
+              <a:prstGeom prst="rect">
+                <a:avLst/>
+              </a:prstGeom>
+              <a:solidFill>
+                <a:schemeClr val="bg1"/>
+              </a:solidFill>
+            </p:spPr>
+            <p:txBody>
+              <a:bodyPr wrap="square">
+                <a:spAutoFit/>
+              </a:bodyPr>
+              <a:lstStyle/>
+              <a:p>
+                <a:r>
+                  <a:rPr lang="fr-FR" sz="1600" b="1" dirty="0">
+                    <a:solidFill>
+                      <a:sysClr val="windowText" lastClr="000000"/>
+                    </a:solidFill>
+                    <a:latin typeface="Arial" panose="020B0604020202020204" pitchFamily="34" charset="0"/>
+                    <a:cs typeface="Arial" panose="020B0604020202020204" pitchFamily="34" charset="0"/>
+                  </a:rPr>
+                  <a:t>Line color: Association strength (cLift)</a:t>
+                </a:r>
+              </a:p>
+            </p:txBody>
+          </p:sp>
+        </p:grpSp>
+        <p:sp>
+          <p:nvSpPr>
+            <p:cNvPr id="65" name="ZoneTexte 64">
+              <a:extLst>
+                <a:ext uri="{FF2B5EF4-FFF2-40B4-BE49-F238E27FC236}">
+                  <a16:creationId xmlns:a16="http://schemas.microsoft.com/office/drawing/2014/main" id="{2A7AB20B-39D1-422B-86BE-4CF83D985DAB}"/>
+                </a:ext>
+              </a:extLst>
+            </p:cNvPr>
+            <p:cNvSpPr txBox="1"/>
+            <p:nvPr/>
+          </p:nvSpPr>
+          <p:spPr>
+            <a:xfrm>
+              <a:off x="1159456" y="10127417"/>
+              <a:ext cx="5112274" cy="399194"/>
+            </a:xfrm>
+            <a:prstGeom prst="rect">
+              <a:avLst/>
+            </a:prstGeom>
+            <a:solidFill>
+              <a:schemeClr val="bg1"/>
+            </a:solidFill>
+          </p:spPr>
+          <p:txBody>
+            <a:bodyPr wrap="square">
+              <a:spAutoFit/>
+            </a:bodyPr>
+            <a:lstStyle/>
+            <a:p>
+              <a:r>
+                <a:rPr lang="fr-FR" sz="1600" b="1" dirty="0">
+                  <a:solidFill>
+                    <a:sysClr val="windowText" lastClr="000000"/>
+                  </a:solidFill>
+                  <a:latin typeface="Arial" panose="020B0604020202020204" pitchFamily="34" charset="0"/>
+                  <a:cs typeface="Arial" panose="020B0604020202020204" pitchFamily="34" charset="0"/>
+                </a:rPr>
+                <a:t>Line width: Association frequency (eSup)</a:t>
+              </a:r>
+            </a:p>
+          </p:txBody>
+        </p:sp>
+        <p:sp>
+          <p:nvSpPr>
+            <p:cNvPr id="66" name="ZoneTexte 65">
+              <a:extLst>
+                <a:ext uri="{FF2B5EF4-FFF2-40B4-BE49-F238E27FC236}">
+                  <a16:creationId xmlns:a16="http://schemas.microsoft.com/office/drawing/2014/main" id="{25A5BC36-0C30-4EE0-975C-9556351853D5}"/>
+                </a:ext>
+              </a:extLst>
+            </p:cNvPr>
+            <p:cNvSpPr txBox="1"/>
+            <p:nvPr/>
+          </p:nvSpPr>
+          <p:spPr>
+            <a:xfrm>
+              <a:off x="8034701" y="10146970"/>
+              <a:ext cx="5112274" cy="399194"/>
+            </a:xfrm>
+            <a:prstGeom prst="rect">
+              <a:avLst/>
+            </a:prstGeom>
+            <a:solidFill>
+              <a:schemeClr val="bg1"/>
+            </a:solidFill>
+          </p:spPr>
+          <p:txBody>
+            <a:bodyPr wrap="square">
+              <a:spAutoFit/>
+            </a:bodyPr>
+            <a:lstStyle/>
+            <a:p>
+              <a:r>
+                <a:rPr lang="fr-FR" sz="1600" b="1" dirty="0">
+                  <a:solidFill>
+                    <a:sysClr val="windowText" lastClr="000000"/>
+                  </a:solidFill>
+                  <a:latin typeface="Arial" panose="020B0604020202020204" pitchFamily="34" charset="0"/>
+                  <a:cs typeface="Arial" panose="020B0604020202020204" pitchFamily="34" charset="0"/>
+                </a:rPr>
+                <a:t>Line width: Association frequency (eSup)</a:t>
+              </a:r>
+            </a:p>
+          </p:txBody>
+        </p:sp>
+        <p:sp>
+          <p:nvSpPr>
+            <p:cNvPr id="67" name="ZoneTexte 66">
+              <a:extLst>
+                <a:ext uri="{FF2B5EF4-FFF2-40B4-BE49-F238E27FC236}">
+                  <a16:creationId xmlns:a16="http://schemas.microsoft.com/office/drawing/2014/main" id="{D7D6C8C0-92D4-441B-9748-89700F8117FB}"/>
+                </a:ext>
+              </a:extLst>
+            </p:cNvPr>
+            <p:cNvSpPr txBox="1"/>
+            <p:nvPr/>
+          </p:nvSpPr>
+          <p:spPr>
+            <a:xfrm>
+              <a:off x="8156855" y="9308564"/>
+              <a:ext cx="5112274" cy="399194"/>
+            </a:xfrm>
+            <a:prstGeom prst="rect">
+              <a:avLst/>
+            </a:prstGeom>
+            <a:solidFill>
+              <a:schemeClr val="bg1"/>
+            </a:solidFill>
+          </p:spPr>
+          <p:txBody>
+            <a:bodyPr wrap="square">
+              <a:spAutoFit/>
+            </a:bodyPr>
+            <a:lstStyle/>
+            <a:p>
+              <a:r>
+                <a:rPr lang="fr-FR" sz="1600" b="1" dirty="0">
+                  <a:solidFill>
+                    <a:sysClr val="windowText" lastClr="000000"/>
+                  </a:solidFill>
+                  <a:latin typeface="Arial" panose="020B0604020202020204" pitchFamily="34" charset="0"/>
+                  <a:cs typeface="Arial" panose="020B0604020202020204" pitchFamily="34" charset="0"/>
+                </a:rPr>
+                <a:t>Line color: Association strength (cLift)</a:t>
+              </a:r>
+            </a:p>
+          </p:txBody>
+        </p:sp>
+      </p:grpSp>
     </p:spTree>
   </p:cSld>
   <p:clrMapOvr>

--- a/fig4.pptx
+++ b/fig4.pptx
@@ -4,13 +4,17 @@
   <p:sldMasterIdLst>
     <p:sldMasterId id="2147483648" r:id="rId1"/>
   </p:sldMasterIdLst>
+  <p:notesMasterIdLst>
+    <p:notesMasterId r:id="rId4"/>
+  </p:notesMasterIdLst>
   <p:sldIdLst>
     <p:sldId id="256" r:id="rId2"/>
+    <p:sldId id="257" r:id="rId3"/>
   </p:sldIdLst>
   <p:sldSz cx="12599988" cy="8640763"/>
   <p:notesSz cx="6858000" cy="9144000"/>
   <p:custDataLst>
-    <p:tags r:id="rId3"/>
+    <p:tags r:id="rId5"/>
   </p:custDataLst>
   <p:defaultTextStyle>
     <a:defPPr>
@@ -126,6 +130,439 @@
 </p:presentation>
 </file>
 
+<file path=ppt/notesMasters/notesMaster1.xml><?xml version="1.0" encoding="utf-8"?>
+<p:notesMaster xmlns:a="http://schemas.openxmlformats.org/drawingml/2006/main" xmlns:r="http://schemas.openxmlformats.org/officeDocument/2006/relationships" xmlns:p="http://schemas.openxmlformats.org/presentationml/2006/main">
+  <p:cSld>
+    <p:bg>
+      <p:bgRef idx="1001">
+        <a:schemeClr val="bg1"/>
+      </p:bgRef>
+    </p:bg>
+    <p:spTree>
+      <p:nvGrpSpPr>
+        <p:cNvPr id="1" name=""/>
+        <p:cNvGrpSpPr/>
+        <p:nvPr/>
+      </p:nvGrpSpPr>
+      <p:grpSpPr>
+        <a:xfrm>
+          <a:off x="0" y="0"/>
+          <a:ext cx="0" cy="0"/>
+          <a:chOff x="0" y="0"/>
+          <a:chExt cx="0" cy="0"/>
+        </a:xfrm>
+      </p:grpSpPr>
+      <p:sp>
+        <p:nvSpPr>
+          <p:cNvPr id="2" name="Espace réservé de l'en-tête 1"/>
+          <p:cNvSpPr>
+            <a:spLocks noGrp="1"/>
+          </p:cNvSpPr>
+          <p:nvPr>
+            <p:ph type="hdr" sz="quarter"/>
+          </p:nvPr>
+        </p:nvSpPr>
+        <p:spPr>
+          <a:xfrm>
+            <a:off x="0" y="0"/>
+            <a:ext cx="2971800" cy="458788"/>
+          </a:xfrm>
+          <a:prstGeom prst="rect">
+            <a:avLst/>
+          </a:prstGeom>
+        </p:spPr>
+        <p:txBody>
+          <a:bodyPr vert="horz" lIns="91440" tIns="45720" rIns="91440" bIns="45720" rtlCol="0"/>
+          <a:lstStyle>
+            <a:lvl1pPr algn="l">
+              <a:defRPr sz="1200"/>
+            </a:lvl1pPr>
+          </a:lstStyle>
+          <a:p>
+            <a:endParaRPr lang="fr-FR"/>
+          </a:p>
+        </p:txBody>
+      </p:sp>
+      <p:sp>
+        <p:nvSpPr>
+          <p:cNvPr id="3" name="Espace réservé de la date 2"/>
+          <p:cNvSpPr>
+            <a:spLocks noGrp="1"/>
+          </p:cNvSpPr>
+          <p:nvPr>
+            <p:ph type="dt" idx="1"/>
+          </p:nvPr>
+        </p:nvSpPr>
+        <p:spPr>
+          <a:xfrm>
+            <a:off x="3884613" y="0"/>
+            <a:ext cx="2971800" cy="458788"/>
+          </a:xfrm>
+          <a:prstGeom prst="rect">
+            <a:avLst/>
+          </a:prstGeom>
+        </p:spPr>
+        <p:txBody>
+          <a:bodyPr vert="horz" lIns="91440" tIns="45720" rIns="91440" bIns="45720" rtlCol="0"/>
+          <a:lstStyle>
+            <a:lvl1pPr algn="r">
+              <a:defRPr sz="1200"/>
+            </a:lvl1pPr>
+          </a:lstStyle>
+          <a:p>
+            <a:fld id="{A21AE48D-D7D9-46F8-80AC-255986AD24D4}" type="datetimeFigureOut">
+              <a:rPr lang="fr-FR" smtClean="0"/>
+              <a:t>06/06/2025</a:t>
+            </a:fld>
+            <a:endParaRPr lang="fr-FR"/>
+          </a:p>
+        </p:txBody>
+      </p:sp>
+      <p:sp>
+        <p:nvSpPr>
+          <p:cNvPr id="4" name="Espace réservé de l'image des diapositives 3"/>
+          <p:cNvSpPr>
+            <a:spLocks noGrp="1" noRot="1" noChangeAspect="1"/>
+          </p:cNvSpPr>
+          <p:nvPr>
+            <p:ph type="sldImg" idx="2"/>
+          </p:nvPr>
+        </p:nvSpPr>
+        <p:spPr>
+          <a:xfrm>
+            <a:off x="1179513" y="1143000"/>
+            <a:ext cx="4498975" cy="3086100"/>
+          </a:xfrm>
+          <a:prstGeom prst="rect">
+            <a:avLst/>
+          </a:prstGeom>
+          <a:noFill/>
+          <a:ln w="12700">
+            <a:solidFill>
+              <a:prstClr val="black"/>
+            </a:solidFill>
+          </a:ln>
+        </p:spPr>
+        <p:txBody>
+          <a:bodyPr vert="horz" lIns="91440" tIns="45720" rIns="91440" bIns="45720" rtlCol="0" anchor="ctr"/>
+          <a:lstStyle/>
+          <a:p>
+            <a:endParaRPr lang="fr-FR"/>
+          </a:p>
+        </p:txBody>
+      </p:sp>
+      <p:sp>
+        <p:nvSpPr>
+          <p:cNvPr id="5" name="Espace réservé des notes 4"/>
+          <p:cNvSpPr>
+            <a:spLocks noGrp="1"/>
+          </p:cNvSpPr>
+          <p:nvPr>
+            <p:ph type="body" sz="quarter" idx="3"/>
+          </p:nvPr>
+        </p:nvSpPr>
+        <p:spPr>
+          <a:xfrm>
+            <a:off x="685800" y="4400550"/>
+            <a:ext cx="5486400" cy="3600450"/>
+          </a:xfrm>
+          <a:prstGeom prst="rect">
+            <a:avLst/>
+          </a:prstGeom>
+        </p:spPr>
+        <p:txBody>
+          <a:bodyPr vert="horz" lIns="91440" tIns="45720" rIns="91440" bIns="45720" rtlCol="0"/>
+          <a:lstStyle/>
+          <a:p>
+            <a:pPr lvl="0"/>
+            <a:r>
+              <a:rPr lang="fr-FR"/>
+              <a:t>Cliquez pour modifier les styles du texte du masque</a:t>
+            </a:r>
+          </a:p>
+          <a:p>
+            <a:pPr lvl="1"/>
+            <a:r>
+              <a:rPr lang="fr-FR"/>
+              <a:t>Deuxième niveau</a:t>
+            </a:r>
+          </a:p>
+          <a:p>
+            <a:pPr lvl="2"/>
+            <a:r>
+              <a:rPr lang="fr-FR"/>
+              <a:t>Troisième niveau</a:t>
+            </a:r>
+          </a:p>
+          <a:p>
+            <a:pPr lvl="3"/>
+            <a:r>
+              <a:rPr lang="fr-FR"/>
+              <a:t>Quatrième niveau</a:t>
+            </a:r>
+          </a:p>
+          <a:p>
+            <a:pPr lvl="4"/>
+            <a:r>
+              <a:rPr lang="fr-FR"/>
+              <a:t>Cinquième niveau</a:t>
+            </a:r>
+          </a:p>
+        </p:txBody>
+      </p:sp>
+      <p:sp>
+        <p:nvSpPr>
+          <p:cNvPr id="6" name="Espace réservé du pied de page 5"/>
+          <p:cNvSpPr>
+            <a:spLocks noGrp="1"/>
+          </p:cNvSpPr>
+          <p:nvPr>
+            <p:ph type="ftr" sz="quarter" idx="4"/>
+          </p:nvPr>
+        </p:nvSpPr>
+        <p:spPr>
+          <a:xfrm>
+            <a:off x="0" y="8685213"/>
+            <a:ext cx="2971800" cy="458787"/>
+          </a:xfrm>
+          <a:prstGeom prst="rect">
+            <a:avLst/>
+          </a:prstGeom>
+        </p:spPr>
+        <p:txBody>
+          <a:bodyPr vert="horz" lIns="91440" tIns="45720" rIns="91440" bIns="45720" rtlCol="0" anchor="b"/>
+          <a:lstStyle>
+            <a:lvl1pPr algn="l">
+              <a:defRPr sz="1200"/>
+            </a:lvl1pPr>
+          </a:lstStyle>
+          <a:p>
+            <a:endParaRPr lang="fr-FR"/>
+          </a:p>
+        </p:txBody>
+      </p:sp>
+      <p:sp>
+        <p:nvSpPr>
+          <p:cNvPr id="7" name="Espace réservé du numéro de diapositive 6"/>
+          <p:cNvSpPr>
+            <a:spLocks noGrp="1"/>
+          </p:cNvSpPr>
+          <p:nvPr>
+            <p:ph type="sldNum" sz="quarter" idx="5"/>
+          </p:nvPr>
+        </p:nvSpPr>
+        <p:spPr>
+          <a:xfrm>
+            <a:off x="3884613" y="8685213"/>
+            <a:ext cx="2971800" cy="458787"/>
+          </a:xfrm>
+          <a:prstGeom prst="rect">
+            <a:avLst/>
+          </a:prstGeom>
+        </p:spPr>
+        <p:txBody>
+          <a:bodyPr vert="horz" lIns="91440" tIns="45720" rIns="91440" bIns="45720" rtlCol="0" anchor="b"/>
+          <a:lstStyle>
+            <a:lvl1pPr algn="r">
+              <a:defRPr sz="1200"/>
+            </a:lvl1pPr>
+          </a:lstStyle>
+          <a:p>
+            <a:fld id="{DB1E9922-CB52-49F7-BA04-8363A23E0C72}" type="slidenum">
+              <a:rPr lang="fr-FR" smtClean="0"/>
+              <a:t>‹N°›</a:t>
+            </a:fld>
+            <a:endParaRPr lang="fr-FR"/>
+          </a:p>
+        </p:txBody>
+      </p:sp>
+    </p:spTree>
+    <p:extLst>
+      <p:ext uri="{BB962C8B-B14F-4D97-AF65-F5344CB8AC3E}">
+        <p14:creationId xmlns:p14="http://schemas.microsoft.com/office/powerpoint/2010/main" val="3866386011"/>
+      </p:ext>
+    </p:extLst>
+  </p:cSld>
+  <p:clrMap bg1="lt1" tx1="dk1" bg2="lt2" tx2="dk2" accent1="accent1" accent2="accent2" accent3="accent3" accent4="accent4" accent5="accent5" accent6="accent6" hlink="hlink" folHlink="folHlink"/>
+  <p:notesStyle>
+    <a:lvl1pPr marL="0" algn="l" defTabSz="914400" rtl="0" eaLnBrk="1" latinLnBrk="0" hangingPunct="1">
+      <a:defRPr sz="1200" kern="1200">
+        <a:solidFill>
+          <a:schemeClr val="tx1"/>
+        </a:solidFill>
+        <a:latin typeface="+mn-lt"/>
+        <a:ea typeface="+mn-ea"/>
+        <a:cs typeface="+mn-cs"/>
+      </a:defRPr>
+    </a:lvl1pPr>
+    <a:lvl2pPr marL="457200" algn="l" defTabSz="914400" rtl="0" eaLnBrk="1" latinLnBrk="0" hangingPunct="1">
+      <a:defRPr sz="1200" kern="1200">
+        <a:solidFill>
+          <a:schemeClr val="tx1"/>
+        </a:solidFill>
+        <a:latin typeface="+mn-lt"/>
+        <a:ea typeface="+mn-ea"/>
+        <a:cs typeface="+mn-cs"/>
+      </a:defRPr>
+    </a:lvl2pPr>
+    <a:lvl3pPr marL="914400" algn="l" defTabSz="914400" rtl="0" eaLnBrk="1" latinLnBrk="0" hangingPunct="1">
+      <a:defRPr sz="1200" kern="1200">
+        <a:solidFill>
+          <a:schemeClr val="tx1"/>
+        </a:solidFill>
+        <a:latin typeface="+mn-lt"/>
+        <a:ea typeface="+mn-ea"/>
+        <a:cs typeface="+mn-cs"/>
+      </a:defRPr>
+    </a:lvl3pPr>
+    <a:lvl4pPr marL="1371600" algn="l" defTabSz="914400" rtl="0" eaLnBrk="1" latinLnBrk="0" hangingPunct="1">
+      <a:defRPr sz="1200" kern="1200">
+        <a:solidFill>
+          <a:schemeClr val="tx1"/>
+        </a:solidFill>
+        <a:latin typeface="+mn-lt"/>
+        <a:ea typeface="+mn-ea"/>
+        <a:cs typeface="+mn-cs"/>
+      </a:defRPr>
+    </a:lvl4pPr>
+    <a:lvl5pPr marL="1828800" algn="l" defTabSz="914400" rtl="0" eaLnBrk="1" latinLnBrk="0" hangingPunct="1">
+      <a:defRPr sz="1200" kern="1200">
+        <a:solidFill>
+          <a:schemeClr val="tx1"/>
+        </a:solidFill>
+        <a:latin typeface="+mn-lt"/>
+        <a:ea typeface="+mn-ea"/>
+        <a:cs typeface="+mn-cs"/>
+      </a:defRPr>
+    </a:lvl5pPr>
+    <a:lvl6pPr marL="2286000" algn="l" defTabSz="914400" rtl="0" eaLnBrk="1" latinLnBrk="0" hangingPunct="1">
+      <a:defRPr sz="1200" kern="1200">
+        <a:solidFill>
+          <a:schemeClr val="tx1"/>
+        </a:solidFill>
+        <a:latin typeface="+mn-lt"/>
+        <a:ea typeface="+mn-ea"/>
+        <a:cs typeface="+mn-cs"/>
+      </a:defRPr>
+    </a:lvl6pPr>
+    <a:lvl7pPr marL="2743200" algn="l" defTabSz="914400" rtl="0" eaLnBrk="1" latinLnBrk="0" hangingPunct="1">
+      <a:defRPr sz="1200" kern="1200">
+        <a:solidFill>
+          <a:schemeClr val="tx1"/>
+        </a:solidFill>
+        <a:latin typeface="+mn-lt"/>
+        <a:ea typeface="+mn-ea"/>
+        <a:cs typeface="+mn-cs"/>
+      </a:defRPr>
+    </a:lvl7pPr>
+    <a:lvl8pPr marL="3200400" algn="l" defTabSz="914400" rtl="0" eaLnBrk="1" latinLnBrk="0" hangingPunct="1">
+      <a:defRPr sz="1200" kern="1200">
+        <a:solidFill>
+          <a:schemeClr val="tx1"/>
+        </a:solidFill>
+        <a:latin typeface="+mn-lt"/>
+        <a:ea typeface="+mn-ea"/>
+        <a:cs typeface="+mn-cs"/>
+      </a:defRPr>
+    </a:lvl8pPr>
+    <a:lvl9pPr marL="3657600" algn="l" defTabSz="914400" rtl="0" eaLnBrk="1" latinLnBrk="0" hangingPunct="1">
+      <a:defRPr sz="1200" kern="1200">
+        <a:solidFill>
+          <a:schemeClr val="tx1"/>
+        </a:solidFill>
+        <a:latin typeface="+mn-lt"/>
+        <a:ea typeface="+mn-ea"/>
+        <a:cs typeface="+mn-cs"/>
+      </a:defRPr>
+    </a:lvl9pPr>
+  </p:notesStyle>
+</p:notesMaster>
+</file>
+
+<file path=ppt/notesSlides/notesSlide1.xml><?xml version="1.0" encoding="utf-8"?>
+<p:notes xmlns:a="http://schemas.openxmlformats.org/drawingml/2006/main" xmlns:r="http://schemas.openxmlformats.org/officeDocument/2006/relationships" xmlns:p="http://schemas.openxmlformats.org/presentationml/2006/main">
+  <p:cSld>
+    <p:spTree>
+      <p:nvGrpSpPr>
+        <p:cNvPr id="1" name=""/>
+        <p:cNvGrpSpPr/>
+        <p:nvPr/>
+      </p:nvGrpSpPr>
+      <p:grpSpPr>
+        <a:xfrm>
+          <a:off x="0" y="0"/>
+          <a:ext cx="0" cy="0"/>
+          <a:chOff x="0" y="0"/>
+          <a:chExt cx="0" cy="0"/>
+        </a:xfrm>
+      </p:grpSpPr>
+      <p:sp>
+        <p:nvSpPr>
+          <p:cNvPr id="2" name="Espace réservé de l'image des diapositives 1"/>
+          <p:cNvSpPr>
+            <a:spLocks noGrp="1" noRot="1" noChangeAspect="1"/>
+          </p:cNvSpPr>
+          <p:nvPr>
+            <p:ph type="sldImg"/>
+          </p:nvPr>
+        </p:nvSpPr>
+        <p:spPr/>
+      </p:sp>
+      <p:sp>
+        <p:nvSpPr>
+          <p:cNvPr id="3" name="Espace réservé des notes 2"/>
+          <p:cNvSpPr>
+            <a:spLocks noGrp="1"/>
+          </p:cNvSpPr>
+          <p:nvPr>
+            <p:ph type="body" idx="1"/>
+          </p:nvPr>
+        </p:nvSpPr>
+        <p:spPr/>
+        <p:txBody>
+          <a:bodyPr/>
+          <a:lstStyle/>
+          <a:p>
+            <a:endParaRPr lang="fr-FR" dirty="0"/>
+          </a:p>
+        </p:txBody>
+      </p:sp>
+      <p:sp>
+        <p:nvSpPr>
+          <p:cNvPr id="4" name="Espace réservé du numéro de diapositive 3"/>
+          <p:cNvSpPr>
+            <a:spLocks noGrp="1"/>
+          </p:cNvSpPr>
+          <p:nvPr>
+            <p:ph type="sldNum" sz="quarter" idx="5"/>
+          </p:nvPr>
+        </p:nvSpPr>
+        <p:spPr/>
+        <p:txBody>
+          <a:bodyPr/>
+          <a:lstStyle/>
+          <a:p>
+            <a:fld id="{DB1E9922-CB52-49F7-BA04-8363A23E0C72}" type="slidenum">
+              <a:rPr lang="fr-FR" smtClean="0"/>
+              <a:t>2</a:t>
+            </a:fld>
+            <a:endParaRPr lang="fr-FR"/>
+          </a:p>
+        </p:txBody>
+      </p:sp>
+    </p:spTree>
+    <p:extLst>
+      <p:ext uri="{BB962C8B-B14F-4D97-AF65-F5344CB8AC3E}">
+        <p14:creationId xmlns:p14="http://schemas.microsoft.com/office/powerpoint/2010/main" val="995228305"/>
+      </p:ext>
+    </p:extLst>
+  </p:cSld>
+  <p:clrMapOvr>
+    <a:masterClrMapping/>
+  </p:clrMapOvr>
+</p:notes>
+</file>
+
 <file path=ppt/slideLayouts/slideLayout1.xml><?xml version="1.0" encoding="utf-8"?>
 <p:sldLayout xmlns:a="http://schemas.openxmlformats.org/drawingml/2006/main" xmlns:r="http://schemas.openxmlformats.org/officeDocument/2006/relationships" xmlns:p="http://schemas.openxmlformats.org/presentationml/2006/main" type="title" preserve="1">
   <p:cSld name="Title Slide">
@@ -307,7 +744,7 @@
           <a:p>
             <a:fld id="{E6744CE3-0875-4B69-89C0-6F72D8139561}" type="datetimeFigureOut">
               <a:rPr lang="en-GB" smtClean="0"/>
-              <a:t>05/06/2025</a:t>
+              <a:t>06/06/2025</a:t>
             </a:fld>
             <a:endParaRPr lang="en-GB"/>
           </a:p>
@@ -477,7 +914,7 @@
           <a:p>
             <a:fld id="{E6744CE3-0875-4B69-89C0-6F72D8139561}" type="datetimeFigureOut">
               <a:rPr lang="en-GB" smtClean="0"/>
-              <a:t>05/06/2025</a:t>
+              <a:t>06/06/2025</a:t>
             </a:fld>
             <a:endParaRPr lang="en-GB"/>
           </a:p>
@@ -723,7 +1160,7 @@
           <a:p>
             <a:fld id="{E6744CE3-0875-4B69-89C0-6F72D8139561}" type="datetimeFigureOut">
               <a:rPr lang="en-GB" smtClean="0"/>
-              <a:t>05/06/2025</a:t>
+              <a:t>06/06/2025</a:t>
             </a:fld>
             <a:endParaRPr lang="en-GB"/>
           </a:p>
@@ -1011,7 +1448,7 @@
           <a:p>
             <a:fld id="{E6744CE3-0875-4B69-89C0-6F72D8139561}" type="datetimeFigureOut">
               <a:rPr lang="en-GB" smtClean="0"/>
-              <a:t>05/06/2025</a:t>
+              <a:t>06/06/2025</a:t>
             </a:fld>
             <a:endParaRPr lang="en-GB"/>
           </a:p>
@@ -1433,7 +1870,7 @@
           <a:p>
             <a:fld id="{E6744CE3-0875-4B69-89C0-6F72D8139561}" type="datetimeFigureOut">
               <a:rPr lang="en-GB" smtClean="0"/>
-              <a:t>05/06/2025</a:t>
+              <a:t>06/06/2025</a:t>
             </a:fld>
             <a:endParaRPr lang="en-GB"/>
           </a:p>
@@ -1551,7 +1988,7 @@
           <a:p>
             <a:fld id="{E6744CE3-0875-4B69-89C0-6F72D8139561}" type="datetimeFigureOut">
               <a:rPr lang="en-GB" smtClean="0"/>
-              <a:t>05/06/2025</a:t>
+              <a:t>06/06/2025</a:t>
             </a:fld>
             <a:endParaRPr lang="en-GB"/>
           </a:p>
@@ -1646,7 +2083,7 @@
           <a:p>
             <a:fld id="{E6744CE3-0875-4B69-89C0-6F72D8139561}" type="datetimeFigureOut">
               <a:rPr lang="en-GB" smtClean="0"/>
-              <a:t>05/06/2025</a:t>
+              <a:t>06/06/2025</a:t>
             </a:fld>
             <a:endParaRPr lang="en-GB"/>
           </a:p>
@@ -1859,7 +2296,7 @@
           <a:p>
             <a:fld id="{E6744CE3-0875-4B69-89C0-6F72D8139561}" type="datetimeFigureOut">
               <a:rPr lang="en-GB" smtClean="0"/>
-              <a:t>05/06/2025</a:t>
+              <a:t>06/06/2025</a:t>
             </a:fld>
             <a:endParaRPr lang="en-GB"/>
           </a:p>
@@ -6035,6 +6472,380 @@
 </p:sld>
 </file>
 
+<file path=ppt/slides/slide2.xml><?xml version="1.0" encoding="utf-8"?>
+<p:sld xmlns:a="http://schemas.openxmlformats.org/drawingml/2006/main" xmlns:r="http://schemas.openxmlformats.org/officeDocument/2006/relationships" xmlns:p="http://schemas.openxmlformats.org/presentationml/2006/main">
+  <p:cSld>
+    <p:spTree>
+      <p:nvGrpSpPr>
+        <p:cNvPr id="1" name=""/>
+        <p:cNvGrpSpPr/>
+        <p:nvPr/>
+      </p:nvGrpSpPr>
+      <p:grpSpPr>
+        <a:xfrm>
+          <a:off x="0" y="0"/>
+          <a:ext cx="0" cy="0"/>
+          <a:chOff x="0" y="0"/>
+          <a:chExt cx="0" cy="0"/>
+        </a:xfrm>
+      </p:grpSpPr>
+      <p:pic>
+        <p:nvPicPr>
+          <p:cNvPr id="4" name="Image 3">
+            <a:extLst>
+              <a:ext uri="{FF2B5EF4-FFF2-40B4-BE49-F238E27FC236}">
+                <a16:creationId xmlns:a16="http://schemas.microsoft.com/office/drawing/2014/main" id="{54D1C7FD-A45D-4290-809B-4ADEE582AF85}"/>
+              </a:ext>
+            </a:extLst>
+          </p:cNvPr>
+          <p:cNvPicPr>
+            <a:picLocks noChangeAspect="1"/>
+          </p:cNvPicPr>
+          <p:nvPr/>
+        </p:nvPicPr>
+        <p:blipFill>
+          <a:blip r:embed="rId3" cstate="print">
+            <a:extLst>
+              <a:ext uri="{28A0092B-C50C-407E-A947-70E740481C1C}">
+                <a14:useLocalDpi xmlns:a14="http://schemas.microsoft.com/office/drawing/2010/main" val="0"/>
+              </a:ext>
+            </a:extLst>
+          </a:blip>
+          <a:stretch>
+            <a:fillRect/>
+          </a:stretch>
+        </p:blipFill>
+        <p:spPr>
+          <a:xfrm>
+            <a:off x="899394" y="1108347"/>
+            <a:ext cx="11412562" cy="4945347"/>
+          </a:xfrm>
+          <a:prstGeom prst="rect">
+            <a:avLst/>
+          </a:prstGeom>
+        </p:spPr>
+      </p:pic>
+      <p:sp>
+        <p:nvSpPr>
+          <p:cNvPr id="5" name="ZoneTexte 4">
+            <a:extLst>
+              <a:ext uri="{FF2B5EF4-FFF2-40B4-BE49-F238E27FC236}">
+                <a16:creationId xmlns:a16="http://schemas.microsoft.com/office/drawing/2014/main" id="{FF6D6915-735D-485C-B2A8-AE8E23D6144A}"/>
+              </a:ext>
+            </a:extLst>
+          </p:cNvPr>
+          <p:cNvSpPr txBox="1"/>
+          <p:nvPr/>
+        </p:nvSpPr>
+        <p:spPr>
+          <a:xfrm>
+            <a:off x="1562172" y="806981"/>
+            <a:ext cx="771071" cy="307777"/>
+          </a:xfrm>
+          <a:prstGeom prst="rect">
+            <a:avLst/>
+          </a:prstGeom>
+          <a:noFill/>
+        </p:spPr>
+        <p:txBody>
+          <a:bodyPr rot="0" spcFirstLastPara="0" vertOverflow="overflow" horzOverflow="overflow" vert="horz" wrap="square" lIns="91440" tIns="45720" rIns="91440" bIns="45720" numCol="1" spcCol="0" rtlCol="0" fromWordArt="0" anchor="t" anchorCtr="0" forceAA="0" compatLnSpc="1">
+            <a:prstTxWarp prst="textNoShape">
+              <a:avLst/>
+            </a:prstTxWarp>
+            <a:spAutoFit/>
+          </a:bodyPr>
+          <a:lstStyle/>
+          <a:p>
+            <a:pPr algn="ctr"/>
+            <a:r>
+              <a:rPr lang="fr-FR" sz="1400" b="1">
+                <a:latin typeface="Arial"/>
+                <a:cs typeface="Arial"/>
+              </a:rPr>
+              <a:t>2018</a:t>
+            </a:r>
+          </a:p>
+        </p:txBody>
+      </p:sp>
+      <p:sp>
+        <p:nvSpPr>
+          <p:cNvPr id="6" name="ZoneTexte 5">
+            <a:extLst>
+              <a:ext uri="{FF2B5EF4-FFF2-40B4-BE49-F238E27FC236}">
+                <a16:creationId xmlns:a16="http://schemas.microsoft.com/office/drawing/2014/main" id="{C8D440F6-9BA5-4065-882B-F30CA68E3E2A}"/>
+              </a:ext>
+            </a:extLst>
+          </p:cNvPr>
+          <p:cNvSpPr txBox="1"/>
+          <p:nvPr/>
+        </p:nvSpPr>
+        <p:spPr>
+          <a:xfrm>
+            <a:off x="3875066" y="806981"/>
+            <a:ext cx="771071" cy="307777"/>
+          </a:xfrm>
+          <a:prstGeom prst="rect">
+            <a:avLst/>
+          </a:prstGeom>
+          <a:noFill/>
+        </p:spPr>
+        <p:txBody>
+          <a:bodyPr rot="0" spcFirstLastPara="0" vertOverflow="overflow" horzOverflow="overflow" vert="horz" wrap="square" lIns="91440" tIns="45720" rIns="91440" bIns="45720" numCol="1" spcCol="0" rtlCol="0" fromWordArt="0" anchor="t" anchorCtr="0" forceAA="0" compatLnSpc="1">
+            <a:prstTxWarp prst="textNoShape">
+              <a:avLst/>
+            </a:prstTxWarp>
+            <a:spAutoFit/>
+          </a:bodyPr>
+          <a:lstStyle/>
+          <a:p>
+            <a:pPr algn="ctr"/>
+            <a:r>
+              <a:rPr lang="fr-FR" sz="1400" b="1" dirty="0">
+                <a:latin typeface="Arial"/>
+                <a:cs typeface="Arial"/>
+              </a:rPr>
+              <a:t>2019</a:t>
+            </a:r>
+          </a:p>
+        </p:txBody>
+      </p:sp>
+      <p:sp>
+        <p:nvSpPr>
+          <p:cNvPr id="7" name="ZoneTexte 6">
+            <a:extLst>
+              <a:ext uri="{FF2B5EF4-FFF2-40B4-BE49-F238E27FC236}">
+                <a16:creationId xmlns:a16="http://schemas.microsoft.com/office/drawing/2014/main" id="{2672C366-E3EF-40B0-800B-E4F042DEFF8C}"/>
+              </a:ext>
+            </a:extLst>
+          </p:cNvPr>
+          <p:cNvSpPr txBox="1"/>
+          <p:nvPr/>
+        </p:nvSpPr>
+        <p:spPr>
+          <a:xfrm>
+            <a:off x="6187960" y="806980"/>
+            <a:ext cx="771071" cy="307777"/>
+          </a:xfrm>
+          <a:prstGeom prst="rect">
+            <a:avLst/>
+          </a:prstGeom>
+          <a:noFill/>
+        </p:spPr>
+        <p:txBody>
+          <a:bodyPr rot="0" spcFirstLastPara="0" vertOverflow="overflow" horzOverflow="overflow" vert="horz" wrap="square" lIns="91440" tIns="45720" rIns="91440" bIns="45720" numCol="1" spcCol="0" rtlCol="0" fromWordArt="0" anchor="t" anchorCtr="0" forceAA="0" compatLnSpc="1">
+            <a:prstTxWarp prst="textNoShape">
+              <a:avLst/>
+            </a:prstTxWarp>
+            <a:spAutoFit/>
+          </a:bodyPr>
+          <a:lstStyle/>
+          <a:p>
+            <a:pPr algn="ctr"/>
+            <a:r>
+              <a:rPr lang="fr-FR" sz="1400" b="1" dirty="0">
+                <a:latin typeface="Arial"/>
+                <a:cs typeface="Arial"/>
+              </a:rPr>
+              <a:t>2020</a:t>
+            </a:r>
+          </a:p>
+        </p:txBody>
+      </p:sp>
+      <p:sp>
+        <p:nvSpPr>
+          <p:cNvPr id="8" name="ZoneTexte 7">
+            <a:extLst>
+              <a:ext uri="{FF2B5EF4-FFF2-40B4-BE49-F238E27FC236}">
+                <a16:creationId xmlns:a16="http://schemas.microsoft.com/office/drawing/2014/main" id="{05BD1AB5-662E-4CF6-86C1-D46BFD086047}"/>
+              </a:ext>
+            </a:extLst>
+          </p:cNvPr>
+          <p:cNvSpPr txBox="1"/>
+          <p:nvPr/>
+        </p:nvSpPr>
+        <p:spPr>
+          <a:xfrm>
+            <a:off x="8500854" y="806981"/>
+            <a:ext cx="771071" cy="307777"/>
+          </a:xfrm>
+          <a:prstGeom prst="rect">
+            <a:avLst/>
+          </a:prstGeom>
+          <a:noFill/>
+        </p:spPr>
+        <p:txBody>
+          <a:bodyPr rot="0" spcFirstLastPara="0" vertOverflow="overflow" horzOverflow="overflow" vert="horz" wrap="square" lIns="91440" tIns="45720" rIns="91440" bIns="45720" numCol="1" spcCol="0" rtlCol="0" fromWordArt="0" anchor="t" anchorCtr="0" forceAA="0" compatLnSpc="1">
+            <a:prstTxWarp prst="textNoShape">
+              <a:avLst/>
+            </a:prstTxWarp>
+            <a:spAutoFit/>
+          </a:bodyPr>
+          <a:lstStyle/>
+          <a:p>
+            <a:pPr algn="ctr"/>
+            <a:r>
+              <a:rPr lang="fr-FR" sz="1400" b="1">
+                <a:latin typeface="Arial"/>
+                <a:cs typeface="Arial"/>
+              </a:rPr>
+              <a:t>2021</a:t>
+            </a:r>
+          </a:p>
+        </p:txBody>
+      </p:sp>
+      <p:sp>
+        <p:nvSpPr>
+          <p:cNvPr id="9" name="ZoneTexte 8">
+            <a:extLst>
+              <a:ext uri="{FF2B5EF4-FFF2-40B4-BE49-F238E27FC236}">
+                <a16:creationId xmlns:a16="http://schemas.microsoft.com/office/drawing/2014/main" id="{E20FE92C-3ECB-42E8-AC0D-9749FE25B77F}"/>
+              </a:ext>
+            </a:extLst>
+          </p:cNvPr>
+          <p:cNvSpPr txBox="1"/>
+          <p:nvPr/>
+        </p:nvSpPr>
+        <p:spPr>
+          <a:xfrm>
+            <a:off x="10813748" y="800570"/>
+            <a:ext cx="771071" cy="307777"/>
+          </a:xfrm>
+          <a:prstGeom prst="rect">
+            <a:avLst/>
+          </a:prstGeom>
+          <a:noFill/>
+        </p:spPr>
+        <p:txBody>
+          <a:bodyPr rot="0" spcFirstLastPara="0" vertOverflow="overflow" horzOverflow="overflow" vert="horz" wrap="square" lIns="91440" tIns="45720" rIns="91440" bIns="45720" numCol="1" spcCol="0" rtlCol="0" fromWordArt="0" anchor="t" anchorCtr="0" forceAA="0" compatLnSpc="1">
+            <a:prstTxWarp prst="textNoShape">
+              <a:avLst/>
+            </a:prstTxWarp>
+            <a:spAutoFit/>
+          </a:bodyPr>
+          <a:lstStyle/>
+          <a:p>
+            <a:pPr algn="ctr"/>
+            <a:r>
+              <a:rPr lang="fr-FR" sz="1400" b="1">
+                <a:latin typeface="Arial"/>
+                <a:cs typeface="Arial"/>
+              </a:rPr>
+              <a:t>2022</a:t>
+            </a:r>
+          </a:p>
+        </p:txBody>
+      </p:sp>
+      <p:sp>
+        <p:nvSpPr>
+          <p:cNvPr id="10" name="ZoneTexte 9">
+            <a:extLst>
+              <a:ext uri="{FF2B5EF4-FFF2-40B4-BE49-F238E27FC236}">
+                <a16:creationId xmlns:a16="http://schemas.microsoft.com/office/drawing/2014/main" id="{13A8A52D-A49E-406C-92EA-D52C8920597A}"/>
+              </a:ext>
+            </a:extLst>
+          </p:cNvPr>
+          <p:cNvSpPr txBox="1"/>
+          <p:nvPr/>
+        </p:nvSpPr>
+        <p:spPr>
+          <a:xfrm>
+            <a:off x="-16853" y="4320381"/>
+            <a:ext cx="769911" cy="738664"/>
+          </a:xfrm>
+          <a:prstGeom prst="rect">
+            <a:avLst/>
+          </a:prstGeom>
+          <a:noFill/>
+        </p:spPr>
+        <p:txBody>
+          <a:bodyPr rot="0" spcFirstLastPara="0" vertOverflow="overflow" horzOverflow="overflow" vert="horz" wrap="square" lIns="91440" tIns="45720" rIns="91440" bIns="45720" numCol="1" spcCol="0" rtlCol="0" fromWordArt="0" anchor="t" anchorCtr="0" forceAA="0" compatLnSpc="1">
+            <a:prstTxWarp prst="textNoShape">
+              <a:avLst/>
+            </a:prstTxWarp>
+            <a:spAutoFit/>
+          </a:bodyPr>
+          <a:lstStyle/>
+          <a:p>
+            <a:r>
+              <a:rPr lang="fr-FR" sz="1400" b="1" dirty="0">
+                <a:latin typeface="Arial"/>
+                <a:cs typeface="Arial"/>
+              </a:rPr>
+              <a:t>Non-ESBL </a:t>
+            </a:r>
+            <a:r>
+              <a:rPr lang="fr-FR" sz="1400" b="1" i="1" dirty="0">
+                <a:latin typeface="Arial"/>
+                <a:cs typeface="Arial"/>
+              </a:rPr>
+              <a:t>E. coli</a:t>
+            </a:r>
+            <a:endParaRPr lang="fr-FR" sz="1400" i="1" dirty="0"/>
+          </a:p>
+        </p:txBody>
+      </p:sp>
+      <p:sp>
+        <p:nvSpPr>
+          <p:cNvPr id="11" name="ZoneTexte 10">
+            <a:extLst>
+              <a:ext uri="{FF2B5EF4-FFF2-40B4-BE49-F238E27FC236}">
+                <a16:creationId xmlns:a16="http://schemas.microsoft.com/office/drawing/2014/main" id="{141F06AE-C952-45FC-BF87-6ADDCE40A775}"/>
+              </a:ext>
+            </a:extLst>
+          </p:cNvPr>
+          <p:cNvSpPr txBox="1"/>
+          <p:nvPr/>
+        </p:nvSpPr>
+        <p:spPr>
+          <a:xfrm>
+            <a:off x="-16853" y="1975249"/>
+            <a:ext cx="771071" cy="523220"/>
+          </a:xfrm>
+          <a:prstGeom prst="rect">
+            <a:avLst/>
+          </a:prstGeom>
+          <a:noFill/>
+        </p:spPr>
+        <p:txBody>
+          <a:bodyPr rot="0" spcFirstLastPara="0" vertOverflow="overflow" horzOverflow="overflow" vert="horz" wrap="square" lIns="91440" tIns="45720" rIns="91440" bIns="45720" numCol="1" spcCol="0" rtlCol="0" fromWordArt="0" anchor="t" anchorCtr="0" forceAA="0" compatLnSpc="1">
+            <a:prstTxWarp prst="textNoShape">
+              <a:avLst/>
+            </a:prstTxWarp>
+            <a:spAutoFit/>
+          </a:bodyPr>
+          <a:lstStyle/>
+          <a:p>
+            <a:r>
+              <a:rPr lang="fr-FR" sz="1400" b="1" dirty="0">
+                <a:latin typeface="Arial"/>
+                <a:cs typeface="Arial"/>
+              </a:rPr>
+              <a:t>ESBL </a:t>
+            </a:r>
+            <a:r>
+              <a:rPr lang="fr-FR" sz="1400" b="1" i="1" dirty="0">
+                <a:latin typeface="Arial"/>
+                <a:cs typeface="Arial"/>
+              </a:rPr>
+              <a:t>E. coli</a:t>
+            </a:r>
+            <a:endParaRPr lang="fr-FR" sz="1400" i="1" dirty="0"/>
+          </a:p>
+        </p:txBody>
+      </p:sp>
+    </p:spTree>
+    <p:extLst>
+      <p:ext uri="{BB962C8B-B14F-4D97-AF65-F5344CB8AC3E}">
+        <p14:creationId xmlns:p14="http://schemas.microsoft.com/office/powerpoint/2010/main" val="1663611299"/>
+      </p:ext>
+    </p:extLst>
+  </p:cSld>
+  <p:clrMapOvr>
+    <a:masterClrMapping/>
+  </p:clrMapOvr>
+</p:sld>
+</file>
+
 <file path=ppt/tags/tag1.xml><?xml version="1.0" encoding="utf-8"?>
 <p:tagLst xmlns:a="http://schemas.openxmlformats.org/drawingml/2006/main" xmlns:r="http://schemas.openxmlformats.org/officeDocument/2006/relationships" xmlns:p="http://schemas.openxmlformats.org/presentationml/2006/main">
   <p:tag name="_AMO_UNIQUEIDENTIFIER" val="Empty"/>
@@ -6324,4 +7135,299 @@
   <a:objectDefaults/>
   <a:extraClrSchemeLst/>
 </a:theme>
+</file>
+
+<file path=ppt/theme/theme2.xml><?xml version="1.0" encoding="utf-8"?>
+<a:theme xmlns:a="http://schemas.openxmlformats.org/drawingml/2006/main" name="Thème Office">
+  <a:themeElements>
+    <a:clrScheme name="Office">
+      <a:dk1>
+        <a:sysClr val="windowText" lastClr="000000"/>
+      </a:dk1>
+      <a:lt1>
+        <a:sysClr val="window" lastClr="FFFFFF"/>
+      </a:lt1>
+      <a:dk2>
+        <a:srgbClr val="44546A"/>
+      </a:dk2>
+      <a:lt2>
+        <a:srgbClr val="E7E6E6"/>
+      </a:lt2>
+      <a:accent1>
+        <a:srgbClr val="4472C4"/>
+      </a:accent1>
+      <a:accent2>
+        <a:srgbClr val="ED7D31"/>
+      </a:accent2>
+      <a:accent3>
+        <a:srgbClr val="A5A5A5"/>
+      </a:accent3>
+      <a:accent4>
+        <a:srgbClr val="FFC000"/>
+      </a:accent4>
+      <a:accent5>
+        <a:srgbClr val="5B9BD5"/>
+      </a:accent5>
+      <a:accent6>
+        <a:srgbClr val="70AD47"/>
+      </a:accent6>
+      <a:hlink>
+        <a:srgbClr val="0563C1"/>
+      </a:hlink>
+      <a:folHlink>
+        <a:srgbClr val="954F72"/>
+      </a:folHlink>
+    </a:clrScheme>
+    <a:fontScheme name="Office">
+      <a:majorFont>
+        <a:latin typeface="Calibri Light" panose="020F0302020204030204"/>
+        <a:ea typeface=""/>
+        <a:cs typeface=""/>
+        <a:font script="Jpan" typeface="游ゴシック Light"/>
+        <a:font script="Hang" typeface="맑은 고딕"/>
+        <a:font script="Hans" typeface="等线 Light"/>
+        <a:font script="Hant" typeface="新細明體"/>
+        <a:font script="Arab" typeface="Times New Roman"/>
+        <a:font script="Hebr" typeface="Times New Roman"/>
+        <a:font script="Thai" typeface="Angsana New"/>
+        <a:font script="Ethi" typeface="Nyala"/>
+        <a:font script="Beng" typeface="Vrinda"/>
+        <a:font script="Gujr" typeface="Shruti"/>
+        <a:font script="Khmr" typeface="MoolBoran"/>
+        <a:font script="Knda" typeface="Tunga"/>
+        <a:font script="Guru" typeface="Raavi"/>
+        <a:font script="Cans" typeface="Euphemia"/>
+        <a:font script="Cher" typeface="Plantagenet Cherokee"/>
+        <a:font script="Yiii" typeface="Microsoft Yi Baiti"/>
+        <a:font script="Tibt" typeface="Microsoft Himalaya"/>
+        <a:font script="Thaa" typeface="MV Boli"/>
+        <a:font script="Deva" typeface="Mangal"/>
+        <a:font script="Telu" typeface="Gautami"/>
+        <a:font script="Taml" typeface="Latha"/>
+        <a:font script="Syrc" typeface="Estrangelo Edessa"/>
+        <a:font script="Orya" typeface="Kalinga"/>
+        <a:font script="Mlym" typeface="Kartika"/>
+        <a:font script="Laoo" typeface="DokChampa"/>
+        <a:font script="Sinh" typeface="Iskoola Pota"/>
+        <a:font script="Mong" typeface="Mongolian Baiti"/>
+        <a:font script="Viet" typeface="Times New Roman"/>
+        <a:font script="Uigh" typeface="Microsoft Uighur"/>
+        <a:font script="Geor" typeface="Sylfaen"/>
+        <a:font script="Armn" typeface="Arial"/>
+        <a:font script="Bugi" typeface="Leelawadee UI"/>
+        <a:font script="Bopo" typeface="Microsoft JhengHei"/>
+        <a:font script="Java" typeface="Javanese Text"/>
+        <a:font script="Lisu" typeface="Segoe UI"/>
+        <a:font script="Mymr" typeface="Myanmar Text"/>
+        <a:font script="Nkoo" typeface="Ebrima"/>
+        <a:font script="Olck" typeface="Nirmala UI"/>
+        <a:font script="Osma" typeface="Ebrima"/>
+        <a:font script="Phag" typeface="Phagspa"/>
+        <a:font script="Syrn" typeface="Estrangelo Edessa"/>
+        <a:font script="Syrj" typeface="Estrangelo Edessa"/>
+        <a:font script="Syre" typeface="Estrangelo Edessa"/>
+        <a:font script="Sora" typeface="Nirmala UI"/>
+        <a:font script="Tale" typeface="Microsoft Tai Le"/>
+        <a:font script="Talu" typeface="Microsoft New Tai Lue"/>
+        <a:font script="Tfng" typeface="Ebrima"/>
+      </a:majorFont>
+      <a:minorFont>
+        <a:latin typeface="Calibri" panose="020F0502020204030204"/>
+        <a:ea typeface=""/>
+        <a:cs typeface=""/>
+        <a:font script="Jpan" typeface="游ゴシック"/>
+        <a:font script="Hang" typeface="맑은 고딕"/>
+        <a:font script="Hans" typeface="等线"/>
+        <a:font script="Hant" typeface="新細明體"/>
+        <a:font script="Arab" typeface="Arial"/>
+        <a:font script="Hebr" typeface="Arial"/>
+        <a:font script="Thai" typeface="Cordia New"/>
+        <a:font script="Ethi" typeface="Nyala"/>
+        <a:font script="Beng" typeface="Vrinda"/>
+        <a:font script="Gujr" typeface="Shruti"/>
+        <a:font script="Khmr" typeface="DaunPenh"/>
+        <a:font script="Knda" typeface="Tunga"/>
+        <a:font script="Guru" typeface="Raavi"/>
+        <a:font script="Cans" typeface="Euphemia"/>
+        <a:font script="Cher" typeface="Plantagenet Cherokee"/>
+        <a:font script="Yiii" typeface="Microsoft Yi Baiti"/>
+        <a:font script="Tibt" typeface="Microsoft Himalaya"/>
+        <a:font script="Thaa" typeface="MV Boli"/>
+        <a:font script="Deva" typeface="Mangal"/>
+        <a:font script="Telu" typeface="Gautami"/>
+        <a:font script="Taml" typeface="Latha"/>
+        <a:font script="Syrc" typeface="Estrangelo Edessa"/>
+        <a:font script="Orya" typeface="Kalinga"/>
+        <a:font script="Mlym" typeface="Kartika"/>
+        <a:font script="Laoo" typeface="DokChampa"/>
+        <a:font script="Sinh" typeface="Iskoola Pota"/>
+        <a:font script="Mong" typeface="Mongolian Baiti"/>
+        <a:font script="Viet" typeface="Arial"/>
+        <a:font script="Uigh" typeface="Microsoft Uighur"/>
+        <a:font script="Geor" typeface="Sylfaen"/>
+        <a:font script="Armn" typeface="Arial"/>
+        <a:font script="Bugi" typeface="Leelawadee UI"/>
+        <a:font script="Bopo" typeface="Microsoft JhengHei"/>
+        <a:font script="Java" typeface="Javanese Text"/>
+        <a:font script="Lisu" typeface="Segoe UI"/>
+        <a:font script="Mymr" typeface="Myanmar Text"/>
+        <a:font script="Nkoo" typeface="Ebrima"/>
+        <a:font script="Olck" typeface="Nirmala UI"/>
+        <a:font script="Osma" typeface="Ebrima"/>
+        <a:font script="Phag" typeface="Phagspa"/>
+        <a:font script="Syrn" typeface="Estrangelo Edessa"/>
+        <a:font script="Syrj" typeface="Estrangelo Edessa"/>
+        <a:font script="Syre" typeface="Estrangelo Edessa"/>
+        <a:font script="Sora" typeface="Nirmala UI"/>
+        <a:font script="Tale" typeface="Microsoft Tai Le"/>
+        <a:font script="Talu" typeface="Microsoft New Tai Lue"/>
+        <a:font script="Tfng" typeface="Ebrima"/>
+      </a:minorFont>
+    </a:fontScheme>
+    <a:fmtScheme name="Office">
+      <a:fillStyleLst>
+        <a:solidFill>
+          <a:schemeClr val="phClr"/>
+        </a:solidFill>
+        <a:gradFill rotWithShape="1">
+          <a:gsLst>
+            <a:gs pos="0">
+              <a:schemeClr val="phClr">
+                <a:lumMod val="110000"/>
+                <a:satMod val="105000"/>
+                <a:tint val="67000"/>
+              </a:schemeClr>
+            </a:gs>
+            <a:gs pos="50000">
+              <a:schemeClr val="phClr">
+                <a:lumMod val="105000"/>
+                <a:satMod val="103000"/>
+                <a:tint val="73000"/>
+              </a:schemeClr>
+            </a:gs>
+            <a:gs pos="100000">
+              <a:schemeClr val="phClr">
+                <a:lumMod val="105000"/>
+                <a:satMod val="109000"/>
+                <a:tint val="81000"/>
+              </a:schemeClr>
+            </a:gs>
+          </a:gsLst>
+          <a:lin ang="5400000" scaled="0"/>
+        </a:gradFill>
+        <a:gradFill rotWithShape="1">
+          <a:gsLst>
+            <a:gs pos="0">
+              <a:schemeClr val="phClr">
+                <a:satMod val="103000"/>
+                <a:lumMod val="102000"/>
+                <a:tint val="94000"/>
+              </a:schemeClr>
+            </a:gs>
+            <a:gs pos="50000">
+              <a:schemeClr val="phClr">
+                <a:satMod val="110000"/>
+                <a:lumMod val="100000"/>
+                <a:shade val="100000"/>
+              </a:schemeClr>
+            </a:gs>
+            <a:gs pos="100000">
+              <a:schemeClr val="phClr">
+                <a:lumMod val="99000"/>
+                <a:satMod val="120000"/>
+                <a:shade val="78000"/>
+              </a:schemeClr>
+            </a:gs>
+          </a:gsLst>
+          <a:lin ang="5400000" scaled="0"/>
+        </a:gradFill>
+      </a:fillStyleLst>
+      <a:lnStyleLst>
+        <a:ln w="6350" cap="flat" cmpd="sng" algn="ctr">
+          <a:solidFill>
+            <a:schemeClr val="phClr"/>
+          </a:solidFill>
+          <a:prstDash val="solid"/>
+          <a:miter lim="800000"/>
+        </a:ln>
+        <a:ln w="12700" cap="flat" cmpd="sng" algn="ctr">
+          <a:solidFill>
+            <a:schemeClr val="phClr"/>
+          </a:solidFill>
+          <a:prstDash val="solid"/>
+          <a:miter lim="800000"/>
+        </a:ln>
+        <a:ln w="19050" cap="flat" cmpd="sng" algn="ctr">
+          <a:solidFill>
+            <a:schemeClr val="phClr"/>
+          </a:solidFill>
+          <a:prstDash val="solid"/>
+          <a:miter lim="800000"/>
+        </a:ln>
+      </a:lnStyleLst>
+      <a:effectStyleLst>
+        <a:effectStyle>
+          <a:effectLst/>
+        </a:effectStyle>
+        <a:effectStyle>
+          <a:effectLst/>
+        </a:effectStyle>
+        <a:effectStyle>
+          <a:effectLst>
+            <a:outerShdw blurRad="57150" dist="19050" dir="5400000" algn="ctr" rotWithShape="0">
+              <a:srgbClr val="000000">
+                <a:alpha val="63000"/>
+              </a:srgbClr>
+            </a:outerShdw>
+          </a:effectLst>
+        </a:effectStyle>
+      </a:effectStyleLst>
+      <a:bgFillStyleLst>
+        <a:solidFill>
+          <a:schemeClr val="phClr"/>
+        </a:solidFill>
+        <a:solidFill>
+          <a:schemeClr val="phClr">
+            <a:tint val="95000"/>
+            <a:satMod val="170000"/>
+          </a:schemeClr>
+        </a:solidFill>
+        <a:gradFill rotWithShape="1">
+          <a:gsLst>
+            <a:gs pos="0">
+              <a:schemeClr val="phClr">
+                <a:tint val="93000"/>
+                <a:satMod val="150000"/>
+                <a:shade val="98000"/>
+                <a:lumMod val="102000"/>
+              </a:schemeClr>
+            </a:gs>
+            <a:gs pos="50000">
+              <a:schemeClr val="phClr">
+                <a:tint val="98000"/>
+                <a:satMod val="130000"/>
+                <a:shade val="90000"/>
+                <a:lumMod val="103000"/>
+              </a:schemeClr>
+            </a:gs>
+            <a:gs pos="100000">
+              <a:schemeClr val="phClr">
+                <a:shade val="63000"/>
+                <a:satMod val="120000"/>
+              </a:schemeClr>
+            </a:gs>
+          </a:gsLst>
+          <a:lin ang="5400000" scaled="0"/>
+        </a:gradFill>
+      </a:bgFillStyleLst>
+    </a:fmtScheme>
+  </a:themeElements>
+  <a:objectDefaults/>
+  <a:extraClrSchemeLst/>
+  <a:extLst>
+    <a:ext uri="{05A4C25C-085E-4340-85A3-A5531E510DB2}">
+      <thm15:themeFamily xmlns:thm15="http://schemas.microsoft.com/office/thememl/2012/main" name="Office Theme" id="{62F939B6-93AF-4DB8-9C6B-D6C7DFDC589F}" vid="{4A3C46E8-61CC-4603-A589-7422A47A8E4A}"/>
+    </a:ext>
+  </a:extLst>
+</a:theme>
 </file>
--- a/fig4.pptx
+++ b/fig4.pptx
@@ -5,16 +5,19 @@
     <p:sldMasterId id="2147483648" r:id="rId1"/>
   </p:sldMasterIdLst>
   <p:notesMasterIdLst>
-    <p:notesMasterId r:id="rId4"/>
+    <p:notesMasterId r:id="rId7"/>
   </p:notesMasterIdLst>
   <p:sldIdLst>
     <p:sldId id="256" r:id="rId2"/>
     <p:sldId id="257" r:id="rId3"/>
+    <p:sldId id="260" r:id="rId4"/>
+    <p:sldId id="258" r:id="rId5"/>
+    <p:sldId id="259" r:id="rId6"/>
   </p:sldIdLst>
   <p:sldSz cx="12599988" cy="8640763"/>
   <p:notesSz cx="6858000" cy="9144000"/>
   <p:custDataLst>
-    <p:tags r:id="rId5"/>
+    <p:tags r:id="rId8"/>
   </p:custDataLst>
   <p:defaultTextStyle>
     <a:defPPr>
@@ -212,7 +215,7 @@
           <a:p>
             <a:fld id="{A21AE48D-D7D9-46F8-80AC-255986AD24D4}" type="datetimeFigureOut">
               <a:rPr lang="fr-FR" smtClean="0"/>
-              <a:t>06/06/2025</a:t>
+              <a:t>13/06/2025</a:t>
             </a:fld>
             <a:endParaRPr lang="fr-FR"/>
           </a:p>
@@ -563,6 +566,90 @@
 </p:notes>
 </file>
 
+<file path=ppt/notesSlides/notesSlide2.xml><?xml version="1.0" encoding="utf-8"?>
+<p:notes xmlns:a="http://schemas.openxmlformats.org/drawingml/2006/main" xmlns:r="http://schemas.openxmlformats.org/officeDocument/2006/relationships" xmlns:p="http://schemas.openxmlformats.org/presentationml/2006/main">
+  <p:cSld>
+    <p:spTree>
+      <p:nvGrpSpPr>
+        <p:cNvPr id="1" name=""/>
+        <p:cNvGrpSpPr/>
+        <p:nvPr/>
+      </p:nvGrpSpPr>
+      <p:grpSpPr>
+        <a:xfrm>
+          <a:off x="0" y="0"/>
+          <a:ext cx="0" cy="0"/>
+          <a:chOff x="0" y="0"/>
+          <a:chExt cx="0" cy="0"/>
+        </a:xfrm>
+      </p:grpSpPr>
+      <p:sp>
+        <p:nvSpPr>
+          <p:cNvPr id="2" name="Espace réservé de l'image des diapositives 1"/>
+          <p:cNvSpPr>
+            <a:spLocks noGrp="1" noRot="1" noChangeAspect="1"/>
+          </p:cNvSpPr>
+          <p:nvPr>
+            <p:ph type="sldImg"/>
+          </p:nvPr>
+        </p:nvSpPr>
+        <p:spPr/>
+      </p:sp>
+      <p:sp>
+        <p:nvSpPr>
+          <p:cNvPr id="3" name="Espace réservé des notes 2"/>
+          <p:cNvSpPr>
+            <a:spLocks noGrp="1"/>
+          </p:cNvSpPr>
+          <p:nvPr>
+            <p:ph type="body" idx="1"/>
+          </p:nvPr>
+        </p:nvSpPr>
+        <p:spPr/>
+        <p:txBody>
+          <a:bodyPr/>
+          <a:lstStyle/>
+          <a:p>
+            <a:endParaRPr lang="fr-FR" dirty="0"/>
+          </a:p>
+        </p:txBody>
+      </p:sp>
+      <p:sp>
+        <p:nvSpPr>
+          <p:cNvPr id="4" name="Espace réservé du numéro de diapositive 3"/>
+          <p:cNvSpPr>
+            <a:spLocks noGrp="1"/>
+          </p:cNvSpPr>
+          <p:nvPr>
+            <p:ph type="sldNum" sz="quarter" idx="5"/>
+          </p:nvPr>
+        </p:nvSpPr>
+        <p:spPr/>
+        <p:txBody>
+          <a:bodyPr/>
+          <a:lstStyle/>
+          <a:p>
+            <a:fld id="{DB1E9922-CB52-49F7-BA04-8363A23E0C72}" type="slidenum">
+              <a:rPr lang="fr-FR" smtClean="0"/>
+              <a:t>3</a:t>
+            </a:fld>
+            <a:endParaRPr lang="fr-FR"/>
+          </a:p>
+        </p:txBody>
+      </p:sp>
+    </p:spTree>
+    <p:extLst>
+      <p:ext uri="{BB962C8B-B14F-4D97-AF65-F5344CB8AC3E}">
+        <p14:creationId xmlns:p14="http://schemas.microsoft.com/office/powerpoint/2010/main" val="1283006879"/>
+      </p:ext>
+    </p:extLst>
+  </p:cSld>
+  <p:clrMapOvr>
+    <a:masterClrMapping/>
+  </p:clrMapOvr>
+</p:notes>
+</file>
+
 <file path=ppt/slideLayouts/slideLayout1.xml><?xml version="1.0" encoding="utf-8"?>
 <p:sldLayout xmlns:a="http://schemas.openxmlformats.org/drawingml/2006/main" xmlns:r="http://schemas.openxmlformats.org/officeDocument/2006/relationships" xmlns:p="http://schemas.openxmlformats.org/presentationml/2006/main" type="title" preserve="1">
   <p:cSld name="Title Slide">
@@ -744,7 +831,7 @@
           <a:p>
             <a:fld id="{E6744CE3-0875-4B69-89C0-6F72D8139561}" type="datetimeFigureOut">
               <a:rPr lang="en-GB" smtClean="0"/>
-              <a:t>06/06/2025</a:t>
+              <a:t>13/06/2025</a:t>
             </a:fld>
             <a:endParaRPr lang="en-GB"/>
           </a:p>
@@ -914,7 +1001,7 @@
           <a:p>
             <a:fld id="{E6744CE3-0875-4B69-89C0-6F72D8139561}" type="datetimeFigureOut">
               <a:rPr lang="en-GB" smtClean="0"/>
-              <a:t>06/06/2025</a:t>
+              <a:t>13/06/2025</a:t>
             </a:fld>
             <a:endParaRPr lang="en-GB"/>
           </a:p>
@@ -1160,7 +1247,7 @@
           <a:p>
             <a:fld id="{E6744CE3-0875-4B69-89C0-6F72D8139561}" type="datetimeFigureOut">
               <a:rPr lang="en-GB" smtClean="0"/>
-              <a:t>06/06/2025</a:t>
+              <a:t>13/06/2025</a:t>
             </a:fld>
             <a:endParaRPr lang="en-GB"/>
           </a:p>
@@ -1448,7 +1535,7 @@
           <a:p>
             <a:fld id="{E6744CE3-0875-4B69-89C0-6F72D8139561}" type="datetimeFigureOut">
               <a:rPr lang="en-GB" smtClean="0"/>
-              <a:t>06/06/2025</a:t>
+              <a:t>13/06/2025</a:t>
             </a:fld>
             <a:endParaRPr lang="en-GB"/>
           </a:p>
@@ -1870,7 +1957,7 @@
           <a:p>
             <a:fld id="{E6744CE3-0875-4B69-89C0-6F72D8139561}" type="datetimeFigureOut">
               <a:rPr lang="en-GB" smtClean="0"/>
-              <a:t>06/06/2025</a:t>
+              <a:t>13/06/2025</a:t>
             </a:fld>
             <a:endParaRPr lang="en-GB"/>
           </a:p>
@@ -1988,7 +2075,7 @@
           <a:p>
             <a:fld id="{E6744CE3-0875-4B69-89C0-6F72D8139561}" type="datetimeFigureOut">
               <a:rPr lang="en-GB" smtClean="0"/>
-              <a:t>06/06/2025</a:t>
+              <a:t>13/06/2025</a:t>
             </a:fld>
             <a:endParaRPr lang="en-GB"/>
           </a:p>
@@ -2083,7 +2170,7 @@
           <a:p>
             <a:fld id="{E6744CE3-0875-4B69-89C0-6F72D8139561}" type="datetimeFigureOut">
               <a:rPr lang="en-GB" smtClean="0"/>
-              <a:t>06/06/2025</a:t>
+              <a:t>13/06/2025</a:t>
             </a:fld>
             <a:endParaRPr lang="en-GB"/>
           </a:p>
@@ -2296,7 +2383,7 @@
           <a:p>
             <a:fld id="{E6744CE3-0875-4B69-89C0-6F72D8139561}" type="datetimeFigureOut">
               <a:rPr lang="en-GB" smtClean="0"/>
-              <a:t>06/06/2025</a:t>
+              <a:t>13/06/2025</a:t>
             </a:fld>
             <a:endParaRPr lang="en-GB"/>
           </a:p>
@@ -6833,10 +6920,2312 @@
           </a:p>
         </p:txBody>
       </p:sp>
+      <p:pic>
+        <p:nvPicPr>
+          <p:cNvPr id="2" name="Image 1">
+            <a:extLst>
+              <a:ext uri="{FF2B5EF4-FFF2-40B4-BE49-F238E27FC236}">
+                <a16:creationId xmlns:a16="http://schemas.microsoft.com/office/drawing/2014/main" id="{1D445FAB-30B5-48C2-AF0A-89279CE2FDDB}"/>
+              </a:ext>
+            </a:extLst>
+          </p:cNvPr>
+          <p:cNvPicPr>
+            <a:picLocks noChangeAspect="1"/>
+          </p:cNvPicPr>
+          <p:nvPr/>
+        </p:nvPicPr>
+        <p:blipFill>
+          <a:blip r:embed="rId4"/>
+          <a:stretch>
+            <a:fillRect/>
+          </a:stretch>
+        </p:blipFill>
+        <p:spPr>
+          <a:xfrm>
+            <a:off x="107306" y="6142294"/>
+            <a:ext cx="12599988" cy="3151465"/>
+          </a:xfrm>
+          <a:prstGeom prst="rect">
+            <a:avLst/>
+          </a:prstGeom>
+        </p:spPr>
+      </p:pic>
     </p:spTree>
     <p:extLst>
       <p:ext uri="{BB962C8B-B14F-4D97-AF65-F5344CB8AC3E}">
         <p14:creationId xmlns:p14="http://schemas.microsoft.com/office/powerpoint/2010/main" val="1663611299"/>
+      </p:ext>
+    </p:extLst>
+  </p:cSld>
+  <p:clrMapOvr>
+    <a:masterClrMapping/>
+  </p:clrMapOvr>
+</p:sld>
+</file>
+
+<file path=ppt/slides/slide3.xml><?xml version="1.0" encoding="utf-8"?>
+<p:sld xmlns:a="http://schemas.openxmlformats.org/drawingml/2006/main" xmlns:r="http://schemas.openxmlformats.org/officeDocument/2006/relationships" xmlns:p="http://schemas.openxmlformats.org/presentationml/2006/main">
+  <p:cSld>
+    <p:spTree>
+      <p:nvGrpSpPr>
+        <p:cNvPr id="1" name=""/>
+        <p:cNvGrpSpPr/>
+        <p:nvPr/>
+      </p:nvGrpSpPr>
+      <p:grpSpPr>
+        <a:xfrm>
+          <a:off x="0" y="0"/>
+          <a:ext cx="0" cy="0"/>
+          <a:chOff x="0" y="0"/>
+          <a:chExt cx="0" cy="0"/>
+        </a:xfrm>
+      </p:grpSpPr>
+      <p:sp>
+        <p:nvSpPr>
+          <p:cNvPr id="6" name="ZoneTexte 5">
+            <a:extLst>
+              <a:ext uri="{FF2B5EF4-FFF2-40B4-BE49-F238E27FC236}">
+                <a16:creationId xmlns:a16="http://schemas.microsoft.com/office/drawing/2014/main" id="{C8D440F6-9BA5-4065-882B-F30CA68E3E2A}"/>
+              </a:ext>
+            </a:extLst>
+          </p:cNvPr>
+          <p:cNvSpPr txBox="1"/>
+          <p:nvPr/>
+        </p:nvSpPr>
+        <p:spPr>
+          <a:xfrm>
+            <a:off x="1691482" y="863996"/>
+            <a:ext cx="771071" cy="307777"/>
+          </a:xfrm>
+          <a:prstGeom prst="rect">
+            <a:avLst/>
+          </a:prstGeom>
+          <a:noFill/>
+        </p:spPr>
+        <p:txBody>
+          <a:bodyPr rot="0" spcFirstLastPara="0" vertOverflow="overflow" horzOverflow="overflow" vert="horz" wrap="square" lIns="91440" tIns="45720" rIns="91440" bIns="45720" numCol="1" spcCol="0" rtlCol="0" fromWordArt="0" anchor="t" anchorCtr="0" forceAA="0" compatLnSpc="1">
+            <a:prstTxWarp prst="textNoShape">
+              <a:avLst/>
+            </a:prstTxWarp>
+            <a:spAutoFit/>
+          </a:bodyPr>
+          <a:lstStyle/>
+          <a:p>
+            <a:pPr algn="ctr"/>
+            <a:r>
+              <a:rPr lang="fr-FR" sz="1400" b="1" dirty="0">
+                <a:latin typeface="Arial"/>
+                <a:cs typeface="Arial"/>
+              </a:rPr>
+              <a:t>2019</a:t>
+            </a:r>
+          </a:p>
+        </p:txBody>
+      </p:sp>
+      <p:sp>
+        <p:nvSpPr>
+          <p:cNvPr id="7" name="ZoneTexte 6">
+            <a:extLst>
+              <a:ext uri="{FF2B5EF4-FFF2-40B4-BE49-F238E27FC236}">
+                <a16:creationId xmlns:a16="http://schemas.microsoft.com/office/drawing/2014/main" id="{2672C366-E3EF-40B0-800B-E4F042DEFF8C}"/>
+              </a:ext>
+            </a:extLst>
+          </p:cNvPr>
+          <p:cNvSpPr txBox="1"/>
+          <p:nvPr/>
+        </p:nvSpPr>
+        <p:spPr>
+          <a:xfrm>
+            <a:off x="4137466" y="863996"/>
+            <a:ext cx="771071" cy="307777"/>
+          </a:xfrm>
+          <a:prstGeom prst="rect">
+            <a:avLst/>
+          </a:prstGeom>
+          <a:noFill/>
+        </p:spPr>
+        <p:txBody>
+          <a:bodyPr rot="0" spcFirstLastPara="0" vertOverflow="overflow" horzOverflow="overflow" vert="horz" wrap="square" lIns="91440" tIns="45720" rIns="91440" bIns="45720" numCol="1" spcCol="0" rtlCol="0" fromWordArt="0" anchor="t" anchorCtr="0" forceAA="0" compatLnSpc="1">
+            <a:prstTxWarp prst="textNoShape">
+              <a:avLst/>
+            </a:prstTxWarp>
+            <a:spAutoFit/>
+          </a:bodyPr>
+          <a:lstStyle/>
+          <a:p>
+            <a:pPr algn="ctr"/>
+            <a:r>
+              <a:rPr lang="fr-FR" sz="1400" b="1" dirty="0">
+                <a:latin typeface="Arial"/>
+                <a:cs typeface="Arial"/>
+              </a:rPr>
+              <a:t>2020</a:t>
+            </a:r>
+          </a:p>
+        </p:txBody>
+      </p:sp>
+      <p:sp>
+        <p:nvSpPr>
+          <p:cNvPr id="8" name="ZoneTexte 7">
+            <a:extLst>
+              <a:ext uri="{FF2B5EF4-FFF2-40B4-BE49-F238E27FC236}">
+                <a16:creationId xmlns:a16="http://schemas.microsoft.com/office/drawing/2014/main" id="{05BD1AB5-662E-4CF6-86C1-D46BFD086047}"/>
+              </a:ext>
+            </a:extLst>
+          </p:cNvPr>
+          <p:cNvSpPr txBox="1"/>
+          <p:nvPr/>
+        </p:nvSpPr>
+        <p:spPr>
+          <a:xfrm>
+            <a:off x="6533294" y="863997"/>
+            <a:ext cx="771071" cy="307777"/>
+          </a:xfrm>
+          <a:prstGeom prst="rect">
+            <a:avLst/>
+          </a:prstGeom>
+          <a:noFill/>
+        </p:spPr>
+        <p:txBody>
+          <a:bodyPr rot="0" spcFirstLastPara="0" vertOverflow="overflow" horzOverflow="overflow" vert="horz" wrap="square" lIns="91440" tIns="45720" rIns="91440" bIns="45720" numCol="1" spcCol="0" rtlCol="0" fromWordArt="0" anchor="t" anchorCtr="0" forceAA="0" compatLnSpc="1">
+            <a:prstTxWarp prst="textNoShape">
+              <a:avLst/>
+            </a:prstTxWarp>
+            <a:spAutoFit/>
+          </a:bodyPr>
+          <a:lstStyle/>
+          <a:p>
+            <a:pPr algn="ctr"/>
+            <a:r>
+              <a:rPr lang="fr-FR" sz="1400" b="1">
+                <a:latin typeface="Arial"/>
+                <a:cs typeface="Arial"/>
+              </a:rPr>
+              <a:t>2021</a:t>
+            </a:r>
+          </a:p>
+        </p:txBody>
+      </p:sp>
+      <p:sp>
+        <p:nvSpPr>
+          <p:cNvPr id="9" name="ZoneTexte 8">
+            <a:extLst>
+              <a:ext uri="{FF2B5EF4-FFF2-40B4-BE49-F238E27FC236}">
+                <a16:creationId xmlns:a16="http://schemas.microsoft.com/office/drawing/2014/main" id="{E20FE92C-3ECB-42E8-AC0D-9749FE25B77F}"/>
+              </a:ext>
+            </a:extLst>
+          </p:cNvPr>
+          <p:cNvSpPr txBox="1"/>
+          <p:nvPr/>
+        </p:nvSpPr>
+        <p:spPr>
+          <a:xfrm>
+            <a:off x="8929122" y="858415"/>
+            <a:ext cx="771071" cy="307777"/>
+          </a:xfrm>
+          <a:prstGeom prst="rect">
+            <a:avLst/>
+          </a:prstGeom>
+          <a:noFill/>
+        </p:spPr>
+        <p:txBody>
+          <a:bodyPr rot="0" spcFirstLastPara="0" vertOverflow="overflow" horzOverflow="overflow" vert="horz" wrap="square" lIns="91440" tIns="45720" rIns="91440" bIns="45720" numCol="1" spcCol="0" rtlCol="0" fromWordArt="0" anchor="t" anchorCtr="0" forceAA="0" compatLnSpc="1">
+            <a:prstTxWarp prst="textNoShape">
+              <a:avLst/>
+            </a:prstTxWarp>
+            <a:spAutoFit/>
+          </a:bodyPr>
+          <a:lstStyle/>
+          <a:p>
+            <a:pPr algn="ctr"/>
+            <a:r>
+              <a:rPr lang="fr-FR" sz="1400" b="1">
+                <a:latin typeface="Arial"/>
+                <a:cs typeface="Arial"/>
+              </a:rPr>
+              <a:t>2022</a:t>
+            </a:r>
+          </a:p>
+        </p:txBody>
+      </p:sp>
+      <p:sp>
+        <p:nvSpPr>
+          <p:cNvPr id="10" name="ZoneTexte 9">
+            <a:extLst>
+              <a:ext uri="{FF2B5EF4-FFF2-40B4-BE49-F238E27FC236}">
+                <a16:creationId xmlns:a16="http://schemas.microsoft.com/office/drawing/2014/main" id="{13A8A52D-A49E-406C-92EA-D52C8920597A}"/>
+              </a:ext>
+            </a:extLst>
+          </p:cNvPr>
+          <p:cNvSpPr txBox="1"/>
+          <p:nvPr/>
+        </p:nvSpPr>
+        <p:spPr>
+          <a:xfrm>
+            <a:off x="0" y="3951049"/>
+            <a:ext cx="769911" cy="738664"/>
+          </a:xfrm>
+          <a:prstGeom prst="rect">
+            <a:avLst/>
+          </a:prstGeom>
+          <a:noFill/>
+        </p:spPr>
+        <p:txBody>
+          <a:bodyPr rot="0" spcFirstLastPara="0" vertOverflow="overflow" horzOverflow="overflow" vert="horz" wrap="square" lIns="91440" tIns="45720" rIns="91440" bIns="45720" numCol="1" spcCol="0" rtlCol="0" fromWordArt="0" anchor="t" anchorCtr="0" forceAA="0" compatLnSpc="1">
+            <a:prstTxWarp prst="textNoShape">
+              <a:avLst/>
+            </a:prstTxWarp>
+            <a:spAutoFit/>
+          </a:bodyPr>
+          <a:lstStyle/>
+          <a:p>
+            <a:r>
+              <a:rPr lang="fr-FR" sz="1400" b="1" dirty="0">
+                <a:latin typeface="Arial"/>
+                <a:cs typeface="Arial"/>
+              </a:rPr>
+              <a:t>Non-ESBL </a:t>
+            </a:r>
+            <a:r>
+              <a:rPr lang="fr-FR" sz="1400" b="1" i="1" dirty="0">
+                <a:latin typeface="Arial"/>
+                <a:cs typeface="Arial"/>
+              </a:rPr>
+              <a:t>E. coli</a:t>
+            </a:r>
+            <a:endParaRPr lang="fr-FR" sz="1400" i="1" dirty="0"/>
+          </a:p>
+        </p:txBody>
+      </p:sp>
+      <p:sp>
+        <p:nvSpPr>
+          <p:cNvPr id="11" name="ZoneTexte 10">
+            <a:extLst>
+              <a:ext uri="{FF2B5EF4-FFF2-40B4-BE49-F238E27FC236}">
+                <a16:creationId xmlns:a16="http://schemas.microsoft.com/office/drawing/2014/main" id="{141F06AE-C952-45FC-BF87-6ADDCE40A775}"/>
+              </a:ext>
+            </a:extLst>
+          </p:cNvPr>
+          <p:cNvSpPr txBox="1"/>
+          <p:nvPr/>
+        </p:nvSpPr>
+        <p:spPr>
+          <a:xfrm>
+            <a:off x="-16853" y="1975249"/>
+            <a:ext cx="771071" cy="523220"/>
+          </a:xfrm>
+          <a:prstGeom prst="rect">
+            <a:avLst/>
+          </a:prstGeom>
+          <a:noFill/>
+        </p:spPr>
+        <p:txBody>
+          <a:bodyPr rot="0" spcFirstLastPara="0" vertOverflow="overflow" horzOverflow="overflow" vert="horz" wrap="square" lIns="91440" tIns="45720" rIns="91440" bIns="45720" numCol="1" spcCol="0" rtlCol="0" fromWordArt="0" anchor="t" anchorCtr="0" forceAA="0" compatLnSpc="1">
+            <a:prstTxWarp prst="textNoShape">
+              <a:avLst/>
+            </a:prstTxWarp>
+            <a:spAutoFit/>
+          </a:bodyPr>
+          <a:lstStyle/>
+          <a:p>
+            <a:r>
+              <a:rPr lang="fr-FR" sz="1400" b="1" dirty="0">
+                <a:latin typeface="Arial"/>
+                <a:cs typeface="Arial"/>
+              </a:rPr>
+              <a:t>ESBL </a:t>
+            </a:r>
+            <a:r>
+              <a:rPr lang="fr-FR" sz="1400" b="1" i="1" dirty="0">
+                <a:latin typeface="Arial"/>
+                <a:cs typeface="Arial"/>
+              </a:rPr>
+              <a:t>E. coli</a:t>
+            </a:r>
+            <a:endParaRPr lang="fr-FR" sz="1400" i="1" dirty="0"/>
+          </a:p>
+        </p:txBody>
+      </p:sp>
+      <p:pic>
+        <p:nvPicPr>
+          <p:cNvPr id="2" name="Image 1">
+            <a:extLst>
+              <a:ext uri="{FF2B5EF4-FFF2-40B4-BE49-F238E27FC236}">
+                <a16:creationId xmlns:a16="http://schemas.microsoft.com/office/drawing/2014/main" id="{1D445FAB-30B5-48C2-AF0A-89279CE2FDDB}"/>
+              </a:ext>
+            </a:extLst>
+          </p:cNvPr>
+          <p:cNvPicPr>
+            <a:picLocks noChangeAspect="1"/>
+          </p:cNvPicPr>
+          <p:nvPr/>
+        </p:nvPicPr>
+        <p:blipFill>
+          <a:blip r:embed="rId3"/>
+          <a:stretch>
+            <a:fillRect/>
+          </a:stretch>
+        </p:blipFill>
+        <p:spPr>
+          <a:xfrm>
+            <a:off x="107306" y="6336605"/>
+            <a:ext cx="10369152" cy="2593496"/>
+          </a:xfrm>
+          <a:prstGeom prst="rect">
+            <a:avLst/>
+          </a:prstGeom>
+        </p:spPr>
+      </p:pic>
+      <p:pic>
+        <p:nvPicPr>
+          <p:cNvPr id="12" name="Image 11">
+            <a:extLst>
+              <a:ext uri="{FF2B5EF4-FFF2-40B4-BE49-F238E27FC236}">
+                <a16:creationId xmlns:a16="http://schemas.microsoft.com/office/drawing/2014/main" id="{9008D93F-C426-48BE-B0F9-245C3AE7C47C}"/>
+              </a:ext>
+            </a:extLst>
+          </p:cNvPr>
+          <p:cNvPicPr>
+            <a:picLocks noChangeAspect="1"/>
+          </p:cNvPicPr>
+          <p:nvPr/>
+        </p:nvPicPr>
+        <p:blipFill rotWithShape="1">
+          <a:blip r:embed="rId4" cstate="print">
+            <a:extLst>
+              <a:ext uri="{28A0092B-C50C-407E-A947-70E740481C1C}">
+                <a14:useLocalDpi xmlns:a14="http://schemas.microsoft.com/office/drawing/2010/main" val="0"/>
+              </a:ext>
+            </a:extLst>
+          </a:blip>
+          <a:srcRect b="50741"/>
+          <a:stretch/>
+        </p:blipFill>
+        <p:spPr>
+          <a:xfrm>
+            <a:off x="865153" y="1307171"/>
+            <a:ext cx="9649072" cy="2059591"/>
+          </a:xfrm>
+          <a:prstGeom prst="rect">
+            <a:avLst/>
+          </a:prstGeom>
+        </p:spPr>
+      </p:pic>
+      <p:pic>
+        <p:nvPicPr>
+          <p:cNvPr id="13" name="Image 12">
+            <a:extLst>
+              <a:ext uri="{FF2B5EF4-FFF2-40B4-BE49-F238E27FC236}">
+                <a16:creationId xmlns:a16="http://schemas.microsoft.com/office/drawing/2014/main" id="{19508321-84DC-4FA2-9542-2ACE1A774B25}"/>
+              </a:ext>
+            </a:extLst>
+          </p:cNvPr>
+          <p:cNvPicPr>
+            <a:picLocks noChangeAspect="1"/>
+          </p:cNvPicPr>
+          <p:nvPr/>
+        </p:nvPicPr>
+        <p:blipFill rotWithShape="1">
+          <a:blip r:embed="rId4" cstate="print">
+            <a:extLst>
+              <a:ext uri="{28A0092B-C50C-407E-A947-70E740481C1C}">
+                <a14:useLocalDpi xmlns:a14="http://schemas.microsoft.com/office/drawing/2010/main" val="0"/>
+              </a:ext>
+            </a:extLst>
+          </a:blip>
+          <a:srcRect t="50741"/>
+          <a:stretch/>
+        </p:blipFill>
+        <p:spPr>
+          <a:xfrm>
+            <a:off x="827386" y="3744309"/>
+            <a:ext cx="9649072" cy="2059591"/>
+          </a:xfrm>
+          <a:prstGeom prst="rect">
+            <a:avLst/>
+          </a:prstGeom>
+        </p:spPr>
+      </p:pic>
+      <p:graphicFrame>
+        <p:nvGraphicFramePr>
+          <p:cNvPr id="14" name="Tableau 3">
+            <a:extLst>
+              <a:ext uri="{FF2B5EF4-FFF2-40B4-BE49-F238E27FC236}">
+                <a16:creationId xmlns:a16="http://schemas.microsoft.com/office/drawing/2014/main" id="{258E0CD5-59B2-4B6D-9E02-5C1BED3AC724}"/>
+              </a:ext>
+            </a:extLst>
+          </p:cNvPr>
+          <p:cNvGraphicFramePr>
+            <a:graphicFrameLocks noGrp="1"/>
+          </p:cNvGraphicFramePr>
+          <p:nvPr>
+            <p:extLst>
+              <p:ext uri="{D42A27DB-BD31-4B8C-83A1-F6EECF244321}">
+                <p14:modId xmlns:p14="http://schemas.microsoft.com/office/powerpoint/2010/main" val="984186266"/>
+              </p:ext>
+            </p:extLst>
+          </p:nvPr>
+        </p:nvGraphicFramePr>
+        <p:xfrm>
+          <a:off x="-2362" y="3426134"/>
+          <a:ext cx="12783076" cy="370840"/>
+        </p:xfrm>
+        <a:graphic>
+          <a:graphicData uri="http://schemas.openxmlformats.org/drawingml/2006/table">
+            <a:tbl>
+              <a:tblPr firstRow="1" bandRow="1">
+                <a:tableStyleId>{5C22544A-7EE6-4342-B048-85BDC9FD1C3A}</a:tableStyleId>
+              </a:tblPr>
+              <a:tblGrid>
+                <a:gridCol w="708325">
+                  <a:extLst>
+                    <a:ext uri="{9D8B030D-6E8A-4147-A177-3AD203B41FA5}">
+                      <a16:colId xmlns:a16="http://schemas.microsoft.com/office/drawing/2014/main" val="1703629566"/>
+                    </a:ext>
+                  </a:extLst>
+                </a:gridCol>
+                <a:gridCol w="2597163">
+                  <a:extLst>
+                    <a:ext uri="{9D8B030D-6E8A-4147-A177-3AD203B41FA5}">
+                      <a16:colId xmlns:a16="http://schemas.microsoft.com/office/drawing/2014/main" val="791467007"/>
+                    </a:ext>
+                  </a:extLst>
+                </a:gridCol>
+                <a:gridCol w="2418905">
+                  <a:extLst>
+                    <a:ext uri="{9D8B030D-6E8A-4147-A177-3AD203B41FA5}">
+                      <a16:colId xmlns:a16="http://schemas.microsoft.com/office/drawing/2014/main" val="943490280"/>
+                    </a:ext>
+                  </a:extLst>
+                </a:gridCol>
+                <a:gridCol w="2309566">
+                  <a:extLst>
+                    <a:ext uri="{9D8B030D-6E8A-4147-A177-3AD203B41FA5}">
+                      <a16:colId xmlns:a16="http://schemas.microsoft.com/office/drawing/2014/main" val="369987366"/>
+                    </a:ext>
+                  </a:extLst>
+                </a:gridCol>
+                <a:gridCol w="2373366">
+                  <a:extLst>
+                    <a:ext uri="{9D8B030D-6E8A-4147-A177-3AD203B41FA5}">
+                      <a16:colId xmlns:a16="http://schemas.microsoft.com/office/drawing/2014/main" val="3615940755"/>
+                    </a:ext>
+                  </a:extLst>
+                </a:gridCol>
+                <a:gridCol w="2375751">
+                  <a:extLst>
+                    <a:ext uri="{9D8B030D-6E8A-4147-A177-3AD203B41FA5}">
+                      <a16:colId xmlns:a16="http://schemas.microsoft.com/office/drawing/2014/main" val="704438616"/>
+                    </a:ext>
+                  </a:extLst>
+                </a:gridCol>
+              </a:tblGrid>
+              <a:tr h="370840">
+                <a:tc>
+                  <a:txBody>
+                    <a:bodyPr/>
+                    <a:lstStyle/>
+                    <a:p>
+                      <a:pPr algn="ctr"/>
+                      <a:endParaRPr lang="fr-FR" sz="1400" b="0" dirty="0">
+                        <a:solidFill>
+                          <a:sysClr val="windowText" lastClr="000000"/>
+                        </a:solidFill>
+                        <a:latin typeface="Arial" panose="020B0604020202020204" pitchFamily="34" charset="0"/>
+                        <a:cs typeface="Arial" panose="020B0604020202020204" pitchFamily="34" charset="0"/>
+                      </a:endParaRPr>
+                    </a:p>
+                  </a:txBody>
+                  <a:tcPr>
+                    <a:lnL w="12700" cap="flat" cmpd="sng" algn="ctr">
+                      <a:noFill/>
+                      <a:prstDash val="solid"/>
+                      <a:round/>
+                      <a:headEnd type="none" w="med" len="med"/>
+                      <a:tailEnd type="none" w="med" len="med"/>
+                    </a:lnL>
+                    <a:lnR w="12700" cap="flat" cmpd="sng" algn="ctr">
+                      <a:noFill/>
+                      <a:prstDash val="solid"/>
+                      <a:round/>
+                      <a:headEnd type="none" w="med" len="med"/>
+                      <a:tailEnd type="none" w="med" len="med"/>
+                    </a:lnR>
+                    <a:lnT w="12700" cap="flat" cmpd="sng" algn="ctr">
+                      <a:noFill/>
+                      <a:prstDash val="solid"/>
+                      <a:round/>
+                      <a:headEnd type="none" w="med" len="med"/>
+                      <a:tailEnd type="none" w="med" len="med"/>
+                    </a:lnT>
+                    <a:lnB w="12700" cap="flat" cmpd="sng" algn="ctr">
+                      <a:noFill/>
+                      <a:prstDash val="solid"/>
+                      <a:round/>
+                      <a:headEnd type="none" w="med" len="med"/>
+                      <a:tailEnd type="none" w="med" len="med"/>
+                    </a:lnB>
+                    <a:lnTlToBr w="12700" cmpd="sng">
+                      <a:noFill/>
+                      <a:prstDash val="solid"/>
+                    </a:lnTlToBr>
+                    <a:lnBlToTr w="12700" cmpd="sng">
+                      <a:noFill/>
+                      <a:prstDash val="solid"/>
+                    </a:lnBlToTr>
+                    <a:noFill/>
+                  </a:tcPr>
+                </a:tc>
+                <a:tc>
+                  <a:txBody>
+                    <a:bodyPr/>
+                    <a:lstStyle/>
+                    <a:p>
+                      <a:pPr marL="0" marR="0" lvl="0" indent="0" algn="ctr" defTabSz="914400" rtl="0" eaLnBrk="1" fontAlgn="auto" latinLnBrk="0" hangingPunct="1">
+                        <a:lnSpc>
+                          <a:spcPct val="100000"/>
+                        </a:lnSpc>
+                        <a:spcBef>
+                          <a:spcPts val="0"/>
+                        </a:spcBef>
+                        <a:spcAft>
+                          <a:spcPts val="0"/>
+                        </a:spcAft>
+                        <a:buClrTx/>
+                        <a:buSzTx/>
+                        <a:buFontTx/>
+                        <a:buNone/>
+                        <a:tabLst/>
+                        <a:defRPr/>
+                      </a:pPr>
+                      <a:r>
+                        <a:rPr lang="fr-FR" sz="1400" b="0" dirty="0">
+                          <a:solidFill>
+                            <a:sysClr val="windowText" lastClr="000000"/>
+                          </a:solidFill>
+                          <a:effectLst/>
+                          <a:latin typeface="Arial" panose="020B0604020202020204" pitchFamily="34" charset="0"/>
+                          <a:cs typeface="Arial" panose="020B0604020202020204" pitchFamily="34" charset="0"/>
+                        </a:rPr>
+                        <a:t>0.240 ± 0.004</a:t>
+                      </a:r>
+                    </a:p>
+                  </a:txBody>
+                  <a:tcPr>
+                    <a:lnL w="12700" cap="flat" cmpd="sng" algn="ctr">
+                      <a:noFill/>
+                      <a:prstDash val="solid"/>
+                      <a:round/>
+                      <a:headEnd type="none" w="med" len="med"/>
+                      <a:tailEnd type="none" w="med" len="med"/>
+                    </a:lnL>
+                    <a:lnR w="12700" cap="flat" cmpd="sng" algn="ctr">
+                      <a:noFill/>
+                      <a:prstDash val="solid"/>
+                      <a:round/>
+                      <a:headEnd type="none" w="med" len="med"/>
+                      <a:tailEnd type="none" w="med" len="med"/>
+                    </a:lnR>
+                    <a:lnT w="12700" cap="flat" cmpd="sng" algn="ctr">
+                      <a:noFill/>
+                      <a:prstDash val="solid"/>
+                      <a:round/>
+                      <a:headEnd type="none" w="med" len="med"/>
+                      <a:tailEnd type="none" w="med" len="med"/>
+                    </a:lnT>
+                    <a:lnB w="12700" cap="flat" cmpd="sng" algn="ctr">
+                      <a:noFill/>
+                      <a:prstDash val="solid"/>
+                      <a:round/>
+                      <a:headEnd type="none" w="med" len="med"/>
+                      <a:tailEnd type="none" w="med" len="med"/>
+                    </a:lnB>
+                    <a:lnTlToBr w="12700" cmpd="sng">
+                      <a:noFill/>
+                      <a:prstDash val="solid"/>
+                    </a:lnTlToBr>
+                    <a:lnBlToTr w="12700" cmpd="sng">
+                      <a:noFill/>
+                      <a:prstDash val="solid"/>
+                    </a:lnBlToTr>
+                    <a:noFill/>
+                  </a:tcPr>
+                </a:tc>
+                <a:tc>
+                  <a:txBody>
+                    <a:bodyPr/>
+                    <a:lstStyle/>
+                    <a:p>
+                      <a:pPr marL="0" marR="0" lvl="0" indent="0" algn="ctr" defTabSz="914400" rtl="0" eaLnBrk="1" fontAlgn="auto" latinLnBrk="0" hangingPunct="1">
+                        <a:lnSpc>
+                          <a:spcPct val="100000"/>
+                        </a:lnSpc>
+                        <a:spcBef>
+                          <a:spcPts val="0"/>
+                        </a:spcBef>
+                        <a:spcAft>
+                          <a:spcPts val="0"/>
+                        </a:spcAft>
+                        <a:buClrTx/>
+                        <a:buSzTx/>
+                        <a:buFontTx/>
+                        <a:buNone/>
+                        <a:tabLst/>
+                        <a:defRPr/>
+                      </a:pPr>
+                      <a:r>
+                        <a:rPr lang="fr-FR" sz="1400" b="0" dirty="0">
+                          <a:solidFill>
+                            <a:sysClr val="windowText" lastClr="000000"/>
+                          </a:solidFill>
+                          <a:effectLst/>
+                          <a:latin typeface="Arial" panose="020B0604020202020204" pitchFamily="34" charset="0"/>
+                          <a:cs typeface="Arial" panose="020B0604020202020204" pitchFamily="34" charset="0"/>
+                        </a:rPr>
+                        <a:t>0.255 ± 0.005</a:t>
+                      </a:r>
+                    </a:p>
+                  </a:txBody>
+                  <a:tcPr>
+                    <a:lnL w="12700" cap="flat" cmpd="sng" algn="ctr">
+                      <a:noFill/>
+                      <a:prstDash val="solid"/>
+                      <a:round/>
+                      <a:headEnd type="none" w="med" len="med"/>
+                      <a:tailEnd type="none" w="med" len="med"/>
+                    </a:lnL>
+                    <a:lnR w="12700" cap="flat" cmpd="sng" algn="ctr">
+                      <a:noFill/>
+                      <a:prstDash val="solid"/>
+                      <a:round/>
+                      <a:headEnd type="none" w="med" len="med"/>
+                      <a:tailEnd type="none" w="med" len="med"/>
+                    </a:lnR>
+                    <a:lnT w="12700" cap="flat" cmpd="sng" algn="ctr">
+                      <a:noFill/>
+                      <a:prstDash val="solid"/>
+                      <a:round/>
+                      <a:headEnd type="none" w="med" len="med"/>
+                      <a:tailEnd type="none" w="med" len="med"/>
+                    </a:lnT>
+                    <a:lnB w="12700" cap="flat" cmpd="sng" algn="ctr">
+                      <a:noFill/>
+                      <a:prstDash val="solid"/>
+                      <a:round/>
+                      <a:headEnd type="none" w="med" len="med"/>
+                      <a:tailEnd type="none" w="med" len="med"/>
+                    </a:lnB>
+                    <a:lnTlToBr w="12700" cmpd="sng">
+                      <a:noFill/>
+                      <a:prstDash val="solid"/>
+                    </a:lnTlToBr>
+                    <a:lnBlToTr w="12700" cmpd="sng">
+                      <a:noFill/>
+                      <a:prstDash val="solid"/>
+                    </a:lnBlToTr>
+                    <a:noFill/>
+                  </a:tcPr>
+                </a:tc>
+                <a:tc>
+                  <a:txBody>
+                    <a:bodyPr/>
+                    <a:lstStyle/>
+                    <a:p>
+                      <a:pPr marL="0" marR="0" lvl="0" indent="0" algn="ctr" defTabSz="914400" rtl="0" eaLnBrk="1" fontAlgn="auto" latinLnBrk="0" hangingPunct="1">
+                        <a:lnSpc>
+                          <a:spcPct val="100000"/>
+                        </a:lnSpc>
+                        <a:spcBef>
+                          <a:spcPts val="0"/>
+                        </a:spcBef>
+                        <a:spcAft>
+                          <a:spcPts val="0"/>
+                        </a:spcAft>
+                        <a:buClrTx/>
+                        <a:buSzTx/>
+                        <a:buFontTx/>
+                        <a:buNone/>
+                        <a:tabLst/>
+                        <a:defRPr/>
+                      </a:pPr>
+                      <a:r>
+                        <a:rPr lang="fr-FR" sz="1400" b="0" dirty="0">
+                          <a:solidFill>
+                            <a:sysClr val="windowText" lastClr="000000"/>
+                          </a:solidFill>
+                          <a:effectLst/>
+                          <a:latin typeface="Arial" panose="020B0604020202020204" pitchFamily="34" charset="0"/>
+                          <a:cs typeface="Arial" panose="020B0604020202020204" pitchFamily="34" charset="0"/>
+                        </a:rPr>
+                        <a:t>0.279 ± 0.011</a:t>
+                      </a:r>
+                    </a:p>
+                  </a:txBody>
+                  <a:tcPr>
+                    <a:lnL w="12700" cap="flat" cmpd="sng" algn="ctr">
+                      <a:noFill/>
+                      <a:prstDash val="solid"/>
+                      <a:round/>
+                      <a:headEnd type="none" w="med" len="med"/>
+                      <a:tailEnd type="none" w="med" len="med"/>
+                    </a:lnL>
+                    <a:lnR w="12700" cap="flat" cmpd="sng" algn="ctr">
+                      <a:noFill/>
+                      <a:prstDash val="solid"/>
+                      <a:round/>
+                      <a:headEnd type="none" w="med" len="med"/>
+                      <a:tailEnd type="none" w="med" len="med"/>
+                    </a:lnR>
+                    <a:lnT w="12700" cap="flat" cmpd="sng" algn="ctr">
+                      <a:noFill/>
+                      <a:prstDash val="solid"/>
+                      <a:round/>
+                      <a:headEnd type="none" w="med" len="med"/>
+                      <a:tailEnd type="none" w="med" len="med"/>
+                    </a:lnT>
+                    <a:lnB w="12700" cap="flat" cmpd="sng" algn="ctr">
+                      <a:noFill/>
+                      <a:prstDash val="solid"/>
+                      <a:round/>
+                      <a:headEnd type="none" w="med" len="med"/>
+                      <a:tailEnd type="none" w="med" len="med"/>
+                    </a:lnB>
+                    <a:lnTlToBr w="12700" cmpd="sng">
+                      <a:noFill/>
+                      <a:prstDash val="solid"/>
+                    </a:lnTlToBr>
+                    <a:lnBlToTr w="12700" cmpd="sng">
+                      <a:noFill/>
+                      <a:prstDash val="solid"/>
+                    </a:lnBlToTr>
+                    <a:noFill/>
+                  </a:tcPr>
+                </a:tc>
+                <a:tc>
+                  <a:txBody>
+                    <a:bodyPr/>
+                    <a:lstStyle/>
+                    <a:p>
+                      <a:pPr marL="0" marR="0" lvl="0" indent="0" algn="ctr" defTabSz="914400" rtl="0" eaLnBrk="1" fontAlgn="auto" latinLnBrk="0" hangingPunct="1">
+                        <a:lnSpc>
+                          <a:spcPct val="100000"/>
+                        </a:lnSpc>
+                        <a:spcBef>
+                          <a:spcPts val="0"/>
+                        </a:spcBef>
+                        <a:spcAft>
+                          <a:spcPts val="0"/>
+                        </a:spcAft>
+                        <a:buClrTx/>
+                        <a:buSzTx/>
+                        <a:buFontTx/>
+                        <a:buNone/>
+                        <a:tabLst/>
+                        <a:defRPr/>
+                      </a:pPr>
+                      <a:r>
+                        <a:rPr lang="fr-FR" sz="1400" b="0" dirty="0">
+                          <a:solidFill>
+                            <a:sysClr val="windowText" lastClr="000000"/>
+                          </a:solidFill>
+                          <a:effectLst/>
+                          <a:latin typeface="Arial" panose="020B0604020202020204" pitchFamily="34" charset="0"/>
+                          <a:cs typeface="Arial" panose="020B0604020202020204" pitchFamily="34" charset="0"/>
+                        </a:rPr>
+                        <a:t>0.300 ± 0.008</a:t>
+                      </a:r>
+                    </a:p>
+                  </a:txBody>
+                  <a:tcPr>
+                    <a:lnL w="12700" cap="flat" cmpd="sng" algn="ctr">
+                      <a:noFill/>
+                      <a:prstDash val="solid"/>
+                      <a:round/>
+                      <a:headEnd type="none" w="med" len="med"/>
+                      <a:tailEnd type="none" w="med" len="med"/>
+                    </a:lnL>
+                    <a:lnR w="12700" cap="flat" cmpd="sng" algn="ctr">
+                      <a:noFill/>
+                      <a:prstDash val="solid"/>
+                      <a:round/>
+                      <a:headEnd type="none" w="med" len="med"/>
+                      <a:tailEnd type="none" w="med" len="med"/>
+                    </a:lnR>
+                    <a:lnT w="12700" cap="flat" cmpd="sng" algn="ctr">
+                      <a:noFill/>
+                      <a:prstDash val="solid"/>
+                      <a:round/>
+                      <a:headEnd type="none" w="med" len="med"/>
+                      <a:tailEnd type="none" w="med" len="med"/>
+                    </a:lnT>
+                    <a:lnB w="12700" cap="flat" cmpd="sng" algn="ctr">
+                      <a:noFill/>
+                      <a:prstDash val="solid"/>
+                      <a:round/>
+                      <a:headEnd type="none" w="med" len="med"/>
+                      <a:tailEnd type="none" w="med" len="med"/>
+                    </a:lnB>
+                    <a:lnTlToBr w="12700" cmpd="sng">
+                      <a:noFill/>
+                      <a:prstDash val="solid"/>
+                    </a:lnTlToBr>
+                    <a:lnBlToTr w="12700" cmpd="sng">
+                      <a:noFill/>
+                      <a:prstDash val="solid"/>
+                    </a:lnBlToTr>
+                    <a:noFill/>
+                  </a:tcPr>
+                </a:tc>
+                <a:tc>
+                  <a:txBody>
+                    <a:bodyPr/>
+                    <a:lstStyle/>
+                    <a:p>
+                      <a:pPr marL="0" marR="0" lvl="0" indent="0" algn="ctr" defTabSz="914400" rtl="0" eaLnBrk="1" fontAlgn="auto" latinLnBrk="0" hangingPunct="1">
+                        <a:lnSpc>
+                          <a:spcPct val="100000"/>
+                        </a:lnSpc>
+                        <a:spcBef>
+                          <a:spcPts val="0"/>
+                        </a:spcBef>
+                        <a:spcAft>
+                          <a:spcPts val="0"/>
+                        </a:spcAft>
+                        <a:buClrTx/>
+                        <a:buSzTx/>
+                        <a:buFontTx/>
+                        <a:buNone/>
+                        <a:tabLst/>
+                        <a:defRPr/>
+                      </a:pPr>
+                      <a:endParaRPr lang="fr-FR" sz="1400" b="0" dirty="0">
+                        <a:solidFill>
+                          <a:sysClr val="windowText" lastClr="000000"/>
+                        </a:solidFill>
+                        <a:latin typeface="Arial" panose="020B0604020202020204" pitchFamily="34" charset="0"/>
+                        <a:cs typeface="Arial" panose="020B0604020202020204" pitchFamily="34" charset="0"/>
+                      </a:endParaRPr>
+                    </a:p>
+                  </a:txBody>
+                  <a:tcPr>
+                    <a:lnL w="12700" cap="flat" cmpd="sng" algn="ctr">
+                      <a:noFill/>
+                      <a:prstDash val="solid"/>
+                      <a:round/>
+                      <a:headEnd type="none" w="med" len="med"/>
+                      <a:tailEnd type="none" w="med" len="med"/>
+                    </a:lnL>
+                    <a:lnR w="12700" cap="flat" cmpd="sng" algn="ctr">
+                      <a:noFill/>
+                      <a:prstDash val="solid"/>
+                      <a:round/>
+                      <a:headEnd type="none" w="med" len="med"/>
+                      <a:tailEnd type="none" w="med" len="med"/>
+                    </a:lnR>
+                    <a:lnT w="12700" cap="flat" cmpd="sng" algn="ctr">
+                      <a:noFill/>
+                      <a:prstDash val="solid"/>
+                      <a:round/>
+                      <a:headEnd type="none" w="med" len="med"/>
+                      <a:tailEnd type="none" w="med" len="med"/>
+                    </a:lnT>
+                    <a:lnB w="12700" cap="flat" cmpd="sng" algn="ctr">
+                      <a:noFill/>
+                      <a:prstDash val="solid"/>
+                      <a:round/>
+                      <a:headEnd type="none" w="med" len="med"/>
+                      <a:tailEnd type="none" w="med" len="med"/>
+                    </a:lnB>
+                    <a:lnTlToBr w="12700" cmpd="sng">
+                      <a:noFill/>
+                      <a:prstDash val="solid"/>
+                    </a:lnTlToBr>
+                    <a:lnBlToTr w="12700" cmpd="sng">
+                      <a:noFill/>
+                      <a:prstDash val="solid"/>
+                    </a:lnBlToTr>
+                    <a:noFill/>
+                  </a:tcPr>
+                </a:tc>
+                <a:extLst>
+                  <a:ext uri="{0D108BD9-81ED-4DB2-BD59-A6C34878D82A}">
+                    <a16:rowId xmlns:a16="http://schemas.microsoft.com/office/drawing/2014/main" val="3726648593"/>
+                  </a:ext>
+                </a:extLst>
+              </a:tr>
+            </a:tbl>
+          </a:graphicData>
+        </a:graphic>
+      </p:graphicFrame>
+      <p:sp>
+        <p:nvSpPr>
+          <p:cNvPr id="15" name="ZoneTexte 14">
+            <a:extLst>
+              <a:ext uri="{FF2B5EF4-FFF2-40B4-BE49-F238E27FC236}">
+                <a16:creationId xmlns:a16="http://schemas.microsoft.com/office/drawing/2014/main" id="{62DDF300-D4F9-48F1-AA48-E877FAFA4FB3}"/>
+              </a:ext>
+            </a:extLst>
+          </p:cNvPr>
+          <p:cNvSpPr txBox="1"/>
+          <p:nvPr/>
+        </p:nvSpPr>
+        <p:spPr>
+          <a:xfrm>
+            <a:off x="-11147" y="3454993"/>
+            <a:ext cx="876300" cy="307777"/>
+          </a:xfrm>
+          <a:prstGeom prst="rect">
+            <a:avLst/>
+          </a:prstGeom>
+          <a:noFill/>
+        </p:spPr>
+        <p:txBody>
+          <a:bodyPr rot="0" spcFirstLastPara="0" vertOverflow="overflow" horzOverflow="overflow" vert="horz" wrap="square" lIns="91440" tIns="45720" rIns="91440" bIns="45720" numCol="1" spcCol="0" rtlCol="0" fromWordArt="0" anchor="t" anchorCtr="0" forceAA="0" compatLnSpc="1">
+            <a:prstTxWarp prst="textNoShape">
+              <a:avLst/>
+            </a:prstTxWarp>
+            <a:spAutoFit/>
+          </a:bodyPr>
+          <a:lstStyle/>
+          <a:p>
+            <a:r>
+              <a:rPr lang="fr-FR" sz="1400" dirty="0">
+                <a:latin typeface="Arial"/>
+                <a:cs typeface="Arial"/>
+              </a:rPr>
+              <a:t>Density</a:t>
+            </a:r>
+            <a:endParaRPr lang="fr-FR" sz="1400" dirty="0"/>
+          </a:p>
+        </p:txBody>
+      </p:sp>
+      <p:graphicFrame>
+        <p:nvGraphicFramePr>
+          <p:cNvPr id="16" name="Tableau 3">
+            <a:extLst>
+              <a:ext uri="{FF2B5EF4-FFF2-40B4-BE49-F238E27FC236}">
+                <a16:creationId xmlns:a16="http://schemas.microsoft.com/office/drawing/2014/main" id="{9D77E9B9-5F8B-4B20-A7E0-9E0D400BD86F}"/>
+              </a:ext>
+            </a:extLst>
+          </p:cNvPr>
+          <p:cNvGraphicFramePr>
+            <a:graphicFrameLocks noGrp="1"/>
+          </p:cNvGraphicFramePr>
+          <p:nvPr>
+            <p:extLst>
+              <p:ext uri="{D42A27DB-BD31-4B8C-83A1-F6EECF244321}">
+                <p14:modId xmlns:p14="http://schemas.microsoft.com/office/powerpoint/2010/main" val="1657979972"/>
+              </p:ext>
+            </p:extLst>
+          </p:nvPr>
+        </p:nvGraphicFramePr>
+        <p:xfrm>
+          <a:off x="-29944" y="5789304"/>
+          <a:ext cx="12783076" cy="370840"/>
+        </p:xfrm>
+        <a:graphic>
+          <a:graphicData uri="http://schemas.openxmlformats.org/drawingml/2006/table">
+            <a:tbl>
+              <a:tblPr firstRow="1" bandRow="1">
+                <a:tableStyleId>{5C22544A-7EE6-4342-B048-85BDC9FD1C3A}</a:tableStyleId>
+              </a:tblPr>
+              <a:tblGrid>
+                <a:gridCol w="708325">
+                  <a:extLst>
+                    <a:ext uri="{9D8B030D-6E8A-4147-A177-3AD203B41FA5}">
+                      <a16:colId xmlns:a16="http://schemas.microsoft.com/office/drawing/2014/main" val="1703629566"/>
+                    </a:ext>
+                  </a:extLst>
+                </a:gridCol>
+                <a:gridCol w="2597163">
+                  <a:extLst>
+                    <a:ext uri="{9D8B030D-6E8A-4147-A177-3AD203B41FA5}">
+                      <a16:colId xmlns:a16="http://schemas.microsoft.com/office/drawing/2014/main" val="791467007"/>
+                    </a:ext>
+                  </a:extLst>
+                </a:gridCol>
+                <a:gridCol w="2418905">
+                  <a:extLst>
+                    <a:ext uri="{9D8B030D-6E8A-4147-A177-3AD203B41FA5}">
+                      <a16:colId xmlns:a16="http://schemas.microsoft.com/office/drawing/2014/main" val="943490280"/>
+                    </a:ext>
+                  </a:extLst>
+                </a:gridCol>
+                <a:gridCol w="2309566">
+                  <a:extLst>
+                    <a:ext uri="{9D8B030D-6E8A-4147-A177-3AD203B41FA5}">
+                      <a16:colId xmlns:a16="http://schemas.microsoft.com/office/drawing/2014/main" val="369987366"/>
+                    </a:ext>
+                  </a:extLst>
+                </a:gridCol>
+                <a:gridCol w="2373366">
+                  <a:extLst>
+                    <a:ext uri="{9D8B030D-6E8A-4147-A177-3AD203B41FA5}">
+                      <a16:colId xmlns:a16="http://schemas.microsoft.com/office/drawing/2014/main" val="3615940755"/>
+                    </a:ext>
+                  </a:extLst>
+                </a:gridCol>
+                <a:gridCol w="2375751">
+                  <a:extLst>
+                    <a:ext uri="{9D8B030D-6E8A-4147-A177-3AD203B41FA5}">
+                      <a16:colId xmlns:a16="http://schemas.microsoft.com/office/drawing/2014/main" val="704438616"/>
+                    </a:ext>
+                  </a:extLst>
+                </a:gridCol>
+              </a:tblGrid>
+              <a:tr h="370840">
+                <a:tc>
+                  <a:txBody>
+                    <a:bodyPr/>
+                    <a:lstStyle/>
+                    <a:p>
+                      <a:pPr algn="ctr"/>
+                      <a:endParaRPr lang="fr-FR" sz="1400" b="0" dirty="0">
+                        <a:solidFill>
+                          <a:sysClr val="windowText" lastClr="000000"/>
+                        </a:solidFill>
+                        <a:latin typeface="Arial" panose="020B0604020202020204" pitchFamily="34" charset="0"/>
+                        <a:cs typeface="Arial" panose="020B0604020202020204" pitchFamily="34" charset="0"/>
+                      </a:endParaRPr>
+                    </a:p>
+                  </a:txBody>
+                  <a:tcPr>
+                    <a:lnL w="12700" cap="flat" cmpd="sng" algn="ctr">
+                      <a:noFill/>
+                      <a:prstDash val="solid"/>
+                      <a:round/>
+                      <a:headEnd type="none" w="med" len="med"/>
+                      <a:tailEnd type="none" w="med" len="med"/>
+                    </a:lnL>
+                    <a:lnR w="12700" cap="flat" cmpd="sng" algn="ctr">
+                      <a:noFill/>
+                      <a:prstDash val="solid"/>
+                      <a:round/>
+                      <a:headEnd type="none" w="med" len="med"/>
+                      <a:tailEnd type="none" w="med" len="med"/>
+                    </a:lnR>
+                    <a:lnT w="12700" cap="flat" cmpd="sng" algn="ctr">
+                      <a:noFill/>
+                      <a:prstDash val="solid"/>
+                      <a:round/>
+                      <a:headEnd type="none" w="med" len="med"/>
+                      <a:tailEnd type="none" w="med" len="med"/>
+                    </a:lnT>
+                    <a:lnB w="12700" cap="flat" cmpd="sng" algn="ctr">
+                      <a:noFill/>
+                      <a:prstDash val="solid"/>
+                      <a:round/>
+                      <a:headEnd type="none" w="med" len="med"/>
+                      <a:tailEnd type="none" w="med" len="med"/>
+                    </a:lnB>
+                    <a:lnTlToBr w="12700" cmpd="sng">
+                      <a:noFill/>
+                      <a:prstDash val="solid"/>
+                    </a:lnTlToBr>
+                    <a:lnBlToTr w="12700" cmpd="sng">
+                      <a:noFill/>
+                      <a:prstDash val="solid"/>
+                    </a:lnBlToTr>
+                    <a:noFill/>
+                  </a:tcPr>
+                </a:tc>
+                <a:tc>
+                  <a:txBody>
+                    <a:bodyPr/>
+                    <a:lstStyle/>
+                    <a:p>
+                      <a:pPr marL="0" marR="0" lvl="0" indent="0" algn="ctr" defTabSz="914400" rtl="0" eaLnBrk="1" fontAlgn="auto" latinLnBrk="0" hangingPunct="1">
+                        <a:lnSpc>
+                          <a:spcPct val="100000"/>
+                        </a:lnSpc>
+                        <a:spcBef>
+                          <a:spcPts val="0"/>
+                        </a:spcBef>
+                        <a:spcAft>
+                          <a:spcPts val="0"/>
+                        </a:spcAft>
+                        <a:buClrTx/>
+                        <a:buSzTx/>
+                        <a:buFontTx/>
+                        <a:buNone/>
+                        <a:tabLst/>
+                        <a:defRPr/>
+                      </a:pPr>
+                      <a:r>
+                        <a:rPr lang="fr-FR" sz="1400" b="0" dirty="0">
+                          <a:solidFill>
+                            <a:sysClr val="windowText" lastClr="000000"/>
+                          </a:solidFill>
+                          <a:effectLst/>
+                          <a:latin typeface="Arial" panose="020B0604020202020204" pitchFamily="34" charset="0"/>
+                          <a:cs typeface="Arial" panose="020B0604020202020204" pitchFamily="34" charset="0"/>
+                        </a:rPr>
+                        <a:t>0.094 ± 0.004</a:t>
+                      </a:r>
+                    </a:p>
+                  </a:txBody>
+                  <a:tcPr>
+                    <a:lnL w="12700" cap="flat" cmpd="sng" algn="ctr">
+                      <a:noFill/>
+                      <a:prstDash val="solid"/>
+                      <a:round/>
+                      <a:headEnd type="none" w="med" len="med"/>
+                      <a:tailEnd type="none" w="med" len="med"/>
+                    </a:lnL>
+                    <a:lnR w="12700" cap="flat" cmpd="sng" algn="ctr">
+                      <a:noFill/>
+                      <a:prstDash val="solid"/>
+                      <a:round/>
+                      <a:headEnd type="none" w="med" len="med"/>
+                      <a:tailEnd type="none" w="med" len="med"/>
+                    </a:lnR>
+                    <a:lnT w="12700" cap="flat" cmpd="sng" algn="ctr">
+                      <a:noFill/>
+                      <a:prstDash val="solid"/>
+                      <a:round/>
+                      <a:headEnd type="none" w="med" len="med"/>
+                      <a:tailEnd type="none" w="med" len="med"/>
+                    </a:lnT>
+                    <a:lnB w="12700" cap="flat" cmpd="sng" algn="ctr">
+                      <a:noFill/>
+                      <a:prstDash val="solid"/>
+                      <a:round/>
+                      <a:headEnd type="none" w="med" len="med"/>
+                      <a:tailEnd type="none" w="med" len="med"/>
+                    </a:lnB>
+                    <a:lnTlToBr w="12700" cmpd="sng">
+                      <a:noFill/>
+                      <a:prstDash val="solid"/>
+                    </a:lnTlToBr>
+                    <a:lnBlToTr w="12700" cmpd="sng">
+                      <a:noFill/>
+                      <a:prstDash val="solid"/>
+                    </a:lnBlToTr>
+                    <a:noFill/>
+                  </a:tcPr>
+                </a:tc>
+                <a:tc>
+                  <a:txBody>
+                    <a:bodyPr/>
+                    <a:lstStyle/>
+                    <a:p>
+                      <a:pPr marL="0" marR="0" lvl="0" indent="0" algn="ctr" defTabSz="914400" rtl="0" eaLnBrk="1" fontAlgn="auto" latinLnBrk="0" hangingPunct="1">
+                        <a:lnSpc>
+                          <a:spcPct val="100000"/>
+                        </a:lnSpc>
+                        <a:spcBef>
+                          <a:spcPts val="0"/>
+                        </a:spcBef>
+                        <a:spcAft>
+                          <a:spcPts val="0"/>
+                        </a:spcAft>
+                        <a:buClrTx/>
+                        <a:buSzTx/>
+                        <a:buFontTx/>
+                        <a:buNone/>
+                        <a:tabLst/>
+                        <a:defRPr/>
+                      </a:pPr>
+                      <a:r>
+                        <a:rPr lang="fr-FR" sz="1400" b="0" dirty="0">
+                          <a:solidFill>
+                            <a:sysClr val="windowText" lastClr="000000"/>
+                          </a:solidFill>
+                          <a:effectLst/>
+                          <a:latin typeface="Arial" panose="020B0604020202020204" pitchFamily="34" charset="0"/>
+                          <a:cs typeface="Arial" panose="020B0604020202020204" pitchFamily="34" charset="0"/>
+                        </a:rPr>
+                        <a:t>0.091 ± 0.002</a:t>
+                      </a:r>
+                    </a:p>
+                  </a:txBody>
+                  <a:tcPr>
+                    <a:lnL w="12700" cap="flat" cmpd="sng" algn="ctr">
+                      <a:noFill/>
+                      <a:prstDash val="solid"/>
+                      <a:round/>
+                      <a:headEnd type="none" w="med" len="med"/>
+                      <a:tailEnd type="none" w="med" len="med"/>
+                    </a:lnL>
+                    <a:lnR w="12700" cap="flat" cmpd="sng" algn="ctr">
+                      <a:noFill/>
+                      <a:prstDash val="solid"/>
+                      <a:round/>
+                      <a:headEnd type="none" w="med" len="med"/>
+                      <a:tailEnd type="none" w="med" len="med"/>
+                    </a:lnR>
+                    <a:lnT w="12700" cap="flat" cmpd="sng" algn="ctr">
+                      <a:noFill/>
+                      <a:prstDash val="solid"/>
+                      <a:round/>
+                      <a:headEnd type="none" w="med" len="med"/>
+                      <a:tailEnd type="none" w="med" len="med"/>
+                    </a:lnT>
+                    <a:lnB w="12700" cap="flat" cmpd="sng" algn="ctr">
+                      <a:noFill/>
+                      <a:prstDash val="solid"/>
+                      <a:round/>
+                      <a:headEnd type="none" w="med" len="med"/>
+                      <a:tailEnd type="none" w="med" len="med"/>
+                    </a:lnB>
+                    <a:lnTlToBr w="12700" cmpd="sng">
+                      <a:noFill/>
+                      <a:prstDash val="solid"/>
+                    </a:lnTlToBr>
+                    <a:lnBlToTr w="12700" cmpd="sng">
+                      <a:noFill/>
+                      <a:prstDash val="solid"/>
+                    </a:lnBlToTr>
+                    <a:noFill/>
+                  </a:tcPr>
+                </a:tc>
+                <a:tc>
+                  <a:txBody>
+                    <a:bodyPr/>
+                    <a:lstStyle/>
+                    <a:p>
+                      <a:pPr marL="0" marR="0" lvl="0" indent="0" algn="ctr" defTabSz="914400" rtl="0" eaLnBrk="1" fontAlgn="auto" latinLnBrk="0" hangingPunct="1">
+                        <a:lnSpc>
+                          <a:spcPct val="100000"/>
+                        </a:lnSpc>
+                        <a:spcBef>
+                          <a:spcPts val="0"/>
+                        </a:spcBef>
+                        <a:spcAft>
+                          <a:spcPts val="0"/>
+                        </a:spcAft>
+                        <a:buClrTx/>
+                        <a:buSzTx/>
+                        <a:buFontTx/>
+                        <a:buNone/>
+                        <a:tabLst/>
+                        <a:defRPr/>
+                      </a:pPr>
+                      <a:r>
+                        <a:rPr lang="fr-FR" sz="1400" b="0" dirty="0">
+                          <a:solidFill>
+                            <a:sysClr val="windowText" lastClr="000000"/>
+                          </a:solidFill>
+                          <a:effectLst/>
+                          <a:latin typeface="Arial" panose="020B0604020202020204" pitchFamily="34" charset="0"/>
+                          <a:cs typeface="Arial" panose="020B0604020202020204" pitchFamily="34" charset="0"/>
+                        </a:rPr>
+                        <a:t>0.104 ± 0.003</a:t>
+                      </a:r>
+                    </a:p>
+                  </a:txBody>
+                  <a:tcPr>
+                    <a:lnL w="12700" cap="flat" cmpd="sng" algn="ctr">
+                      <a:noFill/>
+                      <a:prstDash val="solid"/>
+                      <a:round/>
+                      <a:headEnd type="none" w="med" len="med"/>
+                      <a:tailEnd type="none" w="med" len="med"/>
+                    </a:lnL>
+                    <a:lnR w="12700" cap="flat" cmpd="sng" algn="ctr">
+                      <a:noFill/>
+                      <a:prstDash val="solid"/>
+                      <a:round/>
+                      <a:headEnd type="none" w="med" len="med"/>
+                      <a:tailEnd type="none" w="med" len="med"/>
+                    </a:lnR>
+                    <a:lnT w="12700" cap="flat" cmpd="sng" algn="ctr">
+                      <a:noFill/>
+                      <a:prstDash val="solid"/>
+                      <a:round/>
+                      <a:headEnd type="none" w="med" len="med"/>
+                      <a:tailEnd type="none" w="med" len="med"/>
+                    </a:lnT>
+                    <a:lnB w="12700" cap="flat" cmpd="sng" algn="ctr">
+                      <a:noFill/>
+                      <a:prstDash val="solid"/>
+                      <a:round/>
+                      <a:headEnd type="none" w="med" len="med"/>
+                      <a:tailEnd type="none" w="med" len="med"/>
+                    </a:lnB>
+                    <a:lnTlToBr w="12700" cmpd="sng">
+                      <a:noFill/>
+                      <a:prstDash val="solid"/>
+                    </a:lnTlToBr>
+                    <a:lnBlToTr w="12700" cmpd="sng">
+                      <a:noFill/>
+                      <a:prstDash val="solid"/>
+                    </a:lnBlToTr>
+                    <a:noFill/>
+                  </a:tcPr>
+                </a:tc>
+                <a:tc>
+                  <a:txBody>
+                    <a:bodyPr/>
+                    <a:lstStyle/>
+                    <a:p>
+                      <a:pPr marL="0" marR="0" lvl="0" indent="0" algn="ctr" defTabSz="914400" rtl="0" eaLnBrk="1" fontAlgn="auto" latinLnBrk="0" hangingPunct="1">
+                        <a:lnSpc>
+                          <a:spcPct val="100000"/>
+                        </a:lnSpc>
+                        <a:spcBef>
+                          <a:spcPts val="0"/>
+                        </a:spcBef>
+                        <a:spcAft>
+                          <a:spcPts val="0"/>
+                        </a:spcAft>
+                        <a:buClrTx/>
+                        <a:buSzTx/>
+                        <a:buFontTx/>
+                        <a:buNone/>
+                        <a:tabLst/>
+                        <a:defRPr/>
+                      </a:pPr>
+                      <a:r>
+                        <a:rPr lang="fr-FR" sz="1400" b="0" dirty="0">
+                          <a:solidFill>
+                            <a:sysClr val="windowText" lastClr="000000"/>
+                          </a:solidFill>
+                          <a:effectLst/>
+                          <a:latin typeface="Arial" panose="020B0604020202020204" pitchFamily="34" charset="0"/>
+                          <a:cs typeface="Arial" panose="020B0604020202020204" pitchFamily="34" charset="0"/>
+                        </a:rPr>
+                        <a:t>0.097 ± 0.001</a:t>
+                      </a:r>
+                    </a:p>
+                  </a:txBody>
+                  <a:tcPr>
+                    <a:lnL w="12700" cap="flat" cmpd="sng" algn="ctr">
+                      <a:noFill/>
+                      <a:prstDash val="solid"/>
+                      <a:round/>
+                      <a:headEnd type="none" w="med" len="med"/>
+                      <a:tailEnd type="none" w="med" len="med"/>
+                    </a:lnL>
+                    <a:lnR w="12700" cap="flat" cmpd="sng" algn="ctr">
+                      <a:noFill/>
+                      <a:prstDash val="solid"/>
+                      <a:round/>
+                      <a:headEnd type="none" w="med" len="med"/>
+                      <a:tailEnd type="none" w="med" len="med"/>
+                    </a:lnR>
+                    <a:lnT w="12700" cap="flat" cmpd="sng" algn="ctr">
+                      <a:noFill/>
+                      <a:prstDash val="solid"/>
+                      <a:round/>
+                      <a:headEnd type="none" w="med" len="med"/>
+                      <a:tailEnd type="none" w="med" len="med"/>
+                    </a:lnT>
+                    <a:lnB w="12700" cap="flat" cmpd="sng" algn="ctr">
+                      <a:noFill/>
+                      <a:prstDash val="solid"/>
+                      <a:round/>
+                      <a:headEnd type="none" w="med" len="med"/>
+                      <a:tailEnd type="none" w="med" len="med"/>
+                    </a:lnB>
+                    <a:lnTlToBr w="12700" cmpd="sng">
+                      <a:noFill/>
+                      <a:prstDash val="solid"/>
+                    </a:lnTlToBr>
+                    <a:lnBlToTr w="12700" cmpd="sng">
+                      <a:noFill/>
+                      <a:prstDash val="solid"/>
+                    </a:lnBlToTr>
+                    <a:noFill/>
+                  </a:tcPr>
+                </a:tc>
+                <a:tc>
+                  <a:txBody>
+                    <a:bodyPr/>
+                    <a:lstStyle/>
+                    <a:p>
+                      <a:pPr marL="0" marR="0" lvl="0" indent="0" algn="ctr" defTabSz="914400" rtl="0" eaLnBrk="1" fontAlgn="auto" latinLnBrk="0" hangingPunct="1">
+                        <a:lnSpc>
+                          <a:spcPct val="100000"/>
+                        </a:lnSpc>
+                        <a:spcBef>
+                          <a:spcPts val="0"/>
+                        </a:spcBef>
+                        <a:spcAft>
+                          <a:spcPts val="0"/>
+                        </a:spcAft>
+                        <a:buClrTx/>
+                        <a:buSzTx/>
+                        <a:buFontTx/>
+                        <a:buNone/>
+                        <a:tabLst/>
+                        <a:defRPr/>
+                      </a:pPr>
+                      <a:endParaRPr lang="fr-FR" sz="1400" b="0" dirty="0">
+                        <a:solidFill>
+                          <a:sysClr val="windowText" lastClr="000000"/>
+                        </a:solidFill>
+                        <a:latin typeface="Arial" panose="020B0604020202020204" pitchFamily="34" charset="0"/>
+                        <a:cs typeface="Arial" panose="020B0604020202020204" pitchFamily="34" charset="0"/>
+                      </a:endParaRPr>
+                    </a:p>
+                  </a:txBody>
+                  <a:tcPr>
+                    <a:lnL w="12700" cap="flat" cmpd="sng" algn="ctr">
+                      <a:noFill/>
+                      <a:prstDash val="solid"/>
+                      <a:round/>
+                      <a:headEnd type="none" w="med" len="med"/>
+                      <a:tailEnd type="none" w="med" len="med"/>
+                    </a:lnL>
+                    <a:lnR w="12700" cap="flat" cmpd="sng" algn="ctr">
+                      <a:noFill/>
+                      <a:prstDash val="solid"/>
+                      <a:round/>
+                      <a:headEnd type="none" w="med" len="med"/>
+                      <a:tailEnd type="none" w="med" len="med"/>
+                    </a:lnR>
+                    <a:lnT w="12700" cap="flat" cmpd="sng" algn="ctr">
+                      <a:noFill/>
+                      <a:prstDash val="solid"/>
+                      <a:round/>
+                      <a:headEnd type="none" w="med" len="med"/>
+                      <a:tailEnd type="none" w="med" len="med"/>
+                    </a:lnT>
+                    <a:lnB w="12700" cap="flat" cmpd="sng" algn="ctr">
+                      <a:noFill/>
+                      <a:prstDash val="solid"/>
+                      <a:round/>
+                      <a:headEnd type="none" w="med" len="med"/>
+                      <a:tailEnd type="none" w="med" len="med"/>
+                    </a:lnB>
+                    <a:lnTlToBr w="12700" cmpd="sng">
+                      <a:noFill/>
+                      <a:prstDash val="solid"/>
+                    </a:lnTlToBr>
+                    <a:lnBlToTr w="12700" cmpd="sng">
+                      <a:noFill/>
+                      <a:prstDash val="solid"/>
+                    </a:lnBlToTr>
+                    <a:noFill/>
+                  </a:tcPr>
+                </a:tc>
+                <a:extLst>
+                  <a:ext uri="{0D108BD9-81ED-4DB2-BD59-A6C34878D82A}">
+                    <a16:rowId xmlns:a16="http://schemas.microsoft.com/office/drawing/2014/main" val="3726648593"/>
+                  </a:ext>
+                </a:extLst>
+              </a:tr>
+            </a:tbl>
+          </a:graphicData>
+        </a:graphic>
+      </p:graphicFrame>
+      <p:sp>
+        <p:nvSpPr>
+          <p:cNvPr id="17" name="ZoneTexte 16">
+            <a:extLst>
+              <a:ext uri="{FF2B5EF4-FFF2-40B4-BE49-F238E27FC236}">
+                <a16:creationId xmlns:a16="http://schemas.microsoft.com/office/drawing/2014/main" id="{158ECE84-B8F2-4D2E-8145-FBFAB23552D2}"/>
+              </a:ext>
+            </a:extLst>
+          </p:cNvPr>
+          <p:cNvSpPr txBox="1"/>
+          <p:nvPr/>
+        </p:nvSpPr>
+        <p:spPr>
+          <a:xfrm>
+            <a:off x="-38729" y="5818163"/>
+            <a:ext cx="876300" cy="307777"/>
+          </a:xfrm>
+          <a:prstGeom prst="rect">
+            <a:avLst/>
+          </a:prstGeom>
+          <a:noFill/>
+        </p:spPr>
+        <p:txBody>
+          <a:bodyPr rot="0" spcFirstLastPara="0" vertOverflow="overflow" horzOverflow="overflow" vert="horz" wrap="square" lIns="91440" tIns="45720" rIns="91440" bIns="45720" numCol="1" spcCol="0" rtlCol="0" fromWordArt="0" anchor="t" anchorCtr="0" forceAA="0" compatLnSpc="1">
+            <a:prstTxWarp prst="textNoShape">
+              <a:avLst/>
+            </a:prstTxWarp>
+            <a:spAutoFit/>
+          </a:bodyPr>
+          <a:lstStyle/>
+          <a:p>
+            <a:r>
+              <a:rPr lang="fr-FR" sz="1400" dirty="0">
+                <a:latin typeface="Arial"/>
+                <a:cs typeface="Arial"/>
+              </a:rPr>
+              <a:t>Density</a:t>
+            </a:r>
+            <a:endParaRPr lang="fr-FR" sz="1400" dirty="0"/>
+          </a:p>
+        </p:txBody>
+      </p:sp>
+    </p:spTree>
+    <p:extLst>
+      <p:ext uri="{BB962C8B-B14F-4D97-AF65-F5344CB8AC3E}">
+        <p14:creationId xmlns:p14="http://schemas.microsoft.com/office/powerpoint/2010/main" val="3326668676"/>
+      </p:ext>
+    </p:extLst>
+  </p:cSld>
+  <p:clrMapOvr>
+    <a:masterClrMapping/>
+  </p:clrMapOvr>
+</p:sld>
+</file>
+
+<file path=ppt/slides/slide4.xml><?xml version="1.0" encoding="utf-8"?>
+<p:sld xmlns:a="http://schemas.openxmlformats.org/drawingml/2006/main" xmlns:r="http://schemas.openxmlformats.org/officeDocument/2006/relationships" xmlns:p="http://schemas.openxmlformats.org/presentationml/2006/main">
+  <p:cSld>
+    <p:spTree>
+      <p:nvGrpSpPr>
+        <p:cNvPr id="1" name=""/>
+        <p:cNvGrpSpPr/>
+        <p:nvPr/>
+      </p:nvGrpSpPr>
+      <p:grpSpPr>
+        <a:xfrm>
+          <a:off x="0" y="0"/>
+          <a:ext cx="0" cy="0"/>
+          <a:chOff x="0" y="0"/>
+          <a:chExt cx="0" cy="0"/>
+        </a:xfrm>
+      </p:grpSpPr>
+      <p:sp>
+        <p:nvSpPr>
+          <p:cNvPr id="6" name="ZoneTexte 5">
+            <a:extLst>
+              <a:ext uri="{FF2B5EF4-FFF2-40B4-BE49-F238E27FC236}">
+                <a16:creationId xmlns:a16="http://schemas.microsoft.com/office/drawing/2014/main" id="{0D41A127-5E86-4ED0-921B-A1BFC42E9EE5}"/>
+              </a:ext>
+            </a:extLst>
+          </p:cNvPr>
+          <p:cNvSpPr txBox="1"/>
+          <p:nvPr/>
+        </p:nvSpPr>
+        <p:spPr>
+          <a:xfrm>
+            <a:off x="1562172" y="803776"/>
+            <a:ext cx="771071" cy="307777"/>
+          </a:xfrm>
+          <a:prstGeom prst="rect">
+            <a:avLst/>
+          </a:prstGeom>
+          <a:noFill/>
+        </p:spPr>
+        <p:txBody>
+          <a:bodyPr rot="0" spcFirstLastPara="0" vertOverflow="overflow" horzOverflow="overflow" vert="horz" wrap="square" lIns="91440" tIns="45720" rIns="91440" bIns="45720" numCol="1" spcCol="0" rtlCol="0" fromWordArt="0" anchor="t" anchorCtr="0" forceAA="0" compatLnSpc="1">
+            <a:prstTxWarp prst="textNoShape">
+              <a:avLst/>
+            </a:prstTxWarp>
+            <a:spAutoFit/>
+          </a:bodyPr>
+          <a:lstStyle/>
+          <a:p>
+            <a:pPr algn="ctr"/>
+            <a:r>
+              <a:rPr lang="fr-FR" sz="1400" b="1" dirty="0">
+                <a:latin typeface="Arial"/>
+                <a:cs typeface="Arial"/>
+              </a:rPr>
+              <a:t>2018</a:t>
+            </a:r>
+          </a:p>
+        </p:txBody>
+      </p:sp>
+      <p:sp>
+        <p:nvSpPr>
+          <p:cNvPr id="7" name="ZoneTexte 6">
+            <a:extLst>
+              <a:ext uri="{FF2B5EF4-FFF2-40B4-BE49-F238E27FC236}">
+                <a16:creationId xmlns:a16="http://schemas.microsoft.com/office/drawing/2014/main" id="{1099EF2B-928F-45D0-ADB2-796332CA7F1D}"/>
+              </a:ext>
+            </a:extLst>
+          </p:cNvPr>
+          <p:cNvSpPr txBox="1"/>
+          <p:nvPr/>
+        </p:nvSpPr>
+        <p:spPr>
+          <a:xfrm>
+            <a:off x="3875066" y="803776"/>
+            <a:ext cx="771071" cy="307777"/>
+          </a:xfrm>
+          <a:prstGeom prst="rect">
+            <a:avLst/>
+          </a:prstGeom>
+          <a:noFill/>
+        </p:spPr>
+        <p:txBody>
+          <a:bodyPr rot="0" spcFirstLastPara="0" vertOverflow="overflow" horzOverflow="overflow" vert="horz" wrap="square" lIns="91440" tIns="45720" rIns="91440" bIns="45720" numCol="1" spcCol="0" rtlCol="0" fromWordArt="0" anchor="t" anchorCtr="0" forceAA="0" compatLnSpc="1">
+            <a:prstTxWarp prst="textNoShape">
+              <a:avLst/>
+            </a:prstTxWarp>
+            <a:spAutoFit/>
+          </a:bodyPr>
+          <a:lstStyle/>
+          <a:p>
+            <a:pPr algn="ctr"/>
+            <a:r>
+              <a:rPr lang="fr-FR" sz="1400" b="1" dirty="0">
+                <a:latin typeface="Arial"/>
+                <a:cs typeface="Arial"/>
+              </a:rPr>
+              <a:t>2019</a:t>
+            </a:r>
+          </a:p>
+        </p:txBody>
+      </p:sp>
+      <p:sp>
+        <p:nvSpPr>
+          <p:cNvPr id="8" name="ZoneTexte 7">
+            <a:extLst>
+              <a:ext uri="{FF2B5EF4-FFF2-40B4-BE49-F238E27FC236}">
+                <a16:creationId xmlns:a16="http://schemas.microsoft.com/office/drawing/2014/main" id="{421DA25D-8EF2-4FBD-82AD-25BA2347BD9F}"/>
+              </a:ext>
+            </a:extLst>
+          </p:cNvPr>
+          <p:cNvSpPr txBox="1"/>
+          <p:nvPr/>
+        </p:nvSpPr>
+        <p:spPr>
+          <a:xfrm>
+            <a:off x="6187960" y="803776"/>
+            <a:ext cx="771071" cy="307777"/>
+          </a:xfrm>
+          <a:prstGeom prst="rect">
+            <a:avLst/>
+          </a:prstGeom>
+          <a:noFill/>
+        </p:spPr>
+        <p:txBody>
+          <a:bodyPr rot="0" spcFirstLastPara="0" vertOverflow="overflow" horzOverflow="overflow" vert="horz" wrap="square" lIns="91440" tIns="45720" rIns="91440" bIns="45720" numCol="1" spcCol="0" rtlCol="0" fromWordArt="0" anchor="t" anchorCtr="0" forceAA="0" compatLnSpc="1">
+            <a:prstTxWarp prst="textNoShape">
+              <a:avLst/>
+            </a:prstTxWarp>
+            <a:spAutoFit/>
+          </a:bodyPr>
+          <a:lstStyle/>
+          <a:p>
+            <a:pPr algn="ctr"/>
+            <a:r>
+              <a:rPr lang="fr-FR" sz="1400" b="1" dirty="0">
+                <a:latin typeface="Arial"/>
+                <a:cs typeface="Arial"/>
+              </a:rPr>
+              <a:t>2020</a:t>
+            </a:r>
+          </a:p>
+        </p:txBody>
+      </p:sp>
+      <p:sp>
+        <p:nvSpPr>
+          <p:cNvPr id="9" name="ZoneTexte 8">
+            <a:extLst>
+              <a:ext uri="{FF2B5EF4-FFF2-40B4-BE49-F238E27FC236}">
+                <a16:creationId xmlns:a16="http://schemas.microsoft.com/office/drawing/2014/main" id="{E5FCF870-140B-427A-989B-BCD0A28CC4EE}"/>
+              </a:ext>
+            </a:extLst>
+          </p:cNvPr>
+          <p:cNvSpPr txBox="1"/>
+          <p:nvPr/>
+        </p:nvSpPr>
+        <p:spPr>
+          <a:xfrm>
+            <a:off x="8500854" y="803776"/>
+            <a:ext cx="771071" cy="307777"/>
+          </a:xfrm>
+          <a:prstGeom prst="rect">
+            <a:avLst/>
+          </a:prstGeom>
+          <a:noFill/>
+        </p:spPr>
+        <p:txBody>
+          <a:bodyPr rot="0" spcFirstLastPara="0" vertOverflow="overflow" horzOverflow="overflow" vert="horz" wrap="square" lIns="91440" tIns="45720" rIns="91440" bIns="45720" numCol="1" spcCol="0" rtlCol="0" fromWordArt="0" anchor="t" anchorCtr="0" forceAA="0" compatLnSpc="1">
+            <a:prstTxWarp prst="textNoShape">
+              <a:avLst/>
+            </a:prstTxWarp>
+            <a:spAutoFit/>
+          </a:bodyPr>
+          <a:lstStyle/>
+          <a:p>
+            <a:pPr algn="ctr"/>
+            <a:r>
+              <a:rPr lang="fr-FR" sz="1400" b="1">
+                <a:latin typeface="Arial"/>
+                <a:cs typeface="Arial"/>
+              </a:rPr>
+              <a:t>2021</a:t>
+            </a:r>
+          </a:p>
+        </p:txBody>
+      </p:sp>
+      <p:sp>
+        <p:nvSpPr>
+          <p:cNvPr id="11" name="ZoneTexte 10">
+            <a:extLst>
+              <a:ext uri="{FF2B5EF4-FFF2-40B4-BE49-F238E27FC236}">
+                <a16:creationId xmlns:a16="http://schemas.microsoft.com/office/drawing/2014/main" id="{439447E6-54D1-4F8F-9063-5C87C3B99D9E}"/>
+              </a:ext>
+            </a:extLst>
+          </p:cNvPr>
+          <p:cNvSpPr txBox="1"/>
+          <p:nvPr/>
+        </p:nvSpPr>
+        <p:spPr>
+          <a:xfrm>
+            <a:off x="-16853" y="4320381"/>
+            <a:ext cx="769911" cy="738664"/>
+          </a:xfrm>
+          <a:prstGeom prst="rect">
+            <a:avLst/>
+          </a:prstGeom>
+          <a:noFill/>
+        </p:spPr>
+        <p:txBody>
+          <a:bodyPr rot="0" spcFirstLastPara="0" vertOverflow="overflow" horzOverflow="overflow" vert="horz" wrap="square" lIns="91440" tIns="45720" rIns="91440" bIns="45720" numCol="1" spcCol="0" rtlCol="0" fromWordArt="0" anchor="t" anchorCtr="0" forceAA="0" compatLnSpc="1">
+            <a:prstTxWarp prst="textNoShape">
+              <a:avLst/>
+            </a:prstTxWarp>
+            <a:spAutoFit/>
+          </a:bodyPr>
+          <a:lstStyle/>
+          <a:p>
+            <a:r>
+              <a:rPr lang="fr-FR" sz="1400" b="1" dirty="0">
+                <a:latin typeface="Arial"/>
+                <a:cs typeface="Arial"/>
+              </a:rPr>
+              <a:t>Non-ESBL </a:t>
+            </a:r>
+            <a:r>
+              <a:rPr lang="fr-FR" sz="1400" b="1" i="1" dirty="0">
+                <a:latin typeface="Arial"/>
+                <a:cs typeface="Arial"/>
+              </a:rPr>
+              <a:t>E. coli</a:t>
+            </a:r>
+            <a:endParaRPr lang="fr-FR" sz="1400" i="1" dirty="0"/>
+          </a:p>
+        </p:txBody>
+      </p:sp>
+      <p:sp>
+        <p:nvSpPr>
+          <p:cNvPr id="12" name="ZoneTexte 11">
+            <a:extLst>
+              <a:ext uri="{FF2B5EF4-FFF2-40B4-BE49-F238E27FC236}">
+                <a16:creationId xmlns:a16="http://schemas.microsoft.com/office/drawing/2014/main" id="{536C5915-A9EF-4D17-96FB-1673E9AE39FB}"/>
+              </a:ext>
+            </a:extLst>
+          </p:cNvPr>
+          <p:cNvSpPr txBox="1"/>
+          <p:nvPr/>
+        </p:nvSpPr>
+        <p:spPr>
+          <a:xfrm>
+            <a:off x="-16853" y="1975249"/>
+            <a:ext cx="771071" cy="523220"/>
+          </a:xfrm>
+          <a:prstGeom prst="rect">
+            <a:avLst/>
+          </a:prstGeom>
+          <a:noFill/>
+        </p:spPr>
+        <p:txBody>
+          <a:bodyPr rot="0" spcFirstLastPara="0" vertOverflow="overflow" horzOverflow="overflow" vert="horz" wrap="square" lIns="91440" tIns="45720" rIns="91440" bIns="45720" numCol="1" spcCol="0" rtlCol="0" fromWordArt="0" anchor="t" anchorCtr="0" forceAA="0" compatLnSpc="1">
+            <a:prstTxWarp prst="textNoShape">
+              <a:avLst/>
+            </a:prstTxWarp>
+            <a:spAutoFit/>
+          </a:bodyPr>
+          <a:lstStyle/>
+          <a:p>
+            <a:r>
+              <a:rPr lang="fr-FR" sz="1400" b="1" dirty="0">
+                <a:latin typeface="Arial"/>
+                <a:cs typeface="Arial"/>
+              </a:rPr>
+              <a:t>ESBL </a:t>
+            </a:r>
+            <a:r>
+              <a:rPr lang="fr-FR" sz="1400" b="1" i="1" dirty="0">
+                <a:latin typeface="Arial"/>
+                <a:cs typeface="Arial"/>
+              </a:rPr>
+              <a:t>E. coli</a:t>
+            </a:r>
+            <a:endParaRPr lang="fr-FR" sz="1400" i="1" dirty="0"/>
+          </a:p>
+        </p:txBody>
+      </p:sp>
+      <p:pic>
+        <p:nvPicPr>
+          <p:cNvPr id="13" name="Image 12">
+            <a:extLst>
+              <a:ext uri="{FF2B5EF4-FFF2-40B4-BE49-F238E27FC236}">
+                <a16:creationId xmlns:a16="http://schemas.microsoft.com/office/drawing/2014/main" id="{830210BA-92B2-49AC-B699-E198087A5BC9}"/>
+              </a:ext>
+            </a:extLst>
+          </p:cNvPr>
+          <p:cNvPicPr>
+            <a:picLocks noChangeAspect="1"/>
+          </p:cNvPicPr>
+          <p:nvPr/>
+        </p:nvPicPr>
+        <p:blipFill>
+          <a:blip r:embed="rId2"/>
+          <a:stretch>
+            <a:fillRect/>
+          </a:stretch>
+        </p:blipFill>
+        <p:spPr>
+          <a:xfrm>
+            <a:off x="-112034" y="12174874"/>
+            <a:ext cx="10372468" cy="2594325"/>
+          </a:xfrm>
+          <a:prstGeom prst="rect">
+            <a:avLst/>
+          </a:prstGeom>
+        </p:spPr>
+      </p:pic>
+      <p:sp>
+        <p:nvSpPr>
+          <p:cNvPr id="14" name="ZoneTexte 13">
+            <a:extLst>
+              <a:ext uri="{FF2B5EF4-FFF2-40B4-BE49-F238E27FC236}">
+                <a16:creationId xmlns:a16="http://schemas.microsoft.com/office/drawing/2014/main" id="{FA37B398-859B-49F6-85BD-F923D5826065}"/>
+              </a:ext>
+            </a:extLst>
+          </p:cNvPr>
+          <p:cNvSpPr txBox="1"/>
+          <p:nvPr/>
+        </p:nvSpPr>
+        <p:spPr>
+          <a:xfrm>
+            <a:off x="-31108" y="846518"/>
+            <a:ext cx="548246" cy="445828"/>
+          </a:xfrm>
+          <a:prstGeom prst="rect">
+            <a:avLst/>
+          </a:prstGeom>
+          <a:noFill/>
+        </p:spPr>
+        <p:txBody>
+          <a:bodyPr wrap="square" rtlCol="0">
+            <a:spAutoFit/>
+          </a:bodyPr>
+          <a:lstStyle/>
+          <a:p>
+            <a:pPr algn="ctr"/>
+            <a:r>
+              <a:rPr lang="fr-FR" b="1" dirty="0">
+                <a:latin typeface="Arial" panose="020B0604020202020204" pitchFamily="34" charset="0"/>
+                <a:cs typeface="Arial" panose="020B0604020202020204" pitchFamily="34" charset="0"/>
+              </a:rPr>
+              <a:t>A</a:t>
+            </a:r>
+          </a:p>
+        </p:txBody>
+      </p:sp>
+      <p:sp>
+        <p:nvSpPr>
+          <p:cNvPr id="15" name="ZoneTexte 14">
+            <a:extLst>
+              <a:ext uri="{FF2B5EF4-FFF2-40B4-BE49-F238E27FC236}">
+                <a16:creationId xmlns:a16="http://schemas.microsoft.com/office/drawing/2014/main" id="{9235B0E8-7FE3-43FD-90D1-E805050B4D3D}"/>
+              </a:ext>
+            </a:extLst>
+          </p:cNvPr>
+          <p:cNvSpPr txBox="1"/>
+          <p:nvPr/>
+        </p:nvSpPr>
+        <p:spPr>
+          <a:xfrm>
+            <a:off x="-55295" y="6424851"/>
+            <a:ext cx="548246" cy="445828"/>
+          </a:xfrm>
+          <a:prstGeom prst="rect">
+            <a:avLst/>
+          </a:prstGeom>
+          <a:noFill/>
+        </p:spPr>
+        <p:txBody>
+          <a:bodyPr wrap="square" rtlCol="0">
+            <a:spAutoFit/>
+          </a:bodyPr>
+          <a:lstStyle/>
+          <a:p>
+            <a:pPr algn="ctr"/>
+            <a:r>
+              <a:rPr lang="fr-FR" b="1" dirty="0">
+                <a:latin typeface="Arial" panose="020B0604020202020204" pitchFamily="34" charset="0"/>
+                <a:cs typeface="Arial" panose="020B0604020202020204" pitchFamily="34" charset="0"/>
+              </a:rPr>
+              <a:t>B</a:t>
+            </a:r>
+          </a:p>
+        </p:txBody>
+      </p:sp>
+      <p:sp>
+        <p:nvSpPr>
+          <p:cNvPr id="18" name="ZoneTexte 17">
+            <a:extLst>
+              <a:ext uri="{FF2B5EF4-FFF2-40B4-BE49-F238E27FC236}">
+                <a16:creationId xmlns:a16="http://schemas.microsoft.com/office/drawing/2014/main" id="{6C66C86C-0F8F-4227-9909-4DB2C88081A3}"/>
+              </a:ext>
+            </a:extLst>
+          </p:cNvPr>
+          <p:cNvSpPr txBox="1"/>
+          <p:nvPr/>
+        </p:nvSpPr>
+        <p:spPr>
+          <a:xfrm>
+            <a:off x="1302065" y="6498553"/>
+            <a:ext cx="771071" cy="307777"/>
+          </a:xfrm>
+          <a:prstGeom prst="rect">
+            <a:avLst/>
+          </a:prstGeom>
+          <a:noFill/>
+        </p:spPr>
+        <p:txBody>
+          <a:bodyPr rot="0" spcFirstLastPara="0" vertOverflow="overflow" horzOverflow="overflow" vert="horz" wrap="square" lIns="91440" tIns="45720" rIns="91440" bIns="45720" numCol="1" spcCol="0" rtlCol="0" fromWordArt="0" anchor="t" anchorCtr="0" forceAA="0" compatLnSpc="1">
+            <a:prstTxWarp prst="textNoShape">
+              <a:avLst/>
+            </a:prstTxWarp>
+            <a:spAutoFit/>
+          </a:bodyPr>
+          <a:lstStyle/>
+          <a:p>
+            <a:pPr algn="ctr"/>
+            <a:r>
+              <a:rPr lang="fr-FR" sz="1400" b="1" dirty="0">
+                <a:latin typeface="Arial"/>
+                <a:cs typeface="Arial"/>
+              </a:rPr>
+              <a:t>2018</a:t>
+            </a:r>
+          </a:p>
+        </p:txBody>
+      </p:sp>
+      <p:sp>
+        <p:nvSpPr>
+          <p:cNvPr id="19" name="ZoneTexte 18">
+            <a:extLst>
+              <a:ext uri="{FF2B5EF4-FFF2-40B4-BE49-F238E27FC236}">
+                <a16:creationId xmlns:a16="http://schemas.microsoft.com/office/drawing/2014/main" id="{391B59E0-B1B5-40D0-BBEE-DB1B6EF9A6CF}"/>
+              </a:ext>
+            </a:extLst>
+          </p:cNvPr>
+          <p:cNvSpPr txBox="1"/>
+          <p:nvPr/>
+        </p:nvSpPr>
+        <p:spPr>
+          <a:xfrm>
+            <a:off x="3614959" y="6498553"/>
+            <a:ext cx="771071" cy="307777"/>
+          </a:xfrm>
+          <a:prstGeom prst="rect">
+            <a:avLst/>
+          </a:prstGeom>
+          <a:noFill/>
+        </p:spPr>
+        <p:txBody>
+          <a:bodyPr rot="0" spcFirstLastPara="0" vertOverflow="overflow" horzOverflow="overflow" vert="horz" wrap="square" lIns="91440" tIns="45720" rIns="91440" bIns="45720" numCol="1" spcCol="0" rtlCol="0" fromWordArt="0" anchor="t" anchorCtr="0" forceAA="0" compatLnSpc="1">
+            <a:prstTxWarp prst="textNoShape">
+              <a:avLst/>
+            </a:prstTxWarp>
+            <a:spAutoFit/>
+          </a:bodyPr>
+          <a:lstStyle/>
+          <a:p>
+            <a:pPr algn="ctr"/>
+            <a:r>
+              <a:rPr lang="fr-FR" sz="1400" b="1" dirty="0">
+                <a:latin typeface="Arial"/>
+                <a:cs typeface="Arial"/>
+              </a:rPr>
+              <a:t>2019</a:t>
+            </a:r>
+          </a:p>
+        </p:txBody>
+      </p:sp>
+      <p:sp>
+        <p:nvSpPr>
+          <p:cNvPr id="20" name="ZoneTexte 19">
+            <a:extLst>
+              <a:ext uri="{FF2B5EF4-FFF2-40B4-BE49-F238E27FC236}">
+                <a16:creationId xmlns:a16="http://schemas.microsoft.com/office/drawing/2014/main" id="{B5B8E87A-21BC-4140-9494-5F4DAE22891E}"/>
+              </a:ext>
+            </a:extLst>
+          </p:cNvPr>
+          <p:cNvSpPr txBox="1"/>
+          <p:nvPr/>
+        </p:nvSpPr>
+        <p:spPr>
+          <a:xfrm>
+            <a:off x="5927853" y="6498553"/>
+            <a:ext cx="771071" cy="307777"/>
+          </a:xfrm>
+          <a:prstGeom prst="rect">
+            <a:avLst/>
+          </a:prstGeom>
+          <a:noFill/>
+        </p:spPr>
+        <p:txBody>
+          <a:bodyPr rot="0" spcFirstLastPara="0" vertOverflow="overflow" horzOverflow="overflow" vert="horz" wrap="square" lIns="91440" tIns="45720" rIns="91440" bIns="45720" numCol="1" spcCol="0" rtlCol="0" fromWordArt="0" anchor="t" anchorCtr="0" forceAA="0" compatLnSpc="1">
+            <a:prstTxWarp prst="textNoShape">
+              <a:avLst/>
+            </a:prstTxWarp>
+            <a:spAutoFit/>
+          </a:bodyPr>
+          <a:lstStyle/>
+          <a:p>
+            <a:pPr algn="ctr"/>
+            <a:r>
+              <a:rPr lang="fr-FR" sz="1400" b="1" dirty="0">
+                <a:latin typeface="Arial"/>
+                <a:cs typeface="Arial"/>
+              </a:rPr>
+              <a:t>2020</a:t>
+            </a:r>
+          </a:p>
+        </p:txBody>
+      </p:sp>
+      <p:sp>
+        <p:nvSpPr>
+          <p:cNvPr id="21" name="ZoneTexte 20">
+            <a:extLst>
+              <a:ext uri="{FF2B5EF4-FFF2-40B4-BE49-F238E27FC236}">
+                <a16:creationId xmlns:a16="http://schemas.microsoft.com/office/drawing/2014/main" id="{73235365-3537-4393-A658-8C2B1A1F2CEF}"/>
+              </a:ext>
+            </a:extLst>
+          </p:cNvPr>
+          <p:cNvSpPr txBox="1"/>
+          <p:nvPr/>
+        </p:nvSpPr>
+        <p:spPr>
+          <a:xfrm>
+            <a:off x="8240747" y="6498553"/>
+            <a:ext cx="771071" cy="307777"/>
+          </a:xfrm>
+          <a:prstGeom prst="rect">
+            <a:avLst/>
+          </a:prstGeom>
+          <a:noFill/>
+        </p:spPr>
+        <p:txBody>
+          <a:bodyPr rot="0" spcFirstLastPara="0" vertOverflow="overflow" horzOverflow="overflow" vert="horz" wrap="square" lIns="91440" tIns="45720" rIns="91440" bIns="45720" numCol="1" spcCol="0" rtlCol="0" fromWordArt="0" anchor="t" anchorCtr="0" forceAA="0" compatLnSpc="1">
+            <a:prstTxWarp prst="textNoShape">
+              <a:avLst/>
+            </a:prstTxWarp>
+            <a:spAutoFit/>
+          </a:bodyPr>
+          <a:lstStyle/>
+          <a:p>
+            <a:pPr algn="ctr"/>
+            <a:r>
+              <a:rPr lang="fr-FR" sz="1400" b="1">
+                <a:latin typeface="Arial"/>
+                <a:cs typeface="Arial"/>
+              </a:rPr>
+              <a:t>2021</a:t>
+            </a:r>
+          </a:p>
+        </p:txBody>
+      </p:sp>
+      <p:sp>
+        <p:nvSpPr>
+          <p:cNvPr id="23" name="ZoneTexte 22">
+            <a:extLst>
+              <a:ext uri="{FF2B5EF4-FFF2-40B4-BE49-F238E27FC236}">
+                <a16:creationId xmlns:a16="http://schemas.microsoft.com/office/drawing/2014/main" id="{31AED35F-AAAF-4CDD-8144-327C1355035F}"/>
+              </a:ext>
+            </a:extLst>
+          </p:cNvPr>
+          <p:cNvSpPr txBox="1"/>
+          <p:nvPr/>
+        </p:nvSpPr>
+        <p:spPr>
+          <a:xfrm>
+            <a:off x="-276960" y="10015158"/>
+            <a:ext cx="769911" cy="738664"/>
+          </a:xfrm>
+          <a:prstGeom prst="rect">
+            <a:avLst/>
+          </a:prstGeom>
+          <a:noFill/>
+        </p:spPr>
+        <p:txBody>
+          <a:bodyPr rot="0" spcFirstLastPara="0" vertOverflow="overflow" horzOverflow="overflow" vert="horz" wrap="square" lIns="91440" tIns="45720" rIns="91440" bIns="45720" numCol="1" spcCol="0" rtlCol="0" fromWordArt="0" anchor="t" anchorCtr="0" forceAA="0" compatLnSpc="1">
+            <a:prstTxWarp prst="textNoShape">
+              <a:avLst/>
+            </a:prstTxWarp>
+            <a:spAutoFit/>
+          </a:bodyPr>
+          <a:lstStyle/>
+          <a:p>
+            <a:r>
+              <a:rPr lang="fr-FR" sz="1400" b="1" dirty="0">
+                <a:latin typeface="Arial"/>
+                <a:cs typeface="Arial"/>
+              </a:rPr>
+              <a:t>Non-ESBL </a:t>
+            </a:r>
+            <a:r>
+              <a:rPr lang="fr-FR" sz="1400" b="1" i="1" dirty="0">
+                <a:latin typeface="Arial"/>
+                <a:cs typeface="Arial"/>
+              </a:rPr>
+              <a:t>E. coli</a:t>
+            </a:r>
+            <a:endParaRPr lang="fr-FR" sz="1400" i="1" dirty="0"/>
+          </a:p>
+        </p:txBody>
+      </p:sp>
+      <p:sp>
+        <p:nvSpPr>
+          <p:cNvPr id="24" name="ZoneTexte 23">
+            <a:extLst>
+              <a:ext uri="{FF2B5EF4-FFF2-40B4-BE49-F238E27FC236}">
+                <a16:creationId xmlns:a16="http://schemas.microsoft.com/office/drawing/2014/main" id="{12EC36B4-BFC8-46E1-978B-FEFA094DC225}"/>
+              </a:ext>
+            </a:extLst>
+          </p:cNvPr>
+          <p:cNvSpPr txBox="1"/>
+          <p:nvPr/>
+        </p:nvSpPr>
+        <p:spPr>
+          <a:xfrm>
+            <a:off x="-276960" y="7670026"/>
+            <a:ext cx="771071" cy="523220"/>
+          </a:xfrm>
+          <a:prstGeom prst="rect">
+            <a:avLst/>
+          </a:prstGeom>
+          <a:noFill/>
+        </p:spPr>
+        <p:txBody>
+          <a:bodyPr rot="0" spcFirstLastPara="0" vertOverflow="overflow" horzOverflow="overflow" vert="horz" wrap="square" lIns="91440" tIns="45720" rIns="91440" bIns="45720" numCol="1" spcCol="0" rtlCol="0" fromWordArt="0" anchor="t" anchorCtr="0" forceAA="0" compatLnSpc="1">
+            <a:prstTxWarp prst="textNoShape">
+              <a:avLst/>
+            </a:prstTxWarp>
+            <a:spAutoFit/>
+          </a:bodyPr>
+          <a:lstStyle/>
+          <a:p>
+            <a:r>
+              <a:rPr lang="fr-FR" sz="1400" b="1" dirty="0">
+                <a:latin typeface="Arial"/>
+                <a:cs typeface="Arial"/>
+              </a:rPr>
+              <a:t>ESBL </a:t>
+            </a:r>
+            <a:r>
+              <a:rPr lang="fr-FR" sz="1400" b="1" i="1" dirty="0">
+                <a:latin typeface="Arial"/>
+                <a:cs typeface="Arial"/>
+              </a:rPr>
+              <a:t>E. coli</a:t>
+            </a:r>
+            <a:endParaRPr lang="fr-FR" sz="1400" i="1" dirty="0"/>
+          </a:p>
+        </p:txBody>
+      </p:sp>
+      <p:pic>
+        <p:nvPicPr>
+          <p:cNvPr id="30" name="Image 29">
+            <a:extLst>
+              <a:ext uri="{FF2B5EF4-FFF2-40B4-BE49-F238E27FC236}">
+                <a16:creationId xmlns:a16="http://schemas.microsoft.com/office/drawing/2014/main" id="{364507F0-C690-4D21-90BB-F40F3264B2AB}"/>
+              </a:ext>
+            </a:extLst>
+          </p:cNvPr>
+          <p:cNvPicPr>
+            <a:picLocks noChangeAspect="1"/>
+          </p:cNvPicPr>
+          <p:nvPr/>
+        </p:nvPicPr>
+        <p:blipFill rotWithShape="1">
+          <a:blip r:embed="rId3" cstate="print">
+            <a:extLst>
+              <a:ext uri="{28A0092B-C50C-407E-A947-70E740481C1C}">
+                <a14:useLocalDpi xmlns:a14="http://schemas.microsoft.com/office/drawing/2010/main" val="0"/>
+              </a:ext>
+            </a:extLst>
+          </a:blip>
+          <a:srcRect r="20088"/>
+          <a:stretch/>
+        </p:blipFill>
+        <p:spPr>
+          <a:xfrm>
+            <a:off x="893403" y="1239357"/>
+            <a:ext cx="9134544" cy="4953231"/>
+          </a:xfrm>
+          <a:prstGeom prst="rect">
+            <a:avLst/>
+          </a:prstGeom>
+        </p:spPr>
+      </p:pic>
+      <p:pic>
+        <p:nvPicPr>
+          <p:cNvPr id="34" name="Image 33">
+            <a:extLst>
+              <a:ext uri="{FF2B5EF4-FFF2-40B4-BE49-F238E27FC236}">
+                <a16:creationId xmlns:a16="http://schemas.microsoft.com/office/drawing/2014/main" id="{2268FE58-D804-4079-BC2F-380C30E2B9E8}"/>
+              </a:ext>
+            </a:extLst>
+          </p:cNvPr>
+          <p:cNvPicPr>
+            <a:picLocks noChangeAspect="1"/>
+          </p:cNvPicPr>
+          <p:nvPr/>
+        </p:nvPicPr>
+        <p:blipFill rotWithShape="1">
+          <a:blip r:embed="rId4" cstate="print">
+            <a:extLst>
+              <a:ext uri="{28A0092B-C50C-407E-A947-70E740481C1C}">
+                <a14:useLocalDpi xmlns:a14="http://schemas.microsoft.com/office/drawing/2010/main" val="0"/>
+              </a:ext>
+            </a:extLst>
+          </a:blip>
+          <a:srcRect r="20088"/>
+          <a:stretch/>
+        </p:blipFill>
+        <p:spPr>
+          <a:xfrm>
+            <a:off x="753058" y="6882655"/>
+            <a:ext cx="9134544" cy="4953231"/>
+          </a:xfrm>
+          <a:prstGeom prst="rect">
+            <a:avLst/>
+          </a:prstGeom>
+        </p:spPr>
+      </p:pic>
+    </p:spTree>
+    <p:extLst>
+      <p:ext uri="{BB962C8B-B14F-4D97-AF65-F5344CB8AC3E}">
+        <p14:creationId xmlns:p14="http://schemas.microsoft.com/office/powerpoint/2010/main" val="3466640870"/>
+      </p:ext>
+    </p:extLst>
+  </p:cSld>
+  <p:clrMapOvr>
+    <a:masterClrMapping/>
+  </p:clrMapOvr>
+</p:sld>
+</file>
+
+<file path=ppt/slides/slide5.xml><?xml version="1.0" encoding="utf-8"?>
+<p:sld xmlns:a="http://schemas.openxmlformats.org/drawingml/2006/main" xmlns:r="http://schemas.openxmlformats.org/officeDocument/2006/relationships" xmlns:p="http://schemas.openxmlformats.org/presentationml/2006/main">
+  <p:cSld>
+    <p:spTree>
+      <p:nvGrpSpPr>
+        <p:cNvPr id="1" name=""/>
+        <p:cNvGrpSpPr/>
+        <p:nvPr/>
+      </p:nvGrpSpPr>
+      <p:grpSpPr>
+        <a:xfrm>
+          <a:off x="0" y="0"/>
+          <a:ext cx="0" cy="0"/>
+          <a:chOff x="0" y="0"/>
+          <a:chExt cx="0" cy="0"/>
+        </a:xfrm>
+      </p:grpSpPr>
+    </p:spTree>
+    <p:extLst>
+      <p:ext uri="{BB962C8B-B14F-4D97-AF65-F5344CB8AC3E}">
+        <p14:creationId xmlns:p14="http://schemas.microsoft.com/office/powerpoint/2010/main" val="1361999487"/>
       </p:ext>
     </p:extLst>
   </p:cSld>

--- a/fig4.pptx
+++ b/fig4.pptx
@@ -215,7 +215,7 @@
           <a:p>
             <a:fld id="{A21AE48D-D7D9-46F8-80AC-255986AD24D4}" type="datetimeFigureOut">
               <a:rPr lang="fr-FR" smtClean="0"/>
-              <a:t>13/06/2025</a:t>
+              <a:t>27/06/2025</a:t>
             </a:fld>
             <a:endParaRPr lang="fr-FR"/>
           </a:p>
@@ -831,7 +831,7 @@
           <a:p>
             <a:fld id="{E6744CE3-0875-4B69-89C0-6F72D8139561}" type="datetimeFigureOut">
               <a:rPr lang="en-GB" smtClean="0"/>
-              <a:t>13/06/2025</a:t>
+              <a:t>27/06/2025</a:t>
             </a:fld>
             <a:endParaRPr lang="en-GB"/>
           </a:p>
@@ -1001,7 +1001,7 @@
           <a:p>
             <a:fld id="{E6744CE3-0875-4B69-89C0-6F72D8139561}" type="datetimeFigureOut">
               <a:rPr lang="en-GB" smtClean="0"/>
-              <a:t>13/06/2025</a:t>
+              <a:t>27/06/2025</a:t>
             </a:fld>
             <a:endParaRPr lang="en-GB"/>
           </a:p>
@@ -1247,7 +1247,7 @@
           <a:p>
             <a:fld id="{E6744CE3-0875-4B69-89C0-6F72D8139561}" type="datetimeFigureOut">
               <a:rPr lang="en-GB" smtClean="0"/>
-              <a:t>13/06/2025</a:t>
+              <a:t>27/06/2025</a:t>
             </a:fld>
             <a:endParaRPr lang="en-GB"/>
           </a:p>
@@ -1535,7 +1535,7 @@
           <a:p>
             <a:fld id="{E6744CE3-0875-4B69-89C0-6F72D8139561}" type="datetimeFigureOut">
               <a:rPr lang="en-GB" smtClean="0"/>
-              <a:t>13/06/2025</a:t>
+              <a:t>27/06/2025</a:t>
             </a:fld>
             <a:endParaRPr lang="en-GB"/>
           </a:p>
@@ -1957,7 +1957,7 @@
           <a:p>
             <a:fld id="{E6744CE3-0875-4B69-89C0-6F72D8139561}" type="datetimeFigureOut">
               <a:rPr lang="en-GB" smtClean="0"/>
-              <a:t>13/06/2025</a:t>
+              <a:t>27/06/2025</a:t>
             </a:fld>
             <a:endParaRPr lang="en-GB"/>
           </a:p>
@@ -2075,7 +2075,7 @@
           <a:p>
             <a:fld id="{E6744CE3-0875-4B69-89C0-6F72D8139561}" type="datetimeFigureOut">
               <a:rPr lang="en-GB" smtClean="0"/>
-              <a:t>13/06/2025</a:t>
+              <a:t>27/06/2025</a:t>
             </a:fld>
             <a:endParaRPr lang="en-GB"/>
           </a:p>
@@ -2170,7 +2170,7 @@
           <a:p>
             <a:fld id="{E6744CE3-0875-4B69-89C0-6F72D8139561}" type="datetimeFigureOut">
               <a:rPr lang="en-GB" smtClean="0"/>
-              <a:t>13/06/2025</a:t>
+              <a:t>27/06/2025</a:t>
             </a:fld>
             <a:endParaRPr lang="en-GB"/>
           </a:p>
@@ -2383,7 +2383,7 @@
           <a:p>
             <a:fld id="{E6744CE3-0875-4B69-89C0-6F72D8139561}" type="datetimeFigureOut">
               <a:rPr lang="en-GB" smtClean="0"/>
-              <a:t>13/06/2025</a:t>
+              <a:t>27/06/2025</a:t>
             </a:fld>
             <a:endParaRPr lang="en-GB"/>
           </a:p>
@@ -9222,6 +9222,2993 @@
           <a:chExt cx="0" cy="0"/>
         </a:xfrm>
       </p:grpSpPr>
+      <p:sp>
+        <p:nvSpPr>
+          <p:cNvPr id="3" name="ZoneTexte 2">
+            <a:extLst>
+              <a:ext uri="{FF2B5EF4-FFF2-40B4-BE49-F238E27FC236}">
+                <a16:creationId xmlns:a16="http://schemas.microsoft.com/office/drawing/2014/main" id="{56DE7F56-B86A-4B46-B06E-D01CEC7428A7}"/>
+              </a:ext>
+            </a:extLst>
+          </p:cNvPr>
+          <p:cNvSpPr txBox="1"/>
+          <p:nvPr/>
+        </p:nvSpPr>
+        <p:spPr>
+          <a:xfrm>
+            <a:off x="-3914" y="1772124"/>
+            <a:ext cx="771071" cy="523220"/>
+          </a:xfrm>
+          <a:prstGeom prst="rect">
+            <a:avLst/>
+          </a:prstGeom>
+          <a:noFill/>
+        </p:spPr>
+        <p:txBody>
+          <a:bodyPr rot="0" spcFirstLastPara="0" vertOverflow="overflow" horzOverflow="overflow" vert="horz" wrap="square" lIns="91440" tIns="45720" rIns="91440" bIns="45720" numCol="1" spcCol="0" rtlCol="0" fromWordArt="0" anchor="t" anchorCtr="0" forceAA="0" compatLnSpc="1">
+            <a:prstTxWarp prst="textNoShape">
+              <a:avLst/>
+            </a:prstTxWarp>
+            <a:spAutoFit/>
+          </a:bodyPr>
+          <a:lstStyle/>
+          <a:p>
+            <a:r>
+              <a:rPr lang="fr-FR" sz="1400" b="1" dirty="0">
+                <a:latin typeface="Arial"/>
+                <a:cs typeface="Arial"/>
+              </a:rPr>
+              <a:t>ESBL </a:t>
+            </a:r>
+            <a:r>
+              <a:rPr lang="fr-FR" sz="1400" b="1" i="1" dirty="0">
+                <a:latin typeface="Arial"/>
+                <a:cs typeface="Arial"/>
+              </a:rPr>
+              <a:t>E. coli</a:t>
+            </a:r>
+            <a:endParaRPr lang="fr-FR" sz="1400" i="1" dirty="0"/>
+          </a:p>
+        </p:txBody>
+      </p:sp>
+      <p:sp>
+        <p:nvSpPr>
+          <p:cNvPr id="4" name="ZoneTexte 3">
+            <a:extLst>
+              <a:ext uri="{FF2B5EF4-FFF2-40B4-BE49-F238E27FC236}">
+                <a16:creationId xmlns:a16="http://schemas.microsoft.com/office/drawing/2014/main" id="{47E9F352-4076-4143-95DB-1F2188DF99A0}"/>
+              </a:ext>
+            </a:extLst>
+          </p:cNvPr>
+          <p:cNvSpPr txBox="1"/>
+          <p:nvPr/>
+        </p:nvSpPr>
+        <p:spPr>
+          <a:xfrm>
+            <a:off x="1562172" y="806981"/>
+            <a:ext cx="771071" cy="307777"/>
+          </a:xfrm>
+          <a:prstGeom prst="rect">
+            <a:avLst/>
+          </a:prstGeom>
+          <a:noFill/>
+        </p:spPr>
+        <p:txBody>
+          <a:bodyPr rot="0" spcFirstLastPara="0" vertOverflow="overflow" horzOverflow="overflow" vert="horz" wrap="square" lIns="91440" tIns="45720" rIns="91440" bIns="45720" numCol="1" spcCol="0" rtlCol="0" fromWordArt="0" anchor="t" anchorCtr="0" forceAA="0" compatLnSpc="1">
+            <a:prstTxWarp prst="textNoShape">
+              <a:avLst/>
+            </a:prstTxWarp>
+            <a:spAutoFit/>
+          </a:bodyPr>
+          <a:lstStyle/>
+          <a:p>
+            <a:pPr algn="ctr"/>
+            <a:r>
+              <a:rPr lang="fr-FR" sz="1400" b="1">
+                <a:latin typeface="Arial"/>
+                <a:cs typeface="Arial"/>
+              </a:rPr>
+              <a:t>2018</a:t>
+            </a:r>
+          </a:p>
+        </p:txBody>
+      </p:sp>
+      <p:sp>
+        <p:nvSpPr>
+          <p:cNvPr id="5" name="ZoneTexte 4">
+            <a:extLst>
+              <a:ext uri="{FF2B5EF4-FFF2-40B4-BE49-F238E27FC236}">
+                <a16:creationId xmlns:a16="http://schemas.microsoft.com/office/drawing/2014/main" id="{2ABBE75C-8AD3-4C71-B550-8C3862EC2047}"/>
+              </a:ext>
+            </a:extLst>
+          </p:cNvPr>
+          <p:cNvSpPr txBox="1"/>
+          <p:nvPr/>
+        </p:nvSpPr>
+        <p:spPr>
+          <a:xfrm>
+            <a:off x="3875066" y="806981"/>
+            <a:ext cx="771071" cy="307777"/>
+          </a:xfrm>
+          <a:prstGeom prst="rect">
+            <a:avLst/>
+          </a:prstGeom>
+          <a:noFill/>
+        </p:spPr>
+        <p:txBody>
+          <a:bodyPr rot="0" spcFirstLastPara="0" vertOverflow="overflow" horzOverflow="overflow" vert="horz" wrap="square" lIns="91440" tIns="45720" rIns="91440" bIns="45720" numCol="1" spcCol="0" rtlCol="0" fromWordArt="0" anchor="t" anchorCtr="0" forceAA="0" compatLnSpc="1">
+            <a:prstTxWarp prst="textNoShape">
+              <a:avLst/>
+            </a:prstTxWarp>
+            <a:spAutoFit/>
+          </a:bodyPr>
+          <a:lstStyle/>
+          <a:p>
+            <a:pPr algn="ctr"/>
+            <a:r>
+              <a:rPr lang="fr-FR" sz="1400" b="1" dirty="0">
+                <a:latin typeface="Arial"/>
+                <a:cs typeface="Arial"/>
+              </a:rPr>
+              <a:t>2019</a:t>
+            </a:r>
+          </a:p>
+        </p:txBody>
+      </p:sp>
+      <p:sp>
+        <p:nvSpPr>
+          <p:cNvPr id="6" name="ZoneTexte 5">
+            <a:extLst>
+              <a:ext uri="{FF2B5EF4-FFF2-40B4-BE49-F238E27FC236}">
+                <a16:creationId xmlns:a16="http://schemas.microsoft.com/office/drawing/2014/main" id="{23C3923F-9A27-40B8-9349-E8A16BFC0D53}"/>
+              </a:ext>
+            </a:extLst>
+          </p:cNvPr>
+          <p:cNvSpPr txBox="1"/>
+          <p:nvPr/>
+        </p:nvSpPr>
+        <p:spPr>
+          <a:xfrm>
+            <a:off x="6187960" y="806980"/>
+            <a:ext cx="771071" cy="307777"/>
+          </a:xfrm>
+          <a:prstGeom prst="rect">
+            <a:avLst/>
+          </a:prstGeom>
+          <a:noFill/>
+        </p:spPr>
+        <p:txBody>
+          <a:bodyPr rot="0" spcFirstLastPara="0" vertOverflow="overflow" horzOverflow="overflow" vert="horz" wrap="square" lIns="91440" tIns="45720" rIns="91440" bIns="45720" numCol="1" spcCol="0" rtlCol="0" fromWordArt="0" anchor="t" anchorCtr="0" forceAA="0" compatLnSpc="1">
+            <a:prstTxWarp prst="textNoShape">
+              <a:avLst/>
+            </a:prstTxWarp>
+            <a:spAutoFit/>
+          </a:bodyPr>
+          <a:lstStyle/>
+          <a:p>
+            <a:pPr algn="ctr"/>
+            <a:r>
+              <a:rPr lang="fr-FR" sz="1400" b="1" dirty="0">
+                <a:latin typeface="Arial"/>
+                <a:cs typeface="Arial"/>
+              </a:rPr>
+              <a:t>2020</a:t>
+            </a:r>
+          </a:p>
+        </p:txBody>
+      </p:sp>
+      <p:sp>
+        <p:nvSpPr>
+          <p:cNvPr id="7" name="ZoneTexte 6">
+            <a:extLst>
+              <a:ext uri="{FF2B5EF4-FFF2-40B4-BE49-F238E27FC236}">
+                <a16:creationId xmlns:a16="http://schemas.microsoft.com/office/drawing/2014/main" id="{670E5D9E-D029-45B7-94F7-7D6A4DD35102}"/>
+              </a:ext>
+            </a:extLst>
+          </p:cNvPr>
+          <p:cNvSpPr txBox="1"/>
+          <p:nvPr/>
+        </p:nvSpPr>
+        <p:spPr>
+          <a:xfrm>
+            <a:off x="8500854" y="806981"/>
+            <a:ext cx="771071" cy="307777"/>
+          </a:xfrm>
+          <a:prstGeom prst="rect">
+            <a:avLst/>
+          </a:prstGeom>
+          <a:noFill/>
+        </p:spPr>
+        <p:txBody>
+          <a:bodyPr rot="0" spcFirstLastPara="0" vertOverflow="overflow" horzOverflow="overflow" vert="horz" wrap="square" lIns="91440" tIns="45720" rIns="91440" bIns="45720" numCol="1" spcCol="0" rtlCol="0" fromWordArt="0" anchor="t" anchorCtr="0" forceAA="0" compatLnSpc="1">
+            <a:prstTxWarp prst="textNoShape">
+              <a:avLst/>
+            </a:prstTxWarp>
+            <a:spAutoFit/>
+          </a:bodyPr>
+          <a:lstStyle/>
+          <a:p>
+            <a:pPr algn="ctr"/>
+            <a:r>
+              <a:rPr lang="fr-FR" sz="1400" b="1">
+                <a:latin typeface="Arial"/>
+                <a:cs typeface="Arial"/>
+              </a:rPr>
+              <a:t>2021</a:t>
+            </a:r>
+          </a:p>
+        </p:txBody>
+      </p:sp>
+      <p:sp>
+        <p:nvSpPr>
+          <p:cNvPr id="8" name="ZoneTexte 7">
+            <a:extLst>
+              <a:ext uri="{FF2B5EF4-FFF2-40B4-BE49-F238E27FC236}">
+                <a16:creationId xmlns:a16="http://schemas.microsoft.com/office/drawing/2014/main" id="{31B36454-BE65-449E-9771-74F20B39687E}"/>
+              </a:ext>
+            </a:extLst>
+          </p:cNvPr>
+          <p:cNvSpPr txBox="1"/>
+          <p:nvPr/>
+        </p:nvSpPr>
+        <p:spPr>
+          <a:xfrm>
+            <a:off x="10813748" y="800570"/>
+            <a:ext cx="771071" cy="307777"/>
+          </a:xfrm>
+          <a:prstGeom prst="rect">
+            <a:avLst/>
+          </a:prstGeom>
+          <a:noFill/>
+        </p:spPr>
+        <p:txBody>
+          <a:bodyPr rot="0" spcFirstLastPara="0" vertOverflow="overflow" horzOverflow="overflow" vert="horz" wrap="square" lIns="91440" tIns="45720" rIns="91440" bIns="45720" numCol="1" spcCol="0" rtlCol="0" fromWordArt="0" anchor="t" anchorCtr="0" forceAA="0" compatLnSpc="1">
+            <a:prstTxWarp prst="textNoShape">
+              <a:avLst/>
+            </a:prstTxWarp>
+            <a:spAutoFit/>
+          </a:bodyPr>
+          <a:lstStyle/>
+          <a:p>
+            <a:pPr algn="ctr"/>
+            <a:r>
+              <a:rPr lang="fr-FR" sz="1400" b="1">
+                <a:latin typeface="Arial"/>
+                <a:cs typeface="Arial"/>
+              </a:rPr>
+              <a:t>2022</a:t>
+            </a:r>
+          </a:p>
+        </p:txBody>
+      </p:sp>
+      <p:graphicFrame>
+        <p:nvGraphicFramePr>
+          <p:cNvPr id="9" name="Tableau 3">
+            <a:extLst>
+              <a:ext uri="{FF2B5EF4-FFF2-40B4-BE49-F238E27FC236}">
+                <a16:creationId xmlns:a16="http://schemas.microsoft.com/office/drawing/2014/main" id="{FF59BE82-FC62-4B99-B1EB-0FD62DE864A6}"/>
+              </a:ext>
+            </a:extLst>
+          </p:cNvPr>
+          <p:cNvGraphicFramePr>
+            <a:graphicFrameLocks noGrp="1"/>
+          </p:cNvGraphicFramePr>
+          <p:nvPr>
+            <p:extLst>
+              <p:ext uri="{D42A27DB-BD31-4B8C-83A1-F6EECF244321}">
+                <p14:modId xmlns:p14="http://schemas.microsoft.com/office/powerpoint/2010/main" val="68088268"/>
+              </p:ext>
+            </p:extLst>
+          </p:nvPr>
+        </p:nvGraphicFramePr>
+        <p:xfrm>
+          <a:off x="-3912" y="3497365"/>
+          <a:ext cx="12200804" cy="370840"/>
+        </p:xfrm>
+        <a:graphic>
+          <a:graphicData uri="http://schemas.openxmlformats.org/drawingml/2006/table">
+            <a:tbl>
+              <a:tblPr firstRow="1" bandRow="1">
+                <a:tableStyleId>{5C22544A-7EE6-4342-B048-85BDC9FD1C3A}</a:tableStyleId>
+              </a:tblPr>
+              <a:tblGrid>
+                <a:gridCol w="676062">
+                  <a:extLst>
+                    <a:ext uri="{9D8B030D-6E8A-4147-A177-3AD203B41FA5}">
+                      <a16:colId xmlns:a16="http://schemas.microsoft.com/office/drawing/2014/main" val="1703629566"/>
+                    </a:ext>
+                  </a:extLst>
+                </a:gridCol>
+                <a:gridCol w="2478863">
+                  <a:extLst>
+                    <a:ext uri="{9D8B030D-6E8A-4147-A177-3AD203B41FA5}">
+                      <a16:colId xmlns:a16="http://schemas.microsoft.com/office/drawing/2014/main" val="791467007"/>
+                    </a:ext>
+                  </a:extLst>
+                </a:gridCol>
+                <a:gridCol w="2308723">
+                  <a:extLst>
+                    <a:ext uri="{9D8B030D-6E8A-4147-A177-3AD203B41FA5}">
+                      <a16:colId xmlns:a16="http://schemas.microsoft.com/office/drawing/2014/main" val="943490280"/>
+                    </a:ext>
+                  </a:extLst>
+                </a:gridCol>
+                <a:gridCol w="2204364">
+                  <a:extLst>
+                    <a:ext uri="{9D8B030D-6E8A-4147-A177-3AD203B41FA5}">
+                      <a16:colId xmlns:a16="http://schemas.microsoft.com/office/drawing/2014/main" val="369987366"/>
+                    </a:ext>
+                  </a:extLst>
+                </a:gridCol>
+                <a:gridCol w="2265259">
+                  <a:extLst>
+                    <a:ext uri="{9D8B030D-6E8A-4147-A177-3AD203B41FA5}">
+                      <a16:colId xmlns:a16="http://schemas.microsoft.com/office/drawing/2014/main" val="3615940755"/>
+                    </a:ext>
+                  </a:extLst>
+                </a:gridCol>
+                <a:gridCol w="2267533">
+                  <a:extLst>
+                    <a:ext uri="{9D8B030D-6E8A-4147-A177-3AD203B41FA5}">
+                      <a16:colId xmlns:a16="http://schemas.microsoft.com/office/drawing/2014/main" val="704438616"/>
+                    </a:ext>
+                  </a:extLst>
+                </a:gridCol>
+              </a:tblGrid>
+              <a:tr h="370840">
+                <a:tc>
+                  <a:txBody>
+                    <a:bodyPr/>
+                    <a:lstStyle/>
+                    <a:p>
+                      <a:pPr algn="ctr"/>
+                      <a:endParaRPr lang="fr-FR" sz="1400" b="0" dirty="0">
+                        <a:solidFill>
+                          <a:sysClr val="windowText" lastClr="000000"/>
+                        </a:solidFill>
+                        <a:latin typeface="Arial" panose="020B0604020202020204" pitchFamily="34" charset="0"/>
+                        <a:cs typeface="Arial" panose="020B0604020202020204" pitchFamily="34" charset="0"/>
+                      </a:endParaRPr>
+                    </a:p>
+                  </a:txBody>
+                  <a:tcPr>
+                    <a:lnL w="12700" cap="flat" cmpd="sng" algn="ctr">
+                      <a:noFill/>
+                      <a:prstDash val="solid"/>
+                      <a:round/>
+                      <a:headEnd type="none" w="med" len="med"/>
+                      <a:tailEnd type="none" w="med" len="med"/>
+                    </a:lnL>
+                    <a:lnR w="12700" cap="flat" cmpd="sng" algn="ctr">
+                      <a:noFill/>
+                      <a:prstDash val="solid"/>
+                      <a:round/>
+                      <a:headEnd type="none" w="med" len="med"/>
+                      <a:tailEnd type="none" w="med" len="med"/>
+                    </a:lnR>
+                    <a:lnT w="12700" cap="flat" cmpd="sng" algn="ctr">
+                      <a:noFill/>
+                      <a:prstDash val="solid"/>
+                      <a:round/>
+                      <a:headEnd type="none" w="med" len="med"/>
+                      <a:tailEnd type="none" w="med" len="med"/>
+                    </a:lnT>
+                    <a:lnB w="12700" cap="flat" cmpd="sng" algn="ctr">
+                      <a:noFill/>
+                      <a:prstDash val="solid"/>
+                      <a:round/>
+                      <a:headEnd type="none" w="med" len="med"/>
+                      <a:tailEnd type="none" w="med" len="med"/>
+                    </a:lnB>
+                    <a:lnTlToBr w="12700" cmpd="sng">
+                      <a:noFill/>
+                      <a:prstDash val="solid"/>
+                    </a:lnTlToBr>
+                    <a:lnBlToTr w="12700" cmpd="sng">
+                      <a:noFill/>
+                      <a:prstDash val="solid"/>
+                    </a:lnBlToTr>
+                    <a:noFill/>
+                  </a:tcPr>
+                </a:tc>
+                <a:tc>
+                  <a:txBody>
+                    <a:bodyPr/>
+                    <a:lstStyle/>
+                    <a:p>
+                      <a:pPr marL="0" marR="0" lvl="0" indent="0" algn="ctr" defTabSz="914400" rtl="0" eaLnBrk="1" fontAlgn="auto" latinLnBrk="0" hangingPunct="1">
+                        <a:lnSpc>
+                          <a:spcPct val="100000"/>
+                        </a:lnSpc>
+                        <a:spcBef>
+                          <a:spcPts val="0"/>
+                        </a:spcBef>
+                        <a:spcAft>
+                          <a:spcPts val="0"/>
+                        </a:spcAft>
+                        <a:buClrTx/>
+                        <a:buSzTx/>
+                        <a:buFontTx/>
+                        <a:buNone/>
+                        <a:tabLst/>
+                        <a:defRPr/>
+                      </a:pPr>
+                      <a:r>
+                        <a:rPr lang="fr-FR" sz="1400" b="0" dirty="0">
+                          <a:solidFill>
+                            <a:sysClr val="windowText" lastClr="000000"/>
+                          </a:solidFill>
+                          <a:effectLst/>
+                          <a:latin typeface="Arial" panose="020B0604020202020204" pitchFamily="34" charset="0"/>
+                          <a:cs typeface="Arial" panose="020B0604020202020204" pitchFamily="34" charset="0"/>
+                        </a:rPr>
+                        <a:t>0.424 [0.407; 0.440]</a:t>
+                      </a:r>
+                    </a:p>
+                  </a:txBody>
+                  <a:tcPr>
+                    <a:lnL w="12700" cap="flat" cmpd="sng" algn="ctr">
+                      <a:noFill/>
+                      <a:prstDash val="solid"/>
+                      <a:round/>
+                      <a:headEnd type="none" w="med" len="med"/>
+                      <a:tailEnd type="none" w="med" len="med"/>
+                    </a:lnL>
+                    <a:lnR w="12700" cap="flat" cmpd="sng" algn="ctr">
+                      <a:noFill/>
+                      <a:prstDash val="solid"/>
+                      <a:round/>
+                      <a:headEnd type="none" w="med" len="med"/>
+                      <a:tailEnd type="none" w="med" len="med"/>
+                    </a:lnR>
+                    <a:lnT w="12700" cap="flat" cmpd="sng" algn="ctr">
+                      <a:noFill/>
+                      <a:prstDash val="solid"/>
+                      <a:round/>
+                      <a:headEnd type="none" w="med" len="med"/>
+                      <a:tailEnd type="none" w="med" len="med"/>
+                    </a:lnT>
+                    <a:lnB w="12700" cap="flat" cmpd="sng" algn="ctr">
+                      <a:noFill/>
+                      <a:prstDash val="solid"/>
+                      <a:round/>
+                      <a:headEnd type="none" w="med" len="med"/>
+                      <a:tailEnd type="none" w="med" len="med"/>
+                    </a:lnB>
+                    <a:lnTlToBr w="12700" cmpd="sng">
+                      <a:noFill/>
+                      <a:prstDash val="solid"/>
+                    </a:lnTlToBr>
+                    <a:lnBlToTr w="12700" cmpd="sng">
+                      <a:noFill/>
+                      <a:prstDash val="solid"/>
+                    </a:lnBlToTr>
+                    <a:noFill/>
+                  </a:tcPr>
+                </a:tc>
+                <a:tc>
+                  <a:txBody>
+                    <a:bodyPr/>
+                    <a:lstStyle/>
+                    <a:p>
+                      <a:pPr marL="0" marR="0" lvl="0" indent="0" algn="ctr" defTabSz="914400" rtl="0" eaLnBrk="1" fontAlgn="auto" latinLnBrk="0" hangingPunct="1">
+                        <a:lnSpc>
+                          <a:spcPct val="100000"/>
+                        </a:lnSpc>
+                        <a:spcBef>
+                          <a:spcPts val="0"/>
+                        </a:spcBef>
+                        <a:spcAft>
+                          <a:spcPts val="0"/>
+                        </a:spcAft>
+                        <a:buClrTx/>
+                        <a:buSzTx/>
+                        <a:buFontTx/>
+                        <a:buNone/>
+                        <a:tabLst/>
+                        <a:defRPr/>
+                      </a:pPr>
+                      <a:r>
+                        <a:rPr lang="fr-FR" sz="1400" b="0" dirty="0">
+                          <a:solidFill>
+                            <a:sysClr val="windowText" lastClr="000000"/>
+                          </a:solidFill>
+                          <a:effectLst/>
+                          <a:latin typeface="Arial" panose="020B0604020202020204" pitchFamily="34" charset="0"/>
+                          <a:cs typeface="Arial" panose="020B0604020202020204" pitchFamily="34" charset="0"/>
+                        </a:rPr>
+                        <a:t>0.489 [0.467; 0.511]</a:t>
+                      </a:r>
+                    </a:p>
+                  </a:txBody>
+                  <a:tcPr>
+                    <a:lnL w="12700" cap="flat" cmpd="sng" algn="ctr">
+                      <a:noFill/>
+                      <a:prstDash val="solid"/>
+                      <a:round/>
+                      <a:headEnd type="none" w="med" len="med"/>
+                      <a:tailEnd type="none" w="med" len="med"/>
+                    </a:lnL>
+                    <a:lnR w="12700" cap="flat" cmpd="sng" algn="ctr">
+                      <a:noFill/>
+                      <a:prstDash val="solid"/>
+                      <a:round/>
+                      <a:headEnd type="none" w="med" len="med"/>
+                      <a:tailEnd type="none" w="med" len="med"/>
+                    </a:lnR>
+                    <a:lnT w="12700" cap="flat" cmpd="sng" algn="ctr">
+                      <a:noFill/>
+                      <a:prstDash val="solid"/>
+                      <a:round/>
+                      <a:headEnd type="none" w="med" len="med"/>
+                      <a:tailEnd type="none" w="med" len="med"/>
+                    </a:lnT>
+                    <a:lnB w="12700" cap="flat" cmpd="sng" algn="ctr">
+                      <a:noFill/>
+                      <a:prstDash val="solid"/>
+                      <a:round/>
+                      <a:headEnd type="none" w="med" len="med"/>
+                      <a:tailEnd type="none" w="med" len="med"/>
+                    </a:lnB>
+                    <a:lnTlToBr w="12700" cmpd="sng">
+                      <a:noFill/>
+                      <a:prstDash val="solid"/>
+                    </a:lnTlToBr>
+                    <a:lnBlToTr w="12700" cmpd="sng">
+                      <a:noFill/>
+                      <a:prstDash val="solid"/>
+                    </a:lnBlToTr>
+                    <a:noFill/>
+                  </a:tcPr>
+                </a:tc>
+                <a:tc>
+                  <a:txBody>
+                    <a:bodyPr/>
+                    <a:lstStyle/>
+                    <a:p>
+                      <a:pPr marL="0" marR="0" lvl="0" indent="0" algn="ctr" defTabSz="914400" rtl="0" eaLnBrk="1" fontAlgn="auto" latinLnBrk="0" hangingPunct="1">
+                        <a:lnSpc>
+                          <a:spcPct val="100000"/>
+                        </a:lnSpc>
+                        <a:spcBef>
+                          <a:spcPts val="0"/>
+                        </a:spcBef>
+                        <a:spcAft>
+                          <a:spcPts val="0"/>
+                        </a:spcAft>
+                        <a:buClrTx/>
+                        <a:buSzTx/>
+                        <a:buFontTx/>
+                        <a:buNone/>
+                        <a:tabLst/>
+                        <a:defRPr/>
+                      </a:pPr>
+                      <a:r>
+                        <a:rPr lang="fr-FR" sz="1400" b="0" dirty="0">
+                          <a:solidFill>
+                            <a:sysClr val="windowText" lastClr="000000"/>
+                          </a:solidFill>
+                          <a:effectLst/>
+                          <a:latin typeface="Arial" panose="020B0604020202020204" pitchFamily="34" charset="0"/>
+                          <a:cs typeface="Arial" panose="020B0604020202020204" pitchFamily="34" charset="0"/>
+                        </a:rPr>
+                        <a:t>0.501 [0,481; 0.520]</a:t>
+                      </a:r>
+                    </a:p>
+                  </a:txBody>
+                  <a:tcPr>
+                    <a:lnL w="12700" cap="flat" cmpd="sng" algn="ctr">
+                      <a:noFill/>
+                      <a:prstDash val="solid"/>
+                      <a:round/>
+                      <a:headEnd type="none" w="med" len="med"/>
+                      <a:tailEnd type="none" w="med" len="med"/>
+                    </a:lnL>
+                    <a:lnR w="12700" cap="flat" cmpd="sng" algn="ctr">
+                      <a:noFill/>
+                      <a:prstDash val="solid"/>
+                      <a:round/>
+                      <a:headEnd type="none" w="med" len="med"/>
+                      <a:tailEnd type="none" w="med" len="med"/>
+                    </a:lnR>
+                    <a:lnT w="12700" cap="flat" cmpd="sng" algn="ctr">
+                      <a:noFill/>
+                      <a:prstDash val="solid"/>
+                      <a:round/>
+                      <a:headEnd type="none" w="med" len="med"/>
+                      <a:tailEnd type="none" w="med" len="med"/>
+                    </a:lnT>
+                    <a:lnB w="12700" cap="flat" cmpd="sng" algn="ctr">
+                      <a:noFill/>
+                      <a:prstDash val="solid"/>
+                      <a:round/>
+                      <a:headEnd type="none" w="med" len="med"/>
+                      <a:tailEnd type="none" w="med" len="med"/>
+                    </a:lnB>
+                    <a:lnTlToBr w="12700" cmpd="sng">
+                      <a:noFill/>
+                      <a:prstDash val="solid"/>
+                    </a:lnTlToBr>
+                    <a:lnBlToTr w="12700" cmpd="sng">
+                      <a:noFill/>
+                      <a:prstDash val="solid"/>
+                    </a:lnBlToTr>
+                    <a:noFill/>
+                  </a:tcPr>
+                </a:tc>
+                <a:tc>
+                  <a:txBody>
+                    <a:bodyPr/>
+                    <a:lstStyle/>
+                    <a:p>
+                      <a:pPr marL="0" marR="0" lvl="0" indent="0" algn="ctr" defTabSz="914400" rtl="0" eaLnBrk="1" fontAlgn="auto" latinLnBrk="0" hangingPunct="1">
+                        <a:lnSpc>
+                          <a:spcPct val="100000"/>
+                        </a:lnSpc>
+                        <a:spcBef>
+                          <a:spcPts val="0"/>
+                        </a:spcBef>
+                        <a:spcAft>
+                          <a:spcPts val="0"/>
+                        </a:spcAft>
+                        <a:buClrTx/>
+                        <a:buSzTx/>
+                        <a:buFontTx/>
+                        <a:buNone/>
+                        <a:tabLst/>
+                        <a:defRPr/>
+                      </a:pPr>
+                      <a:r>
+                        <a:rPr lang="fr-FR" sz="1400" b="0" dirty="0">
+                          <a:solidFill>
+                            <a:sysClr val="windowText" lastClr="000000"/>
+                          </a:solidFill>
+                          <a:effectLst/>
+                          <a:latin typeface="Arial" panose="020B0604020202020204" pitchFamily="34" charset="0"/>
+                          <a:cs typeface="Arial" panose="020B0604020202020204" pitchFamily="34" charset="0"/>
+                        </a:rPr>
+                        <a:t>0.496 [0.475; 0.527]</a:t>
+                      </a:r>
+                    </a:p>
+                  </a:txBody>
+                  <a:tcPr>
+                    <a:lnL w="12700" cap="flat" cmpd="sng" algn="ctr">
+                      <a:noFill/>
+                      <a:prstDash val="solid"/>
+                      <a:round/>
+                      <a:headEnd type="none" w="med" len="med"/>
+                      <a:tailEnd type="none" w="med" len="med"/>
+                    </a:lnL>
+                    <a:lnR w="12700" cap="flat" cmpd="sng" algn="ctr">
+                      <a:noFill/>
+                      <a:prstDash val="solid"/>
+                      <a:round/>
+                      <a:headEnd type="none" w="med" len="med"/>
+                      <a:tailEnd type="none" w="med" len="med"/>
+                    </a:lnR>
+                    <a:lnT w="12700" cap="flat" cmpd="sng" algn="ctr">
+                      <a:noFill/>
+                      <a:prstDash val="solid"/>
+                      <a:round/>
+                      <a:headEnd type="none" w="med" len="med"/>
+                      <a:tailEnd type="none" w="med" len="med"/>
+                    </a:lnT>
+                    <a:lnB w="12700" cap="flat" cmpd="sng" algn="ctr">
+                      <a:noFill/>
+                      <a:prstDash val="solid"/>
+                      <a:round/>
+                      <a:headEnd type="none" w="med" len="med"/>
+                      <a:tailEnd type="none" w="med" len="med"/>
+                    </a:lnB>
+                    <a:lnTlToBr w="12700" cmpd="sng">
+                      <a:noFill/>
+                      <a:prstDash val="solid"/>
+                    </a:lnTlToBr>
+                    <a:lnBlToTr w="12700" cmpd="sng">
+                      <a:noFill/>
+                      <a:prstDash val="solid"/>
+                    </a:lnBlToTr>
+                    <a:noFill/>
+                  </a:tcPr>
+                </a:tc>
+                <a:tc>
+                  <a:txBody>
+                    <a:bodyPr/>
+                    <a:lstStyle/>
+                    <a:p>
+                      <a:pPr marL="0" marR="0" lvl="0" indent="0" algn="ctr" defTabSz="914400" rtl="0" eaLnBrk="1" fontAlgn="auto" latinLnBrk="0" hangingPunct="1">
+                        <a:lnSpc>
+                          <a:spcPct val="100000"/>
+                        </a:lnSpc>
+                        <a:spcBef>
+                          <a:spcPts val="0"/>
+                        </a:spcBef>
+                        <a:spcAft>
+                          <a:spcPts val="0"/>
+                        </a:spcAft>
+                        <a:buClrTx/>
+                        <a:buSzTx/>
+                        <a:buFontTx/>
+                        <a:buNone/>
+                        <a:tabLst/>
+                        <a:defRPr/>
+                      </a:pPr>
+                      <a:r>
+                        <a:rPr lang="fr-FR" sz="1400" b="0" i="0" u="none" strike="noStrike" noProof="0" dirty="0">
+                          <a:solidFill>
+                            <a:sysClr val="windowText" lastClr="000000"/>
+                          </a:solidFill>
+                          <a:effectLst/>
+                          <a:latin typeface="Arial" panose="020B0604020202020204" pitchFamily="34" charset="0"/>
+                          <a:cs typeface="Arial" panose="020B0604020202020204" pitchFamily="34" charset="0"/>
+                        </a:rPr>
+                        <a:t>0.498 [0.476; 0.519]</a:t>
+                      </a:r>
+                      <a:endParaRPr lang="fr-FR" sz="1400" b="0" dirty="0">
+                        <a:solidFill>
+                          <a:sysClr val="windowText" lastClr="000000"/>
+                        </a:solidFill>
+                        <a:latin typeface="Arial" panose="020B0604020202020204" pitchFamily="34" charset="0"/>
+                        <a:cs typeface="Arial" panose="020B0604020202020204" pitchFamily="34" charset="0"/>
+                      </a:endParaRPr>
+                    </a:p>
+                  </a:txBody>
+                  <a:tcPr>
+                    <a:lnL w="12700" cap="flat" cmpd="sng" algn="ctr">
+                      <a:noFill/>
+                      <a:prstDash val="solid"/>
+                      <a:round/>
+                      <a:headEnd type="none" w="med" len="med"/>
+                      <a:tailEnd type="none" w="med" len="med"/>
+                    </a:lnL>
+                    <a:lnR w="12700" cap="flat" cmpd="sng" algn="ctr">
+                      <a:noFill/>
+                      <a:prstDash val="solid"/>
+                      <a:round/>
+                      <a:headEnd type="none" w="med" len="med"/>
+                      <a:tailEnd type="none" w="med" len="med"/>
+                    </a:lnR>
+                    <a:lnT w="12700" cap="flat" cmpd="sng" algn="ctr">
+                      <a:noFill/>
+                      <a:prstDash val="solid"/>
+                      <a:round/>
+                      <a:headEnd type="none" w="med" len="med"/>
+                      <a:tailEnd type="none" w="med" len="med"/>
+                    </a:lnT>
+                    <a:lnB w="12700" cap="flat" cmpd="sng" algn="ctr">
+                      <a:noFill/>
+                      <a:prstDash val="solid"/>
+                      <a:round/>
+                      <a:headEnd type="none" w="med" len="med"/>
+                      <a:tailEnd type="none" w="med" len="med"/>
+                    </a:lnB>
+                    <a:lnTlToBr w="12700" cmpd="sng">
+                      <a:noFill/>
+                      <a:prstDash val="solid"/>
+                    </a:lnTlToBr>
+                    <a:lnBlToTr w="12700" cmpd="sng">
+                      <a:noFill/>
+                      <a:prstDash val="solid"/>
+                    </a:lnBlToTr>
+                    <a:noFill/>
+                  </a:tcPr>
+                </a:tc>
+                <a:extLst>
+                  <a:ext uri="{0D108BD9-81ED-4DB2-BD59-A6C34878D82A}">
+                    <a16:rowId xmlns:a16="http://schemas.microsoft.com/office/drawing/2014/main" val="3726648593"/>
+                  </a:ext>
+                </a:extLst>
+              </a:tr>
+            </a:tbl>
+          </a:graphicData>
+        </a:graphic>
+      </p:graphicFrame>
+      <p:sp>
+        <p:nvSpPr>
+          <p:cNvPr id="11" name="ZoneTexte 10">
+            <a:extLst>
+              <a:ext uri="{FF2B5EF4-FFF2-40B4-BE49-F238E27FC236}">
+                <a16:creationId xmlns:a16="http://schemas.microsoft.com/office/drawing/2014/main" id="{865EDC92-07DC-4AE9-9D60-BAC1618FC8FD}"/>
+              </a:ext>
+            </a:extLst>
+          </p:cNvPr>
+          <p:cNvSpPr txBox="1"/>
+          <p:nvPr/>
+        </p:nvSpPr>
+        <p:spPr>
+          <a:xfrm>
+            <a:off x="-12700" y="3526224"/>
+            <a:ext cx="876300" cy="307777"/>
+          </a:xfrm>
+          <a:prstGeom prst="rect">
+            <a:avLst/>
+          </a:prstGeom>
+          <a:noFill/>
+        </p:spPr>
+        <p:txBody>
+          <a:bodyPr rot="0" spcFirstLastPara="0" vertOverflow="overflow" horzOverflow="overflow" vert="horz" wrap="square" lIns="91440" tIns="45720" rIns="91440" bIns="45720" numCol="1" spcCol="0" rtlCol="0" fromWordArt="0" anchor="t" anchorCtr="0" forceAA="0" compatLnSpc="1">
+            <a:prstTxWarp prst="textNoShape">
+              <a:avLst/>
+            </a:prstTxWarp>
+            <a:spAutoFit/>
+          </a:bodyPr>
+          <a:lstStyle/>
+          <a:p>
+            <a:r>
+              <a:rPr lang="fr-FR" sz="1400" dirty="0">
+                <a:latin typeface="Arial"/>
+                <a:cs typeface="Arial"/>
+              </a:rPr>
+              <a:t>Density</a:t>
+            </a:r>
+            <a:endParaRPr lang="fr-FR" sz="1400" dirty="0"/>
+          </a:p>
+        </p:txBody>
+      </p:sp>
+      <p:grpSp>
+        <p:nvGrpSpPr>
+          <p:cNvPr id="23" name="Groupe 22">
+            <a:extLst>
+              <a:ext uri="{FF2B5EF4-FFF2-40B4-BE49-F238E27FC236}">
+                <a16:creationId xmlns:a16="http://schemas.microsoft.com/office/drawing/2014/main" id="{8A43D8A6-125C-47C8-B3A3-BD41507D2EFC}"/>
+              </a:ext>
+            </a:extLst>
+          </p:cNvPr>
+          <p:cNvGrpSpPr/>
+          <p:nvPr/>
+        </p:nvGrpSpPr>
+        <p:grpSpPr>
+          <a:xfrm>
+            <a:off x="-12700" y="4072631"/>
+            <a:ext cx="13080507" cy="3267895"/>
+            <a:chOff x="-11761" y="7029150"/>
+            <a:chExt cx="14496366" cy="3853226"/>
+          </a:xfrm>
+        </p:grpSpPr>
+        <p:pic>
+          <p:nvPicPr>
+            <p:cNvPr id="24" name="Image 23">
+              <a:extLst>
+                <a:ext uri="{FF2B5EF4-FFF2-40B4-BE49-F238E27FC236}">
+                  <a16:creationId xmlns:a16="http://schemas.microsoft.com/office/drawing/2014/main" id="{3B31CB76-F02E-45B0-9E2F-B237482EB356}"/>
+                </a:ext>
+              </a:extLst>
+            </p:cNvPr>
+            <p:cNvPicPr>
+              <a:picLocks noChangeAspect="1"/>
+            </p:cNvPicPr>
+            <p:nvPr/>
+          </p:nvPicPr>
+          <p:blipFill rotWithShape="1">
+            <a:blip r:embed="rId2" cstate="print">
+              <a:extLst>
+                <a:ext uri="{28A0092B-C50C-407E-A947-70E740481C1C}">
+                  <a14:useLocalDpi xmlns:a14="http://schemas.microsoft.com/office/drawing/2010/main" val="0"/>
+                </a:ext>
+              </a:extLst>
+            </a:blip>
+            <a:srcRect l="19698" t="44126" r="17367" b="45674"/>
+            <a:stretch/>
+          </p:blipFill>
+          <p:spPr>
+            <a:xfrm>
+              <a:off x="7110605" y="9267786"/>
+              <a:ext cx="6822810" cy="781737"/>
+            </a:xfrm>
+            <a:prstGeom prst="rect">
+              <a:avLst/>
+            </a:prstGeom>
+          </p:spPr>
+        </p:pic>
+        <p:pic>
+          <p:nvPicPr>
+            <p:cNvPr id="25" name="Image 24">
+              <a:extLst>
+                <a:ext uri="{FF2B5EF4-FFF2-40B4-BE49-F238E27FC236}">
+                  <a16:creationId xmlns:a16="http://schemas.microsoft.com/office/drawing/2014/main" id="{837EC0E0-1221-49D0-8BB7-C30FE16F9FD7}"/>
+                </a:ext>
+              </a:extLst>
+            </p:cNvPr>
+            <p:cNvPicPr>
+              <a:picLocks noChangeAspect="1"/>
+            </p:cNvPicPr>
+            <p:nvPr/>
+          </p:nvPicPr>
+          <p:blipFill rotWithShape="1">
+            <a:blip r:embed="rId3" cstate="print">
+              <a:extLst>
+                <a:ext uri="{28A0092B-C50C-407E-A947-70E740481C1C}">
+                  <a14:useLocalDpi xmlns:a14="http://schemas.microsoft.com/office/drawing/2010/main" val="0"/>
+                </a:ext>
+              </a:extLst>
+            </a:blip>
+            <a:srcRect l="19698" t="44126" r="17368" b="45674"/>
+            <a:stretch/>
+          </p:blipFill>
+          <p:spPr>
+            <a:xfrm>
+              <a:off x="-11761" y="10100639"/>
+              <a:ext cx="6822809" cy="781737"/>
+            </a:xfrm>
+            <a:prstGeom prst="rect">
+              <a:avLst/>
+            </a:prstGeom>
+          </p:spPr>
+        </p:pic>
+        <p:pic>
+          <p:nvPicPr>
+            <p:cNvPr id="26" name="Image 25">
+              <a:extLst>
+                <a:ext uri="{FF2B5EF4-FFF2-40B4-BE49-F238E27FC236}">
+                  <a16:creationId xmlns:a16="http://schemas.microsoft.com/office/drawing/2014/main" id="{4C3C5BF2-C89A-421E-AC21-2C207247211D}"/>
+                </a:ext>
+              </a:extLst>
+            </p:cNvPr>
+            <p:cNvPicPr>
+              <a:picLocks noChangeAspect="1"/>
+            </p:cNvPicPr>
+            <p:nvPr/>
+          </p:nvPicPr>
+          <p:blipFill rotWithShape="1">
+            <a:blip r:embed="rId4" cstate="print">
+              <a:extLst>
+                <a:ext uri="{28A0092B-C50C-407E-A947-70E740481C1C}">
+                  <a14:useLocalDpi xmlns:a14="http://schemas.microsoft.com/office/drawing/2010/main" val="0"/>
+                </a:ext>
+              </a:extLst>
+            </a:blip>
+            <a:srcRect l="19698" t="44126" r="17367" b="45674"/>
+            <a:stretch/>
+          </p:blipFill>
+          <p:spPr>
+            <a:xfrm>
+              <a:off x="7110607" y="10100639"/>
+              <a:ext cx="6822809" cy="781737"/>
+            </a:xfrm>
+            <a:prstGeom prst="rect">
+              <a:avLst/>
+            </a:prstGeom>
+          </p:spPr>
+        </p:pic>
+        <p:grpSp>
+          <p:nvGrpSpPr>
+            <p:cNvPr id="27" name="Groupe 26">
+              <a:extLst>
+                <a:ext uri="{FF2B5EF4-FFF2-40B4-BE49-F238E27FC236}">
+                  <a16:creationId xmlns:a16="http://schemas.microsoft.com/office/drawing/2014/main" id="{61FB5681-26F9-4473-9021-36ED88145127}"/>
+                </a:ext>
+              </a:extLst>
+            </p:cNvPr>
+            <p:cNvGrpSpPr/>
+            <p:nvPr/>
+          </p:nvGrpSpPr>
+          <p:grpSpPr>
+            <a:xfrm>
+              <a:off x="-11761" y="7029150"/>
+              <a:ext cx="14496366" cy="2115159"/>
+              <a:chOff x="15364749" y="12932770"/>
+              <a:chExt cx="14910965" cy="2175653"/>
+            </a:xfrm>
+          </p:grpSpPr>
+          <p:grpSp>
+            <p:nvGrpSpPr>
+              <p:cNvPr id="34" name="Groupe 33">
+                <a:extLst>
+                  <a:ext uri="{FF2B5EF4-FFF2-40B4-BE49-F238E27FC236}">
+                    <a16:creationId xmlns:a16="http://schemas.microsoft.com/office/drawing/2014/main" id="{25F1A111-5444-4BC6-A6C2-F74276DDA9FD}"/>
+                  </a:ext>
+                </a:extLst>
+              </p:cNvPr>
+              <p:cNvGrpSpPr/>
+              <p:nvPr/>
+            </p:nvGrpSpPr>
+            <p:grpSpPr>
+              <a:xfrm>
+                <a:off x="15364749" y="12932770"/>
+                <a:ext cx="14910965" cy="2175653"/>
+                <a:chOff x="15364749" y="12932770"/>
+                <a:chExt cx="14910965" cy="2175653"/>
+              </a:xfrm>
+            </p:grpSpPr>
+            <p:grpSp>
+              <p:nvGrpSpPr>
+                <p:cNvPr id="36" name="Groupe 35">
+                  <a:extLst>
+                    <a:ext uri="{FF2B5EF4-FFF2-40B4-BE49-F238E27FC236}">
+                      <a16:creationId xmlns:a16="http://schemas.microsoft.com/office/drawing/2014/main" id="{85D2E8EE-7F64-459D-8B70-77543103FAD7}"/>
+                    </a:ext>
+                  </a:extLst>
+                </p:cNvPr>
+                <p:cNvGrpSpPr/>
+                <p:nvPr/>
+              </p:nvGrpSpPr>
+              <p:grpSpPr>
+                <a:xfrm>
+                  <a:off x="15364749" y="12932770"/>
+                  <a:ext cx="14910965" cy="2175653"/>
+                  <a:chOff x="-1" y="2208356"/>
+                  <a:chExt cx="14910965" cy="2175653"/>
+                </a:xfrm>
+              </p:grpSpPr>
+              <p:sp>
+                <p:nvSpPr>
+                  <p:cNvPr id="38" name="Rectangle 37">
+                    <a:extLst>
+                      <a:ext uri="{FF2B5EF4-FFF2-40B4-BE49-F238E27FC236}">
+                        <a16:creationId xmlns:a16="http://schemas.microsoft.com/office/drawing/2014/main" id="{C9EACFF3-55E0-43E0-91F3-8559FCC04FAB}"/>
+                      </a:ext>
+                    </a:extLst>
+                  </p:cNvPr>
+                  <p:cNvSpPr/>
+                  <p:nvPr/>
+                </p:nvSpPr>
+                <p:spPr>
+                  <a:xfrm>
+                    <a:off x="-1" y="2208356"/>
+                    <a:ext cx="14344010" cy="2175653"/>
+                  </a:xfrm>
+                  <a:prstGeom prst="rect">
+                    <a:avLst/>
+                  </a:prstGeom>
+                  <a:noFill/>
+                  <a:ln w="19050">
+                    <a:solidFill>
+                      <a:schemeClr val="tx1"/>
+                    </a:solidFill>
+                  </a:ln>
+                </p:spPr>
+                <p:style>
+                  <a:lnRef idx="2">
+                    <a:schemeClr val="accent1">
+                      <a:shade val="50000"/>
+                    </a:schemeClr>
+                  </a:lnRef>
+                  <a:fillRef idx="1">
+                    <a:schemeClr val="accent1"/>
+                  </a:fillRef>
+                  <a:effectRef idx="0">
+                    <a:schemeClr val="accent1"/>
+                  </a:effectRef>
+                  <a:fontRef idx="minor">
+                    <a:schemeClr val="lt1"/>
+                  </a:fontRef>
+                </p:style>
+                <p:txBody>
+                  <a:bodyPr rtlCol="0" anchor="t"/>
+                  <a:lstStyle/>
+                  <a:p>
+                    <a:endParaRPr lang="fr-FR" sz="389" dirty="0">
+                      <a:solidFill>
+                        <a:sysClr val="windowText" lastClr="000000"/>
+                      </a:solidFill>
+                      <a:latin typeface="Arial" panose="020B0604020202020204" pitchFamily="34" charset="0"/>
+                      <a:cs typeface="Arial" panose="020B0604020202020204" pitchFamily="34" charset="0"/>
+                    </a:endParaRPr>
+                  </a:p>
+                </p:txBody>
+              </p:sp>
+              <p:sp>
+                <p:nvSpPr>
+                  <p:cNvPr id="39" name="Rectangle 38">
+                    <a:extLst>
+                      <a:ext uri="{FF2B5EF4-FFF2-40B4-BE49-F238E27FC236}">
+                        <a16:creationId xmlns:a16="http://schemas.microsoft.com/office/drawing/2014/main" id="{D5C4F028-12E6-439C-B047-C2155590B832}"/>
+                      </a:ext>
+                    </a:extLst>
+                  </p:cNvPr>
+                  <p:cNvSpPr/>
+                  <p:nvPr/>
+                </p:nvSpPr>
+                <p:spPr>
+                  <a:xfrm>
+                    <a:off x="2431818" y="2365729"/>
+                    <a:ext cx="534525" cy="317902"/>
+                  </a:xfrm>
+                  <a:prstGeom prst="rect">
+                    <a:avLst/>
+                  </a:prstGeom>
+                  <a:solidFill>
+                    <a:srgbClr val="DCDCDC"/>
+                  </a:solidFill>
+                  <a:ln>
+                    <a:solidFill>
+                      <a:schemeClr val="tx1"/>
+                    </a:solidFill>
+                  </a:ln>
+                </p:spPr>
+                <p:style>
+                  <a:lnRef idx="2">
+                    <a:schemeClr val="accent1">
+                      <a:shade val="50000"/>
+                    </a:schemeClr>
+                  </a:lnRef>
+                  <a:fillRef idx="1">
+                    <a:schemeClr val="accent1"/>
+                  </a:fillRef>
+                  <a:effectRef idx="0">
+                    <a:schemeClr val="accent1"/>
+                  </a:effectRef>
+                  <a:fontRef idx="minor">
+                    <a:schemeClr val="lt1"/>
+                  </a:fontRef>
+                </p:style>
+                <p:txBody>
+                  <a:bodyPr rtlCol="0" anchor="ctr"/>
+                  <a:lstStyle/>
+                  <a:p>
+                    <a:pPr algn="ctr"/>
+                    <a:endParaRPr lang="fr-FR" sz="1750" dirty="0">
+                      <a:latin typeface="Arial" panose="020B0604020202020204" pitchFamily="34" charset="0"/>
+                      <a:cs typeface="Arial" panose="020B0604020202020204" pitchFamily="34" charset="0"/>
+                    </a:endParaRPr>
+                  </a:p>
+                </p:txBody>
+              </p:sp>
+              <p:sp>
+                <p:nvSpPr>
+                  <p:cNvPr id="40" name="ZoneTexte 39">
+                    <a:extLst>
+                      <a:ext uri="{FF2B5EF4-FFF2-40B4-BE49-F238E27FC236}">
+                        <a16:creationId xmlns:a16="http://schemas.microsoft.com/office/drawing/2014/main" id="{259DD637-6258-4E60-A314-D9B41AEF9E86}"/>
+                      </a:ext>
+                    </a:extLst>
+                  </p:cNvPr>
+                  <p:cNvSpPr txBox="1"/>
+                  <p:nvPr/>
+                </p:nvSpPr>
+                <p:spPr>
+                  <a:xfrm>
+                    <a:off x="2966343" y="2347439"/>
+                    <a:ext cx="1978959" cy="410611"/>
+                  </a:xfrm>
+                  <a:prstGeom prst="rect">
+                    <a:avLst/>
+                  </a:prstGeom>
+                  <a:noFill/>
+                </p:spPr>
+                <p:txBody>
+                  <a:bodyPr wrap="square" rtlCol="0">
+                    <a:spAutoFit/>
+                  </a:bodyPr>
+                  <a:lstStyle/>
+                  <a:p>
+                    <a:r>
+                      <a:rPr lang="fr-FR" sz="1600" dirty="0">
+                        <a:latin typeface="Arial" panose="020B0604020202020204" pitchFamily="34" charset="0"/>
+                        <a:cs typeface="Arial" panose="020B0604020202020204" pitchFamily="34" charset="0"/>
+                      </a:rPr>
+                      <a:t>% Not tested</a:t>
+                    </a:r>
+                  </a:p>
+                </p:txBody>
+              </p:sp>
+              <p:sp>
+                <p:nvSpPr>
+                  <p:cNvPr id="41" name="Rectangle 40">
+                    <a:extLst>
+                      <a:ext uri="{FF2B5EF4-FFF2-40B4-BE49-F238E27FC236}">
+                        <a16:creationId xmlns:a16="http://schemas.microsoft.com/office/drawing/2014/main" id="{ABE2519C-9F42-4FAC-A83E-05C2C6904E0D}"/>
+                      </a:ext>
+                    </a:extLst>
+                  </p:cNvPr>
+                  <p:cNvSpPr/>
+                  <p:nvPr/>
+                </p:nvSpPr>
+                <p:spPr>
+                  <a:xfrm>
+                    <a:off x="6709544" y="2347439"/>
+                    <a:ext cx="534525" cy="317902"/>
+                  </a:xfrm>
+                  <a:prstGeom prst="rect">
+                    <a:avLst/>
+                  </a:prstGeom>
+                  <a:solidFill>
+                    <a:schemeClr val="bg1"/>
+                  </a:solidFill>
+                  <a:ln>
+                    <a:solidFill>
+                      <a:schemeClr val="tx1"/>
+                    </a:solidFill>
+                  </a:ln>
+                </p:spPr>
+                <p:style>
+                  <a:lnRef idx="2">
+                    <a:schemeClr val="accent1">
+                      <a:shade val="50000"/>
+                    </a:schemeClr>
+                  </a:lnRef>
+                  <a:fillRef idx="1">
+                    <a:schemeClr val="accent1"/>
+                  </a:fillRef>
+                  <a:effectRef idx="0">
+                    <a:schemeClr val="accent1"/>
+                  </a:effectRef>
+                  <a:fontRef idx="minor">
+                    <a:schemeClr val="lt1"/>
+                  </a:fontRef>
+                </p:style>
+                <p:txBody>
+                  <a:bodyPr rtlCol="0" anchor="ctr"/>
+                  <a:lstStyle/>
+                  <a:p>
+                    <a:pPr algn="ctr"/>
+                    <a:endParaRPr lang="fr-FR" sz="1750" dirty="0">
+                      <a:latin typeface="Arial" panose="020B0604020202020204" pitchFamily="34" charset="0"/>
+                      <a:cs typeface="Arial" panose="020B0604020202020204" pitchFamily="34" charset="0"/>
+                    </a:endParaRPr>
+                  </a:p>
+                </p:txBody>
+              </p:sp>
+              <p:sp>
+                <p:nvSpPr>
+                  <p:cNvPr id="42" name="ZoneTexte 41">
+                    <a:extLst>
+                      <a:ext uri="{FF2B5EF4-FFF2-40B4-BE49-F238E27FC236}">
+                        <a16:creationId xmlns:a16="http://schemas.microsoft.com/office/drawing/2014/main" id="{AB25891A-AE07-446D-8870-3BCA924745EA}"/>
+                      </a:ext>
+                    </a:extLst>
+                  </p:cNvPr>
+                  <p:cNvSpPr txBox="1"/>
+                  <p:nvPr/>
+                </p:nvSpPr>
+                <p:spPr>
+                  <a:xfrm>
+                    <a:off x="7242395" y="2312982"/>
+                    <a:ext cx="1978959" cy="410611"/>
+                  </a:xfrm>
+                  <a:prstGeom prst="rect">
+                    <a:avLst/>
+                  </a:prstGeom>
+                  <a:noFill/>
+                </p:spPr>
+                <p:txBody>
+                  <a:bodyPr wrap="square" rtlCol="0">
+                    <a:spAutoFit/>
+                  </a:bodyPr>
+                  <a:lstStyle/>
+                  <a:p>
+                    <a:r>
+                      <a:rPr lang="fr-FR" sz="1600" dirty="0">
+                        <a:latin typeface="Arial" panose="020B0604020202020204" pitchFamily="34" charset="0"/>
+                        <a:cs typeface="Arial" panose="020B0604020202020204" pitchFamily="34" charset="0"/>
+                      </a:rPr>
+                      <a:t>% Susceptible</a:t>
+                    </a:r>
+                  </a:p>
+                </p:txBody>
+              </p:sp>
+              <p:sp>
+                <p:nvSpPr>
+                  <p:cNvPr id="43" name="Rectangle 42">
+                    <a:extLst>
+                      <a:ext uri="{FF2B5EF4-FFF2-40B4-BE49-F238E27FC236}">
+                        <a16:creationId xmlns:a16="http://schemas.microsoft.com/office/drawing/2014/main" id="{089D8612-535F-4024-A51D-691F2AD3A499}"/>
+                      </a:ext>
+                    </a:extLst>
+                  </p:cNvPr>
+                  <p:cNvSpPr/>
+                  <p:nvPr/>
+                </p:nvSpPr>
+                <p:spPr>
+                  <a:xfrm>
+                    <a:off x="10992549" y="2364412"/>
+                    <a:ext cx="534525" cy="317902"/>
+                  </a:xfrm>
+                  <a:prstGeom prst="rect">
+                    <a:avLst/>
+                  </a:prstGeom>
+                  <a:gradFill flip="none" rotWithShape="1">
+                    <a:gsLst>
+                      <a:gs pos="0">
+                        <a:srgbClr val="23C997"/>
+                      </a:gs>
+                      <a:gs pos="7000">
+                        <a:srgbClr val="DCB702"/>
+                      </a:gs>
+                      <a:gs pos="82000">
+                        <a:srgbClr val="FF7F40"/>
+                      </a:gs>
+                      <a:gs pos="27000">
+                        <a:srgbClr val="3E7CA5"/>
+                      </a:gs>
+                      <a:gs pos="16000">
+                        <a:srgbClr val="7EC8E3"/>
+                      </a:gs>
+                      <a:gs pos="70000">
+                        <a:srgbClr val="EE637F"/>
+                      </a:gs>
+                      <a:gs pos="59000">
+                        <a:srgbClr val="62C966"/>
+                      </a:gs>
+                      <a:gs pos="47000">
+                        <a:srgbClr val="B155A7"/>
+                      </a:gs>
+                      <a:gs pos="38000">
+                        <a:srgbClr val="D38ACB"/>
+                      </a:gs>
+                      <a:gs pos="93000">
+                        <a:srgbClr val="BCED54"/>
+                      </a:gs>
+                    </a:gsLst>
+                    <a:lin ang="0" scaled="1"/>
+                    <a:tileRect/>
+                  </a:gradFill>
+                  <a:ln>
+                    <a:solidFill>
+                      <a:schemeClr val="tx1"/>
+                    </a:solidFill>
+                  </a:ln>
+                </p:spPr>
+                <p:style>
+                  <a:lnRef idx="2">
+                    <a:schemeClr val="accent1">
+                      <a:shade val="50000"/>
+                    </a:schemeClr>
+                  </a:lnRef>
+                  <a:fillRef idx="1">
+                    <a:schemeClr val="accent1"/>
+                  </a:fillRef>
+                  <a:effectRef idx="0">
+                    <a:schemeClr val="accent1"/>
+                  </a:effectRef>
+                  <a:fontRef idx="minor">
+                    <a:schemeClr val="lt1"/>
+                  </a:fontRef>
+                </p:style>
+                <p:txBody>
+                  <a:bodyPr rtlCol="0" anchor="ctr"/>
+                  <a:lstStyle/>
+                  <a:p>
+                    <a:pPr algn="ctr"/>
+                    <a:endParaRPr lang="fr-FR" sz="972" dirty="0">
+                      <a:solidFill>
+                        <a:schemeClr val="tx1"/>
+                      </a:solidFill>
+                      <a:latin typeface="Arial" panose="020B0604020202020204" pitchFamily="34" charset="0"/>
+                      <a:cs typeface="Arial" panose="020B0604020202020204" pitchFamily="34" charset="0"/>
+                    </a:endParaRPr>
+                  </a:p>
+                </p:txBody>
+              </p:sp>
+              <p:sp>
+                <p:nvSpPr>
+                  <p:cNvPr id="44" name="ZoneTexte 43">
+                    <a:extLst>
+                      <a:ext uri="{FF2B5EF4-FFF2-40B4-BE49-F238E27FC236}">
+                        <a16:creationId xmlns:a16="http://schemas.microsoft.com/office/drawing/2014/main" id="{7C2E8F39-D3F9-4647-A07E-01DA1DD37EEF}"/>
+                      </a:ext>
+                    </a:extLst>
+                  </p:cNvPr>
+                  <p:cNvSpPr txBox="1"/>
+                  <p:nvPr/>
+                </p:nvSpPr>
+                <p:spPr>
+                  <a:xfrm>
+                    <a:off x="11527074" y="2338697"/>
+                    <a:ext cx="1978959" cy="410611"/>
+                  </a:xfrm>
+                  <a:prstGeom prst="rect">
+                    <a:avLst/>
+                  </a:prstGeom>
+                  <a:noFill/>
+                </p:spPr>
+                <p:txBody>
+                  <a:bodyPr wrap="square" rtlCol="0">
+                    <a:spAutoFit/>
+                  </a:bodyPr>
+                  <a:lstStyle/>
+                  <a:p>
+                    <a:r>
+                      <a:rPr lang="fr-FR" sz="1600" dirty="0">
+                        <a:latin typeface="Arial" panose="020B0604020202020204" pitchFamily="34" charset="0"/>
+                        <a:cs typeface="Arial" panose="020B0604020202020204" pitchFamily="34" charset="0"/>
+                      </a:rPr>
+                      <a:t>% Resistant</a:t>
+                    </a:r>
+                  </a:p>
+                </p:txBody>
+              </p:sp>
+              <p:sp>
+                <p:nvSpPr>
+                  <p:cNvPr id="45" name="Ellipse 44">
+                    <a:extLst>
+                      <a:ext uri="{FF2B5EF4-FFF2-40B4-BE49-F238E27FC236}">
+                        <a16:creationId xmlns:a16="http://schemas.microsoft.com/office/drawing/2014/main" id="{F96F1B09-2FDD-455A-94FB-073E52702D7E}"/>
+                      </a:ext>
+                    </a:extLst>
+                  </p:cNvPr>
+                  <p:cNvSpPr/>
+                  <p:nvPr/>
+                </p:nvSpPr>
+                <p:spPr>
+                  <a:xfrm>
+                    <a:off x="78519" y="3361858"/>
+                    <a:ext cx="210820" cy="210821"/>
+                  </a:xfrm>
+                  <a:prstGeom prst="ellipse">
+                    <a:avLst/>
+                  </a:prstGeom>
+                  <a:solidFill>
+                    <a:srgbClr val="23C997"/>
+                  </a:solidFill>
+                  <a:ln>
+                    <a:noFill/>
+                  </a:ln>
+                </p:spPr>
+                <p:style>
+                  <a:lnRef idx="2">
+                    <a:schemeClr val="accent1">
+                      <a:shade val="50000"/>
+                    </a:schemeClr>
+                  </a:lnRef>
+                  <a:fillRef idx="1">
+                    <a:schemeClr val="accent1"/>
+                  </a:fillRef>
+                  <a:effectRef idx="0">
+                    <a:schemeClr val="accent1"/>
+                  </a:effectRef>
+                  <a:fontRef idx="minor">
+                    <a:schemeClr val="lt1"/>
+                  </a:fontRef>
+                </p:style>
+                <p:txBody>
+                  <a:bodyPr rtlCol="0" anchor="ctr"/>
+                  <a:lstStyle/>
+                  <a:p>
+                    <a:pPr algn="ctr"/>
+                    <a:endParaRPr lang="fr-FR" sz="1750" dirty="0">
+                      <a:latin typeface="Arial" panose="020B0604020202020204" pitchFamily="34" charset="0"/>
+                      <a:cs typeface="Arial" panose="020B0604020202020204" pitchFamily="34" charset="0"/>
+                    </a:endParaRPr>
+                  </a:p>
+                </p:txBody>
+              </p:sp>
+              <p:sp>
+                <p:nvSpPr>
+                  <p:cNvPr id="46" name="Ellipse 45">
+                    <a:extLst>
+                      <a:ext uri="{FF2B5EF4-FFF2-40B4-BE49-F238E27FC236}">
+                        <a16:creationId xmlns:a16="http://schemas.microsoft.com/office/drawing/2014/main" id="{B6492858-272F-4D06-9EA7-E51AD05987BF}"/>
+                      </a:ext>
+                    </a:extLst>
+                  </p:cNvPr>
+                  <p:cNvSpPr/>
+                  <p:nvPr/>
+                </p:nvSpPr>
+                <p:spPr>
+                  <a:xfrm>
+                    <a:off x="3332763" y="3351544"/>
+                    <a:ext cx="210820" cy="210820"/>
+                  </a:xfrm>
+                  <a:prstGeom prst="ellipse">
+                    <a:avLst/>
+                  </a:prstGeom>
+                  <a:solidFill>
+                    <a:srgbClr val="3E7CA5"/>
+                  </a:solidFill>
+                  <a:ln>
+                    <a:noFill/>
+                  </a:ln>
+                </p:spPr>
+                <p:style>
+                  <a:lnRef idx="2">
+                    <a:schemeClr val="accent1">
+                      <a:shade val="50000"/>
+                    </a:schemeClr>
+                  </a:lnRef>
+                  <a:fillRef idx="1">
+                    <a:schemeClr val="accent1"/>
+                  </a:fillRef>
+                  <a:effectRef idx="0">
+                    <a:schemeClr val="accent1"/>
+                  </a:effectRef>
+                  <a:fontRef idx="minor">
+                    <a:schemeClr val="lt1"/>
+                  </a:fontRef>
+                </p:style>
+                <p:txBody>
+                  <a:bodyPr rtlCol="0" anchor="ctr"/>
+                  <a:lstStyle/>
+                  <a:p>
+                    <a:pPr algn="ctr"/>
+                    <a:endParaRPr lang="fr-FR" sz="1750" dirty="0">
+                      <a:latin typeface="Arial" panose="020B0604020202020204" pitchFamily="34" charset="0"/>
+                      <a:cs typeface="Arial" panose="020B0604020202020204" pitchFamily="34" charset="0"/>
+                    </a:endParaRPr>
+                  </a:p>
+                </p:txBody>
+              </p:sp>
+              <p:sp>
+                <p:nvSpPr>
+                  <p:cNvPr id="47" name="Ellipse 46">
+                    <a:extLst>
+                      <a:ext uri="{FF2B5EF4-FFF2-40B4-BE49-F238E27FC236}">
+                        <a16:creationId xmlns:a16="http://schemas.microsoft.com/office/drawing/2014/main" id="{906A4748-6487-4EF0-9FC6-7A3EB94C435A}"/>
+                      </a:ext>
+                    </a:extLst>
+                  </p:cNvPr>
+                  <p:cNvSpPr/>
+                  <p:nvPr/>
+                </p:nvSpPr>
+                <p:spPr>
+                  <a:xfrm>
+                    <a:off x="7203237" y="3361858"/>
+                    <a:ext cx="210820" cy="210821"/>
+                  </a:xfrm>
+                  <a:prstGeom prst="ellipse">
+                    <a:avLst/>
+                  </a:prstGeom>
+                  <a:solidFill>
+                    <a:srgbClr val="B155A7"/>
+                  </a:solidFill>
+                  <a:ln>
+                    <a:noFill/>
+                  </a:ln>
+                </p:spPr>
+                <p:style>
+                  <a:lnRef idx="2">
+                    <a:schemeClr val="accent1">
+                      <a:shade val="50000"/>
+                    </a:schemeClr>
+                  </a:lnRef>
+                  <a:fillRef idx="1">
+                    <a:schemeClr val="accent1"/>
+                  </a:fillRef>
+                  <a:effectRef idx="0">
+                    <a:schemeClr val="accent1"/>
+                  </a:effectRef>
+                  <a:fontRef idx="minor">
+                    <a:schemeClr val="lt1"/>
+                  </a:fontRef>
+                </p:style>
+                <p:txBody>
+                  <a:bodyPr rtlCol="0" anchor="ctr"/>
+                  <a:lstStyle/>
+                  <a:p>
+                    <a:pPr algn="ctr"/>
+                    <a:endParaRPr lang="fr-FR" sz="1750" dirty="0">
+                      <a:latin typeface="Arial" panose="020B0604020202020204" pitchFamily="34" charset="0"/>
+                      <a:cs typeface="Arial" panose="020B0604020202020204" pitchFamily="34" charset="0"/>
+                    </a:endParaRPr>
+                  </a:p>
+                </p:txBody>
+              </p:sp>
+              <p:sp>
+                <p:nvSpPr>
+                  <p:cNvPr id="48" name="Ellipse 47">
+                    <a:extLst>
+                      <a:ext uri="{FF2B5EF4-FFF2-40B4-BE49-F238E27FC236}">
+                        <a16:creationId xmlns:a16="http://schemas.microsoft.com/office/drawing/2014/main" id="{DDA9AFF3-7484-4272-8F1D-97C9B1F8775D}"/>
+                      </a:ext>
+                    </a:extLst>
+                  </p:cNvPr>
+                  <p:cNvSpPr/>
+                  <p:nvPr/>
+                </p:nvSpPr>
+                <p:spPr>
+                  <a:xfrm>
+                    <a:off x="10765595" y="3361858"/>
+                    <a:ext cx="210820" cy="210821"/>
+                  </a:xfrm>
+                  <a:prstGeom prst="ellipse">
+                    <a:avLst/>
+                  </a:prstGeom>
+                  <a:solidFill>
+                    <a:srgbClr val="FDAC76"/>
+                  </a:solidFill>
+                  <a:ln>
+                    <a:noFill/>
+                  </a:ln>
+                </p:spPr>
+                <p:style>
+                  <a:lnRef idx="2">
+                    <a:schemeClr val="accent1">
+                      <a:shade val="50000"/>
+                    </a:schemeClr>
+                  </a:lnRef>
+                  <a:fillRef idx="1">
+                    <a:schemeClr val="accent1"/>
+                  </a:fillRef>
+                  <a:effectRef idx="0">
+                    <a:schemeClr val="accent1"/>
+                  </a:effectRef>
+                  <a:fontRef idx="minor">
+                    <a:schemeClr val="lt1"/>
+                  </a:fontRef>
+                </p:style>
+                <p:txBody>
+                  <a:bodyPr rtlCol="0" anchor="ctr"/>
+                  <a:lstStyle/>
+                  <a:p>
+                    <a:pPr algn="ctr"/>
+                    <a:endParaRPr lang="fr-FR" sz="1750" dirty="0">
+                      <a:latin typeface="Arial" panose="020B0604020202020204" pitchFamily="34" charset="0"/>
+                      <a:cs typeface="Arial" panose="020B0604020202020204" pitchFamily="34" charset="0"/>
+                    </a:endParaRPr>
+                  </a:p>
+                </p:txBody>
+              </p:sp>
+              <p:sp>
+                <p:nvSpPr>
+                  <p:cNvPr id="49" name="Ellipse 48">
+                    <a:extLst>
+                      <a:ext uri="{FF2B5EF4-FFF2-40B4-BE49-F238E27FC236}">
+                        <a16:creationId xmlns:a16="http://schemas.microsoft.com/office/drawing/2014/main" id="{FC2EDE3E-49DB-4791-8D72-39CC781187E3}"/>
+                      </a:ext>
+                    </a:extLst>
+                  </p:cNvPr>
+                  <p:cNvSpPr/>
+                  <p:nvPr/>
+                </p:nvSpPr>
+                <p:spPr>
+                  <a:xfrm>
+                    <a:off x="78519" y="3668355"/>
+                    <a:ext cx="210820" cy="210821"/>
+                  </a:xfrm>
+                  <a:prstGeom prst="ellipse">
+                    <a:avLst/>
+                  </a:prstGeom>
+                  <a:solidFill>
+                    <a:srgbClr val="DCB702"/>
+                  </a:solidFill>
+                  <a:ln>
+                    <a:noFill/>
+                  </a:ln>
+                </p:spPr>
+                <p:style>
+                  <a:lnRef idx="2">
+                    <a:schemeClr val="accent1">
+                      <a:shade val="50000"/>
+                    </a:schemeClr>
+                  </a:lnRef>
+                  <a:fillRef idx="1">
+                    <a:schemeClr val="accent1"/>
+                  </a:fillRef>
+                  <a:effectRef idx="0">
+                    <a:schemeClr val="accent1"/>
+                  </a:effectRef>
+                  <a:fontRef idx="minor">
+                    <a:schemeClr val="lt1"/>
+                  </a:fontRef>
+                </p:style>
+                <p:txBody>
+                  <a:bodyPr rtlCol="0" anchor="ctr"/>
+                  <a:lstStyle/>
+                  <a:p>
+                    <a:pPr algn="ctr"/>
+                    <a:endParaRPr lang="fr-FR" sz="1750" dirty="0">
+                      <a:latin typeface="Arial" panose="020B0604020202020204" pitchFamily="34" charset="0"/>
+                      <a:cs typeface="Arial" panose="020B0604020202020204" pitchFamily="34" charset="0"/>
+                    </a:endParaRPr>
+                  </a:p>
+                </p:txBody>
+              </p:sp>
+              <p:sp>
+                <p:nvSpPr>
+                  <p:cNvPr id="50" name="Ellipse 49">
+                    <a:extLst>
+                      <a:ext uri="{FF2B5EF4-FFF2-40B4-BE49-F238E27FC236}">
+                        <a16:creationId xmlns:a16="http://schemas.microsoft.com/office/drawing/2014/main" id="{7DE154C8-AE82-4174-80B7-5DCE9DF3A78F}"/>
+                      </a:ext>
+                    </a:extLst>
+                  </p:cNvPr>
+                  <p:cNvSpPr/>
+                  <p:nvPr/>
+                </p:nvSpPr>
+                <p:spPr>
+                  <a:xfrm>
+                    <a:off x="3332763" y="3658041"/>
+                    <a:ext cx="210820" cy="210820"/>
+                  </a:xfrm>
+                  <a:prstGeom prst="ellipse">
+                    <a:avLst/>
+                  </a:prstGeom>
+                  <a:solidFill>
+                    <a:srgbClr val="F2B6EB"/>
+                  </a:solidFill>
+                  <a:ln>
+                    <a:noFill/>
+                  </a:ln>
+                </p:spPr>
+                <p:style>
+                  <a:lnRef idx="2">
+                    <a:schemeClr val="accent1">
+                      <a:shade val="50000"/>
+                    </a:schemeClr>
+                  </a:lnRef>
+                  <a:fillRef idx="1">
+                    <a:schemeClr val="accent1"/>
+                  </a:fillRef>
+                  <a:effectRef idx="0">
+                    <a:schemeClr val="accent1"/>
+                  </a:effectRef>
+                  <a:fontRef idx="minor">
+                    <a:schemeClr val="lt1"/>
+                  </a:fontRef>
+                </p:style>
+                <p:txBody>
+                  <a:bodyPr rtlCol="0" anchor="ctr"/>
+                  <a:lstStyle/>
+                  <a:p>
+                    <a:pPr algn="ctr"/>
+                    <a:endParaRPr lang="fr-FR" sz="1750" dirty="0">
+                      <a:latin typeface="Arial" panose="020B0604020202020204" pitchFamily="34" charset="0"/>
+                      <a:cs typeface="Arial" panose="020B0604020202020204" pitchFamily="34" charset="0"/>
+                    </a:endParaRPr>
+                  </a:p>
+                </p:txBody>
+              </p:sp>
+              <p:sp>
+                <p:nvSpPr>
+                  <p:cNvPr id="51" name="Ellipse 50">
+                    <a:extLst>
+                      <a:ext uri="{FF2B5EF4-FFF2-40B4-BE49-F238E27FC236}">
+                        <a16:creationId xmlns:a16="http://schemas.microsoft.com/office/drawing/2014/main" id="{A1BE9F84-1BDD-42EA-A3DF-B229D780140B}"/>
+                      </a:ext>
+                    </a:extLst>
+                  </p:cNvPr>
+                  <p:cNvSpPr/>
+                  <p:nvPr/>
+                </p:nvSpPr>
+                <p:spPr>
+                  <a:xfrm>
+                    <a:off x="7203237" y="3668355"/>
+                    <a:ext cx="210820" cy="210821"/>
+                  </a:xfrm>
+                  <a:prstGeom prst="ellipse">
+                    <a:avLst/>
+                  </a:prstGeom>
+                  <a:solidFill>
+                    <a:srgbClr val="62C966"/>
+                  </a:solidFill>
+                  <a:ln>
+                    <a:noFill/>
+                  </a:ln>
+                </p:spPr>
+                <p:style>
+                  <a:lnRef idx="2">
+                    <a:schemeClr val="accent1">
+                      <a:shade val="50000"/>
+                    </a:schemeClr>
+                  </a:lnRef>
+                  <a:fillRef idx="1">
+                    <a:schemeClr val="accent1"/>
+                  </a:fillRef>
+                  <a:effectRef idx="0">
+                    <a:schemeClr val="accent1"/>
+                  </a:effectRef>
+                  <a:fontRef idx="minor">
+                    <a:schemeClr val="lt1"/>
+                  </a:fontRef>
+                </p:style>
+                <p:txBody>
+                  <a:bodyPr rtlCol="0" anchor="ctr"/>
+                  <a:lstStyle/>
+                  <a:p>
+                    <a:pPr algn="ctr"/>
+                    <a:endParaRPr lang="fr-FR" sz="1750" dirty="0">
+                      <a:latin typeface="Arial" panose="020B0604020202020204" pitchFamily="34" charset="0"/>
+                      <a:cs typeface="Arial" panose="020B0604020202020204" pitchFamily="34" charset="0"/>
+                    </a:endParaRPr>
+                  </a:p>
+                </p:txBody>
+              </p:sp>
+              <p:sp>
+                <p:nvSpPr>
+                  <p:cNvPr id="52" name="Ellipse 51">
+                    <a:extLst>
+                      <a:ext uri="{FF2B5EF4-FFF2-40B4-BE49-F238E27FC236}">
+                        <a16:creationId xmlns:a16="http://schemas.microsoft.com/office/drawing/2014/main" id="{2A198E91-7CA7-485F-B6F1-0EA11CB2106E}"/>
+                      </a:ext>
+                    </a:extLst>
+                  </p:cNvPr>
+                  <p:cNvSpPr/>
+                  <p:nvPr/>
+                </p:nvSpPr>
+                <p:spPr>
+                  <a:xfrm>
+                    <a:off x="10765595" y="3668355"/>
+                    <a:ext cx="210820" cy="210821"/>
+                  </a:xfrm>
+                  <a:prstGeom prst="ellipse">
+                    <a:avLst/>
+                  </a:prstGeom>
+                  <a:solidFill>
+                    <a:srgbClr val="FF7F40"/>
+                  </a:solidFill>
+                  <a:ln>
+                    <a:noFill/>
+                  </a:ln>
+                </p:spPr>
+                <p:style>
+                  <a:lnRef idx="2">
+                    <a:schemeClr val="accent1">
+                      <a:shade val="50000"/>
+                    </a:schemeClr>
+                  </a:lnRef>
+                  <a:fillRef idx="1">
+                    <a:schemeClr val="accent1"/>
+                  </a:fillRef>
+                  <a:effectRef idx="0">
+                    <a:schemeClr val="accent1"/>
+                  </a:effectRef>
+                  <a:fontRef idx="minor">
+                    <a:schemeClr val="lt1"/>
+                  </a:fontRef>
+                </p:style>
+                <p:txBody>
+                  <a:bodyPr rtlCol="0" anchor="ctr"/>
+                  <a:lstStyle/>
+                  <a:p>
+                    <a:pPr algn="ctr"/>
+                    <a:endParaRPr lang="fr-FR" sz="1750" dirty="0">
+                      <a:latin typeface="Arial" panose="020B0604020202020204" pitchFamily="34" charset="0"/>
+                      <a:cs typeface="Arial" panose="020B0604020202020204" pitchFamily="34" charset="0"/>
+                    </a:endParaRPr>
+                  </a:p>
+                </p:txBody>
+              </p:sp>
+              <p:sp>
+                <p:nvSpPr>
+                  <p:cNvPr id="53" name="Ellipse 52">
+                    <a:extLst>
+                      <a:ext uri="{FF2B5EF4-FFF2-40B4-BE49-F238E27FC236}">
+                        <a16:creationId xmlns:a16="http://schemas.microsoft.com/office/drawing/2014/main" id="{9EC6AB5C-B4AA-4CF6-A660-BDFA78633365}"/>
+                      </a:ext>
+                    </a:extLst>
+                  </p:cNvPr>
+                  <p:cNvSpPr/>
+                  <p:nvPr/>
+                </p:nvSpPr>
+                <p:spPr>
+                  <a:xfrm>
+                    <a:off x="78519" y="3966357"/>
+                    <a:ext cx="210820" cy="210821"/>
+                  </a:xfrm>
+                  <a:prstGeom prst="ellipse">
+                    <a:avLst/>
+                  </a:prstGeom>
+                  <a:solidFill>
+                    <a:srgbClr val="7EC8E3"/>
+                  </a:solidFill>
+                  <a:ln>
+                    <a:noFill/>
+                  </a:ln>
+                </p:spPr>
+                <p:style>
+                  <a:lnRef idx="2">
+                    <a:schemeClr val="accent1">
+                      <a:shade val="50000"/>
+                    </a:schemeClr>
+                  </a:lnRef>
+                  <a:fillRef idx="1">
+                    <a:schemeClr val="accent1"/>
+                  </a:fillRef>
+                  <a:effectRef idx="0">
+                    <a:schemeClr val="accent1"/>
+                  </a:effectRef>
+                  <a:fontRef idx="minor">
+                    <a:schemeClr val="lt1"/>
+                  </a:fontRef>
+                </p:style>
+                <p:txBody>
+                  <a:bodyPr rtlCol="0" anchor="ctr"/>
+                  <a:lstStyle/>
+                  <a:p>
+                    <a:pPr algn="ctr"/>
+                    <a:endParaRPr lang="fr-FR" sz="1750" dirty="0">
+                      <a:latin typeface="Arial" panose="020B0604020202020204" pitchFamily="34" charset="0"/>
+                      <a:cs typeface="Arial" panose="020B0604020202020204" pitchFamily="34" charset="0"/>
+                    </a:endParaRPr>
+                  </a:p>
+                </p:txBody>
+              </p:sp>
+              <p:sp>
+                <p:nvSpPr>
+                  <p:cNvPr id="54" name="Ellipse 53">
+                    <a:extLst>
+                      <a:ext uri="{FF2B5EF4-FFF2-40B4-BE49-F238E27FC236}">
+                        <a16:creationId xmlns:a16="http://schemas.microsoft.com/office/drawing/2014/main" id="{9E8DBD95-D9F6-43A5-8E10-E2CCA0F6F814}"/>
+                      </a:ext>
+                    </a:extLst>
+                  </p:cNvPr>
+                  <p:cNvSpPr/>
+                  <p:nvPr/>
+                </p:nvSpPr>
+                <p:spPr>
+                  <a:xfrm>
+                    <a:off x="3332763" y="3956043"/>
+                    <a:ext cx="210820" cy="210820"/>
+                  </a:xfrm>
+                  <a:prstGeom prst="ellipse">
+                    <a:avLst/>
+                  </a:prstGeom>
+                  <a:solidFill>
+                    <a:srgbClr val="D38ACB"/>
+                  </a:solidFill>
+                  <a:ln>
+                    <a:noFill/>
+                  </a:ln>
+                </p:spPr>
+                <p:style>
+                  <a:lnRef idx="2">
+                    <a:schemeClr val="accent1">
+                      <a:shade val="50000"/>
+                    </a:schemeClr>
+                  </a:lnRef>
+                  <a:fillRef idx="1">
+                    <a:schemeClr val="accent1"/>
+                  </a:fillRef>
+                  <a:effectRef idx="0">
+                    <a:schemeClr val="accent1"/>
+                  </a:effectRef>
+                  <a:fontRef idx="minor">
+                    <a:schemeClr val="lt1"/>
+                  </a:fontRef>
+                </p:style>
+                <p:txBody>
+                  <a:bodyPr rtlCol="0" anchor="ctr"/>
+                  <a:lstStyle/>
+                  <a:p>
+                    <a:pPr algn="ctr"/>
+                    <a:endParaRPr lang="fr-FR" sz="1750" dirty="0">
+                      <a:latin typeface="Arial" panose="020B0604020202020204" pitchFamily="34" charset="0"/>
+                      <a:cs typeface="Arial" panose="020B0604020202020204" pitchFamily="34" charset="0"/>
+                    </a:endParaRPr>
+                  </a:p>
+                </p:txBody>
+              </p:sp>
+              <p:sp>
+                <p:nvSpPr>
+                  <p:cNvPr id="55" name="Ellipse 54">
+                    <a:extLst>
+                      <a:ext uri="{FF2B5EF4-FFF2-40B4-BE49-F238E27FC236}">
+                        <a16:creationId xmlns:a16="http://schemas.microsoft.com/office/drawing/2014/main" id="{CF4EDFBB-B152-4F4D-82D6-B1C1DC892F35}"/>
+                      </a:ext>
+                    </a:extLst>
+                  </p:cNvPr>
+                  <p:cNvSpPr/>
+                  <p:nvPr/>
+                </p:nvSpPr>
+                <p:spPr>
+                  <a:xfrm>
+                    <a:off x="7203237" y="3966357"/>
+                    <a:ext cx="210820" cy="210821"/>
+                  </a:xfrm>
+                  <a:prstGeom prst="ellipse">
+                    <a:avLst/>
+                  </a:prstGeom>
+                  <a:solidFill>
+                    <a:srgbClr val="EE637F"/>
+                  </a:solidFill>
+                  <a:ln>
+                    <a:noFill/>
+                  </a:ln>
+                </p:spPr>
+                <p:style>
+                  <a:lnRef idx="2">
+                    <a:schemeClr val="accent1">
+                      <a:shade val="50000"/>
+                    </a:schemeClr>
+                  </a:lnRef>
+                  <a:fillRef idx="1">
+                    <a:schemeClr val="accent1"/>
+                  </a:fillRef>
+                  <a:effectRef idx="0">
+                    <a:schemeClr val="accent1"/>
+                  </a:effectRef>
+                  <a:fontRef idx="minor">
+                    <a:schemeClr val="lt1"/>
+                  </a:fontRef>
+                </p:style>
+                <p:txBody>
+                  <a:bodyPr rtlCol="0" anchor="ctr"/>
+                  <a:lstStyle/>
+                  <a:p>
+                    <a:pPr algn="ctr"/>
+                    <a:endParaRPr lang="fr-FR" sz="1750" dirty="0">
+                      <a:latin typeface="Arial" panose="020B0604020202020204" pitchFamily="34" charset="0"/>
+                      <a:cs typeface="Arial" panose="020B0604020202020204" pitchFamily="34" charset="0"/>
+                    </a:endParaRPr>
+                  </a:p>
+                </p:txBody>
+              </p:sp>
+              <p:sp>
+                <p:nvSpPr>
+                  <p:cNvPr id="56" name="Ellipse 55">
+                    <a:extLst>
+                      <a:ext uri="{FF2B5EF4-FFF2-40B4-BE49-F238E27FC236}">
+                        <a16:creationId xmlns:a16="http://schemas.microsoft.com/office/drawing/2014/main" id="{BD36CE02-B7EF-415D-982F-4477DA36D150}"/>
+                      </a:ext>
+                    </a:extLst>
+                  </p:cNvPr>
+                  <p:cNvSpPr/>
+                  <p:nvPr/>
+                </p:nvSpPr>
+                <p:spPr>
+                  <a:xfrm>
+                    <a:off x="10765595" y="3966357"/>
+                    <a:ext cx="210820" cy="210821"/>
+                  </a:xfrm>
+                  <a:prstGeom prst="ellipse">
+                    <a:avLst/>
+                  </a:prstGeom>
+                  <a:solidFill>
+                    <a:srgbClr val="BCED54"/>
+                  </a:solidFill>
+                  <a:ln>
+                    <a:noFill/>
+                  </a:ln>
+                </p:spPr>
+                <p:style>
+                  <a:lnRef idx="2">
+                    <a:schemeClr val="accent1">
+                      <a:shade val="50000"/>
+                    </a:schemeClr>
+                  </a:lnRef>
+                  <a:fillRef idx="1">
+                    <a:schemeClr val="accent1"/>
+                  </a:fillRef>
+                  <a:effectRef idx="0">
+                    <a:schemeClr val="accent1"/>
+                  </a:effectRef>
+                  <a:fontRef idx="minor">
+                    <a:schemeClr val="lt1"/>
+                  </a:fontRef>
+                </p:style>
+                <p:txBody>
+                  <a:bodyPr rtlCol="0" anchor="ctr"/>
+                  <a:lstStyle/>
+                  <a:p>
+                    <a:pPr algn="ctr"/>
+                    <a:endParaRPr lang="fr-FR" sz="1750" dirty="0">
+                      <a:latin typeface="Arial" panose="020B0604020202020204" pitchFamily="34" charset="0"/>
+                      <a:cs typeface="Arial" panose="020B0604020202020204" pitchFamily="34" charset="0"/>
+                    </a:endParaRPr>
+                  </a:p>
+                </p:txBody>
+              </p:sp>
+              <p:sp>
+                <p:nvSpPr>
+                  <p:cNvPr id="57" name="ZoneTexte 56">
+                    <a:extLst>
+                      <a:ext uri="{FF2B5EF4-FFF2-40B4-BE49-F238E27FC236}">
+                        <a16:creationId xmlns:a16="http://schemas.microsoft.com/office/drawing/2014/main" id="{F353E84F-BA73-4167-9079-17600DEF2E76}"/>
+                      </a:ext>
+                    </a:extLst>
+                  </p:cNvPr>
+                  <p:cNvSpPr txBox="1"/>
+                  <p:nvPr/>
+                </p:nvSpPr>
+                <p:spPr>
+                  <a:xfrm>
+                    <a:off x="336006" y="3277035"/>
+                    <a:ext cx="2361676" cy="338554"/>
+                  </a:xfrm>
+                  <a:prstGeom prst="rect">
+                    <a:avLst/>
+                  </a:prstGeom>
+                  <a:noFill/>
+                </p:spPr>
+                <p:txBody>
+                  <a:bodyPr wrap="square" rtlCol="0">
+                    <a:spAutoFit/>
+                  </a:bodyPr>
+                  <a:lstStyle/>
+                  <a:p>
+                    <a:r>
+                      <a:rPr lang="fr-FR" sz="1556" spc="-49" dirty="0">
+                        <a:latin typeface="Arial" panose="020B0604020202020204" pitchFamily="34" charset="0"/>
+                        <a:cs typeface="Arial" panose="020B0604020202020204" pitchFamily="34" charset="0"/>
+                      </a:rPr>
+                      <a:t>Aminoglycoside</a:t>
+                    </a:r>
+                  </a:p>
+                </p:txBody>
+              </p:sp>
+              <p:sp>
+                <p:nvSpPr>
+                  <p:cNvPr id="58" name="ZoneTexte 57">
+                    <a:extLst>
+                      <a:ext uri="{FF2B5EF4-FFF2-40B4-BE49-F238E27FC236}">
+                        <a16:creationId xmlns:a16="http://schemas.microsoft.com/office/drawing/2014/main" id="{5E258BDD-7AB3-4F2E-8FAE-97E3CA44CA0D}"/>
+                      </a:ext>
+                    </a:extLst>
+                  </p:cNvPr>
+                  <p:cNvSpPr txBox="1"/>
+                  <p:nvPr/>
+                </p:nvSpPr>
+                <p:spPr>
+                  <a:xfrm>
+                    <a:off x="336006" y="3597456"/>
+                    <a:ext cx="2361676" cy="338554"/>
+                  </a:xfrm>
+                  <a:prstGeom prst="rect">
+                    <a:avLst/>
+                  </a:prstGeom>
+                  <a:noFill/>
+                </p:spPr>
+                <p:txBody>
+                  <a:bodyPr wrap="square" rtlCol="0">
+                    <a:spAutoFit/>
+                  </a:bodyPr>
+                  <a:lstStyle/>
+                  <a:p>
+                    <a:r>
+                      <a:rPr lang="fr-FR" sz="1556" spc="-49" dirty="0">
+                        <a:latin typeface="Arial" panose="020B0604020202020204" pitchFamily="34" charset="0"/>
+                        <a:cs typeface="Arial" panose="020B0604020202020204" pitchFamily="34" charset="0"/>
+                      </a:rPr>
+                      <a:t>Other</a:t>
+                    </a:r>
+                  </a:p>
+                </p:txBody>
+              </p:sp>
+              <p:sp>
+                <p:nvSpPr>
+                  <p:cNvPr id="59" name="ZoneTexte 58">
+                    <a:extLst>
+                      <a:ext uri="{FF2B5EF4-FFF2-40B4-BE49-F238E27FC236}">
+                        <a16:creationId xmlns:a16="http://schemas.microsoft.com/office/drawing/2014/main" id="{00F520C7-2BBA-4CBF-A3A7-53B051D09D3A}"/>
+                      </a:ext>
+                    </a:extLst>
+                  </p:cNvPr>
+                  <p:cNvSpPr txBox="1"/>
+                  <p:nvPr/>
+                </p:nvSpPr>
+                <p:spPr>
+                  <a:xfrm>
+                    <a:off x="336006" y="3917878"/>
+                    <a:ext cx="2679403" cy="338554"/>
+                  </a:xfrm>
+                  <a:prstGeom prst="rect">
+                    <a:avLst/>
+                  </a:prstGeom>
+                  <a:noFill/>
+                </p:spPr>
+                <p:txBody>
+                  <a:bodyPr wrap="square" rtlCol="0">
+                    <a:spAutoFit/>
+                  </a:bodyPr>
+                  <a:lstStyle/>
+                  <a:p>
+                    <a:r>
+                      <a:rPr lang="fr-FR" sz="1556" spc="-49" dirty="0">
+                        <a:latin typeface="Arial" panose="020B0604020202020204" pitchFamily="34" charset="0"/>
+                        <a:cs typeface="Arial" panose="020B0604020202020204" pitchFamily="34" charset="0"/>
+                      </a:rPr>
+                      <a:t>Large spectrum penicillin</a:t>
+                    </a:r>
+                  </a:p>
+                </p:txBody>
+              </p:sp>
+              <p:sp>
+                <p:nvSpPr>
+                  <p:cNvPr id="60" name="ZoneTexte 59">
+                    <a:extLst>
+                      <a:ext uri="{FF2B5EF4-FFF2-40B4-BE49-F238E27FC236}">
+                        <a16:creationId xmlns:a16="http://schemas.microsoft.com/office/drawing/2014/main" id="{DD54BD5F-6379-4A19-9C2C-829D4DCEE555}"/>
+                      </a:ext>
+                    </a:extLst>
+                  </p:cNvPr>
+                  <p:cNvSpPr txBox="1"/>
+                  <p:nvPr/>
+                </p:nvSpPr>
+                <p:spPr>
+                  <a:xfrm>
+                    <a:off x="3543585" y="3277035"/>
+                    <a:ext cx="3698811" cy="402368"/>
+                  </a:xfrm>
+                  <a:prstGeom prst="rect">
+                    <a:avLst/>
+                  </a:prstGeom>
+                  <a:noFill/>
+                </p:spPr>
+                <p:txBody>
+                  <a:bodyPr wrap="square" rtlCol="0">
+                    <a:spAutoFit/>
+                  </a:bodyPr>
+                  <a:lstStyle/>
+                  <a:p>
+                    <a:r>
+                      <a:rPr lang="fr-FR" sz="1556" spc="-49" dirty="0">
+                        <a:latin typeface="Arial" panose="020B0604020202020204" pitchFamily="34" charset="0"/>
+                        <a:cs typeface="Arial" panose="020B0604020202020204" pitchFamily="34" charset="0"/>
+                      </a:rPr>
+                      <a:t>Penicillin + beta-lactamase inhibitor</a:t>
+                    </a:r>
+                  </a:p>
+                </p:txBody>
+              </p:sp>
+              <p:sp>
+                <p:nvSpPr>
+                  <p:cNvPr id="61" name="ZoneTexte 60">
+                    <a:extLst>
+                      <a:ext uri="{FF2B5EF4-FFF2-40B4-BE49-F238E27FC236}">
+                        <a16:creationId xmlns:a16="http://schemas.microsoft.com/office/drawing/2014/main" id="{80ED4984-AA33-4644-B748-D21FB0F71B27}"/>
+                      </a:ext>
+                    </a:extLst>
+                  </p:cNvPr>
+                  <p:cNvSpPr txBox="1"/>
+                  <p:nvPr/>
+                </p:nvSpPr>
+                <p:spPr>
+                  <a:xfrm>
+                    <a:off x="3526381" y="3597456"/>
+                    <a:ext cx="3390378" cy="402368"/>
+                  </a:xfrm>
+                  <a:prstGeom prst="rect">
+                    <a:avLst/>
+                  </a:prstGeom>
+                  <a:noFill/>
+                </p:spPr>
+                <p:txBody>
+                  <a:bodyPr wrap="square" rtlCol="0">
+                    <a:spAutoFit/>
+                  </a:bodyPr>
+                  <a:lstStyle/>
+                  <a:p>
+                    <a:r>
+                      <a:rPr lang="fr-FR" sz="1556" spc="-49" dirty="0">
+                        <a:latin typeface="Arial" panose="020B0604020202020204" pitchFamily="34" charset="0"/>
+                        <a:cs typeface="Arial" panose="020B0604020202020204" pitchFamily="34" charset="0"/>
+                      </a:rPr>
+                      <a:t>Second gen. cephalosporin</a:t>
+                    </a:r>
+                  </a:p>
+                </p:txBody>
+              </p:sp>
+              <p:sp>
+                <p:nvSpPr>
+                  <p:cNvPr id="62" name="ZoneTexte 61">
+                    <a:extLst>
+                      <a:ext uri="{FF2B5EF4-FFF2-40B4-BE49-F238E27FC236}">
+                        <a16:creationId xmlns:a16="http://schemas.microsoft.com/office/drawing/2014/main" id="{56D97E73-07FB-48C2-B185-430F428F3506}"/>
+                      </a:ext>
+                    </a:extLst>
+                  </p:cNvPr>
+                  <p:cNvSpPr txBox="1"/>
+                  <p:nvPr/>
+                </p:nvSpPr>
+                <p:spPr>
+                  <a:xfrm>
+                    <a:off x="3526381" y="3917878"/>
+                    <a:ext cx="3390378" cy="402368"/>
+                  </a:xfrm>
+                  <a:prstGeom prst="rect">
+                    <a:avLst/>
+                  </a:prstGeom>
+                  <a:noFill/>
+                </p:spPr>
+                <p:txBody>
+                  <a:bodyPr wrap="square" rtlCol="0">
+                    <a:spAutoFit/>
+                  </a:bodyPr>
+                  <a:lstStyle/>
+                  <a:p>
+                    <a:r>
+                      <a:rPr lang="fr-FR" sz="1556" spc="-49" dirty="0">
+                        <a:latin typeface="Arial" panose="020B0604020202020204" pitchFamily="34" charset="0"/>
+                        <a:cs typeface="Arial" panose="020B0604020202020204" pitchFamily="34" charset="0"/>
+                      </a:rPr>
+                      <a:t>Third gen. cephalosporin</a:t>
+                    </a:r>
+                  </a:p>
+                </p:txBody>
+              </p:sp>
+              <p:sp>
+                <p:nvSpPr>
+                  <p:cNvPr id="63" name="ZoneTexte 62">
+                    <a:extLst>
+                      <a:ext uri="{FF2B5EF4-FFF2-40B4-BE49-F238E27FC236}">
+                        <a16:creationId xmlns:a16="http://schemas.microsoft.com/office/drawing/2014/main" id="{A3A4316D-7633-49E6-87D4-C58F1C80541A}"/>
+                      </a:ext>
+                    </a:extLst>
+                  </p:cNvPr>
+                  <p:cNvSpPr txBox="1"/>
+                  <p:nvPr/>
+                </p:nvSpPr>
+                <p:spPr>
+                  <a:xfrm>
+                    <a:off x="7461396" y="3325515"/>
+                    <a:ext cx="3148220" cy="338554"/>
+                  </a:xfrm>
+                  <a:prstGeom prst="rect">
+                    <a:avLst/>
+                  </a:prstGeom>
+                  <a:noFill/>
+                </p:spPr>
+                <p:txBody>
+                  <a:bodyPr wrap="square" rtlCol="0">
+                    <a:spAutoFit/>
+                  </a:bodyPr>
+                  <a:lstStyle/>
+                  <a:p>
+                    <a:r>
+                      <a:rPr lang="fr-FR" sz="1556" spc="-49" dirty="0" err="1">
+                        <a:latin typeface="Arial" panose="020B0604020202020204" pitchFamily="34" charset="0"/>
+                        <a:cs typeface="Arial" panose="020B0604020202020204" pitchFamily="34" charset="0"/>
+                      </a:rPr>
+                      <a:t>Fourth</a:t>
+                    </a:r>
+                    <a:r>
+                      <a:rPr lang="fr-FR" sz="1556" spc="-49" dirty="0">
+                        <a:latin typeface="Arial" panose="020B0604020202020204" pitchFamily="34" charset="0"/>
+                        <a:cs typeface="Arial" panose="020B0604020202020204" pitchFamily="34" charset="0"/>
+                      </a:rPr>
+                      <a:t> gen. cephalosporin</a:t>
+                    </a:r>
+                  </a:p>
+                </p:txBody>
+              </p:sp>
+              <p:sp>
+                <p:nvSpPr>
+                  <p:cNvPr id="64" name="ZoneTexte 63">
+                    <a:extLst>
+                      <a:ext uri="{FF2B5EF4-FFF2-40B4-BE49-F238E27FC236}">
+                        <a16:creationId xmlns:a16="http://schemas.microsoft.com/office/drawing/2014/main" id="{3E6B7ACA-D025-43FD-8BD5-60AE1331076B}"/>
+                      </a:ext>
+                    </a:extLst>
+                  </p:cNvPr>
+                  <p:cNvSpPr txBox="1"/>
+                  <p:nvPr/>
+                </p:nvSpPr>
+                <p:spPr>
+                  <a:xfrm>
+                    <a:off x="7491011" y="3615926"/>
+                    <a:ext cx="2361676" cy="338554"/>
+                  </a:xfrm>
+                  <a:prstGeom prst="rect">
+                    <a:avLst/>
+                  </a:prstGeom>
+                  <a:noFill/>
+                </p:spPr>
+                <p:txBody>
+                  <a:bodyPr wrap="square" rtlCol="0">
+                    <a:spAutoFit/>
+                  </a:bodyPr>
+                  <a:lstStyle/>
+                  <a:p>
+                    <a:r>
+                      <a:rPr lang="fr-FR" sz="1556" spc="-49" dirty="0">
+                        <a:latin typeface="Arial" panose="020B0604020202020204" pitchFamily="34" charset="0"/>
+                        <a:cs typeface="Arial" panose="020B0604020202020204" pitchFamily="34" charset="0"/>
+                      </a:rPr>
+                      <a:t>Carbapenem</a:t>
+                    </a:r>
+                  </a:p>
+                </p:txBody>
+              </p:sp>
+              <p:sp>
+                <p:nvSpPr>
+                  <p:cNvPr id="65" name="ZoneTexte 64">
+                    <a:extLst>
+                      <a:ext uri="{FF2B5EF4-FFF2-40B4-BE49-F238E27FC236}">
+                        <a16:creationId xmlns:a16="http://schemas.microsoft.com/office/drawing/2014/main" id="{B9003718-573C-4278-8925-A5B358960EB8}"/>
+                      </a:ext>
+                    </a:extLst>
+                  </p:cNvPr>
+                  <p:cNvSpPr txBox="1"/>
+                  <p:nvPr/>
+                </p:nvSpPr>
+                <p:spPr>
+                  <a:xfrm>
+                    <a:off x="7491012" y="3936347"/>
+                    <a:ext cx="2763612" cy="338554"/>
+                  </a:xfrm>
+                  <a:prstGeom prst="rect">
+                    <a:avLst/>
+                  </a:prstGeom>
+                  <a:noFill/>
+                </p:spPr>
+                <p:txBody>
+                  <a:bodyPr wrap="square" rtlCol="0">
+                    <a:spAutoFit/>
+                  </a:bodyPr>
+                  <a:lstStyle/>
+                  <a:p>
+                    <a:r>
+                      <a:rPr lang="fr-FR" sz="1556" spc="-49" dirty="0">
+                        <a:latin typeface="Arial" panose="020B0604020202020204" pitchFamily="34" charset="0"/>
+                        <a:cs typeface="Arial" panose="020B0604020202020204" pitchFamily="34" charset="0"/>
+                      </a:rPr>
+                      <a:t>Nitrofuran derivative</a:t>
+                    </a:r>
+                  </a:p>
+                </p:txBody>
+              </p:sp>
+              <p:sp>
+                <p:nvSpPr>
+                  <p:cNvPr id="66" name="ZoneTexte 65">
+                    <a:extLst>
+                      <a:ext uri="{FF2B5EF4-FFF2-40B4-BE49-F238E27FC236}">
+                        <a16:creationId xmlns:a16="http://schemas.microsoft.com/office/drawing/2014/main" id="{F4C9B66B-D6B2-4F27-96E9-8F0B4D2637D9}"/>
+                      </a:ext>
+                    </a:extLst>
+                  </p:cNvPr>
+                  <p:cNvSpPr txBox="1"/>
+                  <p:nvPr/>
+                </p:nvSpPr>
+                <p:spPr>
+                  <a:xfrm>
+                    <a:off x="11024091" y="3304047"/>
+                    <a:ext cx="2361676" cy="338554"/>
+                  </a:xfrm>
+                  <a:prstGeom prst="rect">
+                    <a:avLst/>
+                  </a:prstGeom>
+                  <a:noFill/>
+                </p:spPr>
+                <p:txBody>
+                  <a:bodyPr wrap="square" rtlCol="0">
+                    <a:spAutoFit/>
+                  </a:bodyPr>
+                  <a:lstStyle/>
+                  <a:p>
+                    <a:r>
+                      <a:rPr lang="fr-FR" sz="1556" spc="-49" dirty="0">
+                        <a:latin typeface="Arial" panose="020B0604020202020204" pitchFamily="34" charset="0"/>
+                        <a:cs typeface="Arial" panose="020B0604020202020204" pitchFamily="34" charset="0"/>
+                      </a:rPr>
+                      <a:t>Fluoroquinolone</a:t>
+                    </a:r>
+                  </a:p>
+                </p:txBody>
+              </p:sp>
+              <p:sp>
+                <p:nvSpPr>
+                  <p:cNvPr id="67" name="ZoneTexte 66">
+                    <a:extLst>
+                      <a:ext uri="{FF2B5EF4-FFF2-40B4-BE49-F238E27FC236}">
+                        <a16:creationId xmlns:a16="http://schemas.microsoft.com/office/drawing/2014/main" id="{79FB26EA-837A-40DE-A0BC-3469359E1FB3}"/>
+                      </a:ext>
+                    </a:extLst>
+                  </p:cNvPr>
+                  <p:cNvSpPr txBox="1"/>
+                  <p:nvPr/>
+                </p:nvSpPr>
+                <p:spPr>
+                  <a:xfrm>
+                    <a:off x="11024091" y="3624468"/>
+                    <a:ext cx="2361676" cy="338554"/>
+                  </a:xfrm>
+                  <a:prstGeom prst="rect">
+                    <a:avLst/>
+                  </a:prstGeom>
+                  <a:noFill/>
+                </p:spPr>
+                <p:txBody>
+                  <a:bodyPr wrap="square" rtlCol="0">
+                    <a:spAutoFit/>
+                  </a:bodyPr>
+                  <a:lstStyle/>
+                  <a:p>
+                    <a:r>
+                      <a:rPr lang="fr-FR" sz="1556" spc="-49" dirty="0">
+                        <a:latin typeface="Arial" panose="020B0604020202020204" pitchFamily="34" charset="0"/>
+                        <a:cs typeface="Arial" panose="020B0604020202020204" pitchFamily="34" charset="0"/>
+                      </a:rPr>
+                      <a:t>Other quinolone</a:t>
+                    </a:r>
+                  </a:p>
+                </p:txBody>
+              </p:sp>
+              <p:sp>
+                <p:nvSpPr>
+                  <p:cNvPr id="68" name="ZoneTexte 67">
+                    <a:extLst>
+                      <a:ext uri="{FF2B5EF4-FFF2-40B4-BE49-F238E27FC236}">
+                        <a16:creationId xmlns:a16="http://schemas.microsoft.com/office/drawing/2014/main" id="{8CBB6A58-71ED-4FA4-9B8D-42C6E3A49222}"/>
+                      </a:ext>
+                    </a:extLst>
+                  </p:cNvPr>
+                  <p:cNvSpPr txBox="1"/>
+                  <p:nvPr/>
+                </p:nvSpPr>
+                <p:spPr>
+                  <a:xfrm>
+                    <a:off x="11024092" y="3944887"/>
+                    <a:ext cx="3886872" cy="338554"/>
+                  </a:xfrm>
+                  <a:prstGeom prst="rect">
+                    <a:avLst/>
+                  </a:prstGeom>
+                  <a:noFill/>
+                </p:spPr>
+                <p:txBody>
+                  <a:bodyPr wrap="square" rtlCol="0">
+                    <a:spAutoFit/>
+                  </a:bodyPr>
+                  <a:lstStyle/>
+                  <a:p>
+                    <a:r>
+                      <a:rPr lang="fr-FR" sz="1556" spc="-49" dirty="0" err="1">
+                        <a:latin typeface="Arial" panose="020B0604020202020204" pitchFamily="34" charset="0"/>
+                        <a:cs typeface="Arial" panose="020B0604020202020204" pitchFamily="34" charset="0"/>
+                      </a:rPr>
+                      <a:t>Trimethoprim</a:t>
+                    </a:r>
+                    <a:r>
+                      <a:rPr lang="fr-FR" sz="1556" spc="-49" dirty="0">
+                        <a:latin typeface="Arial" panose="020B0604020202020204" pitchFamily="34" charset="0"/>
+                        <a:cs typeface="Arial" panose="020B0604020202020204" pitchFamily="34" charset="0"/>
+                      </a:rPr>
+                      <a:t>/ </a:t>
+                    </a:r>
+                    <a:r>
+                      <a:rPr lang="fr-FR" sz="1556" spc="-49" dirty="0" err="1">
+                        <a:latin typeface="Arial" panose="020B0604020202020204" pitchFamily="34" charset="0"/>
+                        <a:cs typeface="Arial" panose="020B0604020202020204" pitchFamily="34" charset="0"/>
+                      </a:rPr>
+                      <a:t>Sulfamethoxazole</a:t>
+                    </a:r>
+                    <a:endParaRPr lang="fr-FR" sz="1556" spc="-49" dirty="0">
+                      <a:latin typeface="Arial" panose="020B0604020202020204" pitchFamily="34" charset="0"/>
+                      <a:cs typeface="Arial" panose="020B0604020202020204" pitchFamily="34" charset="0"/>
+                    </a:endParaRPr>
+                  </a:p>
+                </p:txBody>
+              </p:sp>
+            </p:grpSp>
+            <p:sp>
+              <p:nvSpPr>
+                <p:cNvPr id="37" name="ZoneTexte 36">
+                  <a:extLst>
+                    <a:ext uri="{FF2B5EF4-FFF2-40B4-BE49-F238E27FC236}">
+                      <a16:creationId xmlns:a16="http://schemas.microsoft.com/office/drawing/2014/main" id="{9514457B-6E4B-44F4-B392-9182D74FBAA3}"/>
+                    </a:ext>
+                  </a:extLst>
+                </p:cNvPr>
+                <p:cNvSpPr txBox="1"/>
+                <p:nvPr/>
+              </p:nvSpPr>
+              <p:spPr>
+                <a:xfrm>
+                  <a:off x="15474159" y="13042236"/>
+                  <a:ext cx="2242604" cy="410611"/>
+                </a:xfrm>
+                <a:prstGeom prst="rect">
+                  <a:avLst/>
+                </a:prstGeom>
+                <a:noFill/>
+              </p:spPr>
+              <p:txBody>
+                <a:bodyPr wrap="square">
+                  <a:spAutoFit/>
+                </a:bodyPr>
+                <a:lstStyle/>
+                <a:p>
+                  <a:r>
+                    <a:rPr lang="fr-FR" sz="1600" b="1" dirty="0">
+                      <a:solidFill>
+                        <a:sysClr val="windowText" lastClr="000000"/>
+                      </a:solidFill>
+                      <a:latin typeface="Arial" panose="020B0604020202020204" pitchFamily="34" charset="0"/>
+                      <a:cs typeface="Arial" panose="020B0604020202020204" pitchFamily="34" charset="0"/>
+                    </a:rPr>
+                    <a:t>Node Pie chart: </a:t>
+                  </a:r>
+                </a:p>
+              </p:txBody>
+            </p:sp>
+          </p:grpSp>
+          <p:sp>
+            <p:nvSpPr>
+              <p:cNvPr id="35" name="ZoneTexte 34">
+                <a:extLst>
+                  <a:ext uri="{FF2B5EF4-FFF2-40B4-BE49-F238E27FC236}">
+                    <a16:creationId xmlns:a16="http://schemas.microsoft.com/office/drawing/2014/main" id="{268FBE94-9A6B-4923-B8CC-D59023DF9C97}"/>
+                  </a:ext>
+                </a:extLst>
+              </p:cNvPr>
+              <p:cNvSpPr txBox="1"/>
+              <p:nvPr/>
+            </p:nvSpPr>
+            <p:spPr>
+              <a:xfrm>
+                <a:off x="20807128" y="13580619"/>
+                <a:ext cx="3886830" cy="410611"/>
+              </a:xfrm>
+              <a:prstGeom prst="rect">
+                <a:avLst/>
+              </a:prstGeom>
+              <a:noFill/>
+            </p:spPr>
+            <p:txBody>
+              <a:bodyPr wrap="square">
+                <a:spAutoFit/>
+              </a:bodyPr>
+              <a:lstStyle/>
+              <a:p>
+                <a:pPr algn="ctr"/>
+                <a:r>
+                  <a:rPr lang="fr-FR" sz="1600" b="1" dirty="0">
+                    <a:solidFill>
+                      <a:sysClr val="windowText" lastClr="000000"/>
+                    </a:solidFill>
+                    <a:latin typeface="Arial" panose="020B0604020202020204" pitchFamily="34" charset="0"/>
+                    <a:cs typeface="Arial" panose="020B0604020202020204" pitchFamily="34" charset="0"/>
+                  </a:rPr>
+                  <a:t>Node color: antibiotic class</a:t>
+                </a:r>
+              </a:p>
+            </p:txBody>
+          </p:sp>
+        </p:grpSp>
+        <p:grpSp>
+          <p:nvGrpSpPr>
+            <p:cNvPr id="28" name="Groupe 27">
+              <a:extLst>
+                <a:ext uri="{FF2B5EF4-FFF2-40B4-BE49-F238E27FC236}">
+                  <a16:creationId xmlns:a16="http://schemas.microsoft.com/office/drawing/2014/main" id="{67C6BA10-95DC-43B5-8066-7643D72F6921}"/>
+                </a:ext>
+              </a:extLst>
+            </p:cNvPr>
+            <p:cNvGrpSpPr/>
+            <p:nvPr/>
+          </p:nvGrpSpPr>
+          <p:grpSpPr>
+            <a:xfrm>
+              <a:off x="-11761" y="9267786"/>
+              <a:ext cx="6822809" cy="781737"/>
+              <a:chOff x="15364749" y="15235432"/>
+              <a:chExt cx="7017943" cy="804095"/>
+            </a:xfrm>
+          </p:grpSpPr>
+          <p:pic>
+            <p:nvPicPr>
+              <p:cNvPr id="32" name="Image 31">
+                <a:extLst>
+                  <a:ext uri="{FF2B5EF4-FFF2-40B4-BE49-F238E27FC236}">
+                    <a16:creationId xmlns:a16="http://schemas.microsoft.com/office/drawing/2014/main" id="{70A47509-051C-4C9C-B635-DEE151BA11EE}"/>
+                  </a:ext>
+                </a:extLst>
+              </p:cNvPr>
+              <p:cNvPicPr>
+                <a:picLocks noChangeAspect="1"/>
+              </p:cNvPicPr>
+              <p:nvPr/>
+            </p:nvPicPr>
+            <p:blipFill rotWithShape="1">
+              <a:blip r:embed="rId5" cstate="print">
+                <a:extLst>
+                  <a:ext uri="{28A0092B-C50C-407E-A947-70E740481C1C}">
+                    <a14:useLocalDpi xmlns:a14="http://schemas.microsoft.com/office/drawing/2010/main" val="0"/>
+                  </a:ext>
+                </a:extLst>
+              </a:blip>
+              <a:srcRect l="19698" t="44126" r="17367" b="45674"/>
+              <a:stretch/>
+            </p:blipFill>
+            <p:spPr>
+              <a:xfrm>
+                <a:off x="15364749" y="15235432"/>
+                <a:ext cx="7017943" cy="804095"/>
+              </a:xfrm>
+              <a:prstGeom prst="rect">
+                <a:avLst/>
+              </a:prstGeom>
+            </p:spPr>
+          </p:pic>
+          <p:sp>
+            <p:nvSpPr>
+              <p:cNvPr id="33" name="ZoneTexte 32">
+                <a:extLst>
+                  <a:ext uri="{FF2B5EF4-FFF2-40B4-BE49-F238E27FC236}">
+                    <a16:creationId xmlns:a16="http://schemas.microsoft.com/office/drawing/2014/main" id="{69C2B68F-5905-400F-8245-8F420939AC59}"/>
+                  </a:ext>
+                </a:extLst>
+              </p:cNvPr>
+              <p:cNvSpPr txBox="1"/>
+              <p:nvPr/>
+            </p:nvSpPr>
+            <p:spPr>
+              <a:xfrm>
+                <a:off x="16634207" y="15289166"/>
+                <a:ext cx="5258487" cy="410611"/>
+              </a:xfrm>
+              <a:prstGeom prst="rect">
+                <a:avLst/>
+              </a:prstGeom>
+              <a:solidFill>
+                <a:schemeClr val="bg1"/>
+              </a:solidFill>
+            </p:spPr>
+            <p:txBody>
+              <a:bodyPr wrap="square">
+                <a:spAutoFit/>
+              </a:bodyPr>
+              <a:lstStyle/>
+              <a:p>
+                <a:r>
+                  <a:rPr lang="fr-FR" sz="1600" b="1" dirty="0">
+                    <a:solidFill>
+                      <a:sysClr val="windowText" lastClr="000000"/>
+                    </a:solidFill>
+                    <a:latin typeface="Arial" panose="020B0604020202020204" pitchFamily="34" charset="0"/>
+                    <a:cs typeface="Arial" panose="020B0604020202020204" pitchFamily="34" charset="0"/>
+                  </a:rPr>
+                  <a:t>Line color: Association strength (cLift)</a:t>
+                </a:r>
+              </a:p>
+            </p:txBody>
+          </p:sp>
+        </p:grpSp>
+        <p:sp>
+          <p:nvSpPr>
+            <p:cNvPr id="29" name="ZoneTexte 28">
+              <a:extLst>
+                <a:ext uri="{FF2B5EF4-FFF2-40B4-BE49-F238E27FC236}">
+                  <a16:creationId xmlns:a16="http://schemas.microsoft.com/office/drawing/2014/main" id="{58CDDDA8-FAFB-4FD4-91DE-18CD3EC3E003}"/>
+                </a:ext>
+              </a:extLst>
+            </p:cNvPr>
+            <p:cNvSpPr txBox="1"/>
+            <p:nvPr/>
+          </p:nvSpPr>
+          <p:spPr>
+            <a:xfrm>
+              <a:off x="1159456" y="10127417"/>
+              <a:ext cx="5112274" cy="399194"/>
+            </a:xfrm>
+            <a:prstGeom prst="rect">
+              <a:avLst/>
+            </a:prstGeom>
+            <a:solidFill>
+              <a:schemeClr val="bg1"/>
+            </a:solidFill>
+          </p:spPr>
+          <p:txBody>
+            <a:bodyPr wrap="square">
+              <a:spAutoFit/>
+            </a:bodyPr>
+            <a:lstStyle/>
+            <a:p>
+              <a:r>
+                <a:rPr lang="fr-FR" sz="1600" b="1" dirty="0">
+                  <a:solidFill>
+                    <a:sysClr val="windowText" lastClr="000000"/>
+                  </a:solidFill>
+                  <a:latin typeface="Arial" panose="020B0604020202020204" pitchFamily="34" charset="0"/>
+                  <a:cs typeface="Arial" panose="020B0604020202020204" pitchFamily="34" charset="0"/>
+                </a:rPr>
+                <a:t>Line width: Association frequency (eSup)</a:t>
+              </a:r>
+            </a:p>
+          </p:txBody>
+        </p:sp>
+        <p:sp>
+          <p:nvSpPr>
+            <p:cNvPr id="30" name="ZoneTexte 29">
+              <a:extLst>
+                <a:ext uri="{FF2B5EF4-FFF2-40B4-BE49-F238E27FC236}">
+                  <a16:creationId xmlns:a16="http://schemas.microsoft.com/office/drawing/2014/main" id="{B24423FA-A637-40A4-8EB0-E1E135EB758D}"/>
+                </a:ext>
+              </a:extLst>
+            </p:cNvPr>
+            <p:cNvSpPr txBox="1"/>
+            <p:nvPr/>
+          </p:nvSpPr>
+          <p:spPr>
+            <a:xfrm>
+              <a:off x="8034701" y="10146970"/>
+              <a:ext cx="5112274" cy="399194"/>
+            </a:xfrm>
+            <a:prstGeom prst="rect">
+              <a:avLst/>
+            </a:prstGeom>
+            <a:solidFill>
+              <a:schemeClr val="bg1"/>
+            </a:solidFill>
+          </p:spPr>
+          <p:txBody>
+            <a:bodyPr wrap="square">
+              <a:spAutoFit/>
+            </a:bodyPr>
+            <a:lstStyle/>
+            <a:p>
+              <a:r>
+                <a:rPr lang="fr-FR" sz="1600" b="1" dirty="0">
+                  <a:solidFill>
+                    <a:sysClr val="windowText" lastClr="000000"/>
+                  </a:solidFill>
+                  <a:latin typeface="Arial" panose="020B0604020202020204" pitchFamily="34" charset="0"/>
+                  <a:cs typeface="Arial" panose="020B0604020202020204" pitchFamily="34" charset="0"/>
+                </a:rPr>
+                <a:t>Line width: Association frequency (eSup)</a:t>
+              </a:r>
+            </a:p>
+          </p:txBody>
+        </p:sp>
+        <p:sp>
+          <p:nvSpPr>
+            <p:cNvPr id="31" name="ZoneTexte 30">
+              <a:extLst>
+                <a:ext uri="{FF2B5EF4-FFF2-40B4-BE49-F238E27FC236}">
+                  <a16:creationId xmlns:a16="http://schemas.microsoft.com/office/drawing/2014/main" id="{3110A61F-37CF-489E-8A2B-7A2BA3C4735F}"/>
+                </a:ext>
+              </a:extLst>
+            </p:cNvPr>
+            <p:cNvSpPr txBox="1"/>
+            <p:nvPr/>
+          </p:nvSpPr>
+          <p:spPr>
+            <a:xfrm>
+              <a:off x="8156855" y="9308564"/>
+              <a:ext cx="5112274" cy="399194"/>
+            </a:xfrm>
+            <a:prstGeom prst="rect">
+              <a:avLst/>
+            </a:prstGeom>
+            <a:solidFill>
+              <a:schemeClr val="bg1"/>
+            </a:solidFill>
+          </p:spPr>
+          <p:txBody>
+            <a:bodyPr wrap="square">
+              <a:spAutoFit/>
+            </a:bodyPr>
+            <a:lstStyle/>
+            <a:p>
+              <a:r>
+                <a:rPr lang="fr-FR" sz="1600" b="1" dirty="0">
+                  <a:solidFill>
+                    <a:sysClr val="windowText" lastClr="000000"/>
+                  </a:solidFill>
+                  <a:latin typeface="Arial" panose="020B0604020202020204" pitchFamily="34" charset="0"/>
+                  <a:cs typeface="Arial" panose="020B0604020202020204" pitchFamily="34" charset="0"/>
+                </a:rPr>
+                <a:t>Line color: Association strength (cLift)</a:t>
+              </a:r>
+            </a:p>
+          </p:txBody>
+        </p:sp>
+      </p:grpSp>
+      <p:pic>
+        <p:nvPicPr>
+          <p:cNvPr id="4950" name="Image 4949">
+            <a:extLst>
+              <a:ext uri="{FF2B5EF4-FFF2-40B4-BE49-F238E27FC236}">
+                <a16:creationId xmlns:a16="http://schemas.microsoft.com/office/drawing/2014/main" id="{A753E86D-92D2-407F-ADF7-A3F064FA86B5}"/>
+              </a:ext>
+            </a:extLst>
+          </p:cNvPr>
+          <p:cNvPicPr>
+            <a:picLocks noChangeAspect="1"/>
+          </p:cNvPicPr>
+          <p:nvPr/>
+        </p:nvPicPr>
+        <p:blipFill rotWithShape="1">
+          <a:blip r:embed="rId6"/>
+          <a:srcRect t="11581"/>
+          <a:stretch/>
+        </p:blipFill>
+        <p:spPr>
+          <a:xfrm>
+            <a:off x="10099320" y="1201130"/>
+            <a:ext cx="2097571" cy="2043430"/>
+          </a:xfrm>
+          <a:prstGeom prst="rect">
+            <a:avLst/>
+          </a:prstGeom>
+        </p:spPr>
+      </p:pic>
+      <p:pic>
+        <p:nvPicPr>
+          <p:cNvPr id="4952" name="Image 4951">
+            <a:extLst>
+              <a:ext uri="{FF2B5EF4-FFF2-40B4-BE49-F238E27FC236}">
+                <a16:creationId xmlns:a16="http://schemas.microsoft.com/office/drawing/2014/main" id="{3D67CB0E-B94E-4F54-8F8D-05538D33D2B0}"/>
+              </a:ext>
+            </a:extLst>
+          </p:cNvPr>
+          <p:cNvPicPr>
+            <a:picLocks noChangeAspect="1"/>
+          </p:cNvPicPr>
+          <p:nvPr/>
+        </p:nvPicPr>
+        <p:blipFill rotWithShape="1">
+          <a:blip r:embed="rId7"/>
+          <a:srcRect t="11320"/>
+          <a:stretch/>
+        </p:blipFill>
+        <p:spPr>
+          <a:xfrm>
+            <a:off x="7789135" y="1198103"/>
+            <a:ext cx="2097570" cy="2049484"/>
+          </a:xfrm>
+          <a:prstGeom prst="rect">
+            <a:avLst/>
+          </a:prstGeom>
+        </p:spPr>
+      </p:pic>
+      <p:pic>
+        <p:nvPicPr>
+          <p:cNvPr id="4953" name="Image 4952">
+            <a:extLst>
+              <a:ext uri="{FF2B5EF4-FFF2-40B4-BE49-F238E27FC236}">
+                <a16:creationId xmlns:a16="http://schemas.microsoft.com/office/drawing/2014/main" id="{C0B3D75C-89BF-4CC3-A2C7-BFED6FAACA24}"/>
+              </a:ext>
+            </a:extLst>
+          </p:cNvPr>
+          <p:cNvPicPr>
+            <a:picLocks noChangeAspect="1"/>
+          </p:cNvPicPr>
+          <p:nvPr/>
+        </p:nvPicPr>
+        <p:blipFill rotWithShape="1">
+          <a:blip r:embed="rId8"/>
+          <a:srcRect t="12285"/>
+          <a:stretch/>
+        </p:blipFill>
+        <p:spPr>
+          <a:xfrm>
+            <a:off x="5478948" y="1209261"/>
+            <a:ext cx="2097571" cy="2027168"/>
+          </a:xfrm>
+          <a:prstGeom prst="rect">
+            <a:avLst/>
+          </a:prstGeom>
+        </p:spPr>
+      </p:pic>
+      <p:pic>
+        <p:nvPicPr>
+          <p:cNvPr id="4954" name="Image 4953">
+            <a:extLst>
+              <a:ext uri="{FF2B5EF4-FFF2-40B4-BE49-F238E27FC236}">
+                <a16:creationId xmlns:a16="http://schemas.microsoft.com/office/drawing/2014/main" id="{1403F741-952E-4DA2-A3DE-E8CD150C568E}"/>
+              </a:ext>
+            </a:extLst>
+          </p:cNvPr>
+          <p:cNvPicPr>
+            <a:picLocks noChangeAspect="1"/>
+          </p:cNvPicPr>
+          <p:nvPr/>
+        </p:nvPicPr>
+        <p:blipFill rotWithShape="1">
+          <a:blip r:embed="rId9"/>
+          <a:srcRect t="11293"/>
+          <a:stretch/>
+        </p:blipFill>
+        <p:spPr>
+          <a:xfrm>
+            <a:off x="3171274" y="1197794"/>
+            <a:ext cx="2095058" cy="2050103"/>
+          </a:xfrm>
+          <a:prstGeom prst="rect">
+            <a:avLst/>
+          </a:prstGeom>
+        </p:spPr>
+      </p:pic>
+      <p:pic>
+        <p:nvPicPr>
+          <p:cNvPr id="5910" name="Image 5909">
+            <a:extLst>
+              <a:ext uri="{FF2B5EF4-FFF2-40B4-BE49-F238E27FC236}">
+                <a16:creationId xmlns:a16="http://schemas.microsoft.com/office/drawing/2014/main" id="{AC0975C4-CD60-487B-A5EB-A44BFF773742}"/>
+              </a:ext>
+            </a:extLst>
+          </p:cNvPr>
+          <p:cNvPicPr>
+            <a:picLocks noChangeAspect="1"/>
+          </p:cNvPicPr>
+          <p:nvPr/>
+        </p:nvPicPr>
+        <p:blipFill rotWithShape="1">
+          <a:blip r:embed="rId10"/>
+          <a:srcRect t="12285"/>
+          <a:stretch/>
+        </p:blipFill>
+        <p:spPr>
+          <a:xfrm>
+            <a:off x="863600" y="1209261"/>
+            <a:ext cx="2095058" cy="2027168"/>
+          </a:xfrm>
+          <a:prstGeom prst="rect">
+            <a:avLst/>
+          </a:prstGeom>
+        </p:spPr>
+      </p:pic>
     </p:spTree>
     <p:extLst>
       <p:ext uri="{BB962C8B-B14F-4D97-AF65-F5344CB8AC3E}">
